--- a/docs/experiments/subtree-local-reflection/framework.pptx
+++ b/docs/experiments/subtree-local-reflection/framework.pptx
@@ -5,7 +5,7 @@
     <p:sldMasterId id="2147483648" r:id="rId1"/>
   </p:sldMasterIdLst>
   <p:notesMasterIdLst>
-    <p:notesMasterId r:id="rId10"/>
+    <p:notesMasterId r:id="rId12"/>
   </p:notesMasterIdLst>
   <p:sldIdLst>
     <p:sldId id="1288" r:id="rId2"/>
@@ -16,6 +16,8 @@
     <p:sldId id="1300" r:id="rId7"/>
     <p:sldId id="1301" r:id="rId8"/>
     <p:sldId id="1302" r:id="rId9"/>
+    <p:sldId id="1303" r:id="rId10"/>
+    <p:sldId id="1304" r:id="rId11"/>
   </p:sldIdLst>
   <p:sldSz cx="17373600" cy="11522075"/>
   <p:notesSz cx="6858000" cy="9144000"/>
@@ -944,6 +946,86 @@
 </p:notes>
 </file>
 
+<file path=ppt/notesSlides/notesSlide9.xml><?xml version="1.0" encoding="utf-8"?>
+<p:notes xmlns:a="http://schemas.openxmlformats.org/drawingml/2006/main" xmlns:r="http://schemas.openxmlformats.org/officeDocument/2006/relationships" xmlns:p="http://schemas.openxmlformats.org/presentationml/2006/main">
+  <p:cSld>
+    <p:spTree>
+      <p:nvGrpSpPr>
+        <p:cNvPr id="1" name=""/>
+        <p:cNvGrpSpPr/>
+        <p:nvPr/>
+      </p:nvGrpSpPr>
+      <p:grpSpPr>
+        <a:xfrm>
+          <a:off x="0" y="0"/>
+          <a:ext cx="0" cy="0"/>
+          <a:chOff x="0" y="0"/>
+          <a:chExt cx="0" cy="0"/>
+        </a:xfrm>
+      </p:grpSpPr>
+      <p:sp>
+        <p:nvSpPr>
+          <p:cNvPr id="2" name="幻灯片图像占位符 1"/>
+          <p:cNvSpPr>
+            <a:spLocks noGrp="1" noRot="1" noChangeAspect="1"/>
+          </p:cNvSpPr>
+          <p:nvPr>
+            <p:ph type="sldImg"/>
+          </p:nvPr>
+        </p:nvSpPr>
+        <p:spPr/>
+      </p:sp>
+      <p:sp>
+        <p:nvSpPr>
+          <p:cNvPr id="3" name="备注占位符 2"/>
+          <p:cNvSpPr>
+            <a:spLocks noGrp="1"/>
+          </p:cNvSpPr>
+          <p:nvPr>
+            <p:ph type="body" idx="1"/>
+          </p:nvPr>
+        </p:nvSpPr>
+        <p:spPr/>
+        <p:txBody>
+          <a:bodyPr/>
+          <a:lstStyle/>
+          <a:p>
+            <a:endParaRPr lang="zh-CN" altLang="en-US" dirty="0"/>
+          </a:p>
+        </p:txBody>
+      </p:sp>
+      <p:sp>
+        <p:nvSpPr>
+          <p:cNvPr id="4" name="灯片编号占位符 3"/>
+          <p:cNvSpPr>
+            <a:spLocks noGrp="1"/>
+          </p:cNvSpPr>
+          <p:nvPr>
+            <p:ph type="sldNum" sz="quarter" idx="5"/>
+          </p:nvPr>
+        </p:nvSpPr>
+        <p:spPr/>
+        <p:txBody>
+          <a:bodyPr/>
+          <a:lstStyle/>
+          <a:p>
+            <a:endParaRPr lang="zh-CN" altLang="en-US"/>
+          </a:p>
+        </p:txBody>
+      </p:sp>
+    </p:spTree>
+    <p:extLst>
+      <p:ext uri="{BB962C8B-B14F-4D97-AF65-F5344CB8AC3E}">
+        <p14:creationId xmlns:p14="http://schemas.microsoft.com/office/powerpoint/2010/main" val="3800855633"/>
+      </p:ext>
+    </p:extLst>
+  </p:cSld>
+  <p:clrMapOvr>
+    <a:masterClrMapping/>
+  </p:clrMapOvr>
+</p:notes>
+</file>
+
 <file path=ppt/slideLayouts/slideLayout1.xml><?xml version="1.0" encoding="utf-8"?>
 <p:sldLayout xmlns:a="http://schemas.openxmlformats.org/drawingml/2006/main" xmlns:r="http://schemas.openxmlformats.org/officeDocument/2006/relationships" xmlns:p="http://schemas.openxmlformats.org/presentationml/2006/main" type="obj">
   <p:cSld name="1_标题和内容">
@@ -1082,7 +1164,7 @@
           <a:p>
             <a:fld id="{530820CF-B880-4189-942D-D702A7CBA730}" type="datetimeFigureOut">
               <a:rPr lang="zh-CN" altLang="en-US" smtClean="0"/>
-              <a:t>2026/9/24</a:t>
+              <a:t>2026/9/25</a:t>
             </a:fld>
             <a:endParaRPr lang="zh-CN" altLang="en-US" dirty="0"/>
           </a:p>
@@ -17641,6 +17723,5913 @@
 </p:sld>
 </file>
 
+<file path=ppt/slides/slide10.xml><?xml version="1.0" encoding="utf-8"?>
+<p:sld xmlns:a="http://schemas.openxmlformats.org/drawingml/2006/main" xmlns:r="http://schemas.openxmlformats.org/officeDocument/2006/relationships" xmlns:p="http://schemas.openxmlformats.org/presentationml/2006/main">
+  <p:cSld>
+    <p:spTree>
+      <p:nvGrpSpPr>
+        <p:cNvPr id="1" name=""/>
+        <p:cNvGrpSpPr/>
+        <p:nvPr/>
+      </p:nvGrpSpPr>
+      <p:grpSpPr>
+        <a:xfrm>
+          <a:off x="0" y="0"/>
+          <a:ext cx="0" cy="0"/>
+          <a:chOff x="0" y="0"/>
+          <a:chExt cx="0" cy="0"/>
+        </a:xfrm>
+      </p:grpSpPr>
+      <p:sp>
+        <p:nvSpPr>
+          <p:cNvPr id="2" name="TextBox 1"/>
+          <p:cNvSpPr txBox="1"/>
+          <p:nvPr/>
+        </p:nvSpPr>
+        <p:spPr>
+          <a:xfrm>
+            <a:off x="9646920" y="228600"/>
+            <a:ext cx="3291840" cy="694944"/>
+          </a:xfrm>
+          <a:prstGeom prst="rect">
+            <a:avLst/>
+          </a:prstGeom>
+          <a:noFill/>
+        </p:spPr>
+        <p:txBody>
+          <a:bodyPr wrap="square" lIns="18288" tIns="18288" rIns="18288" bIns="18288" anchor="ctr">
+            <a:spAutoFit/>
+          </a:bodyPr>
+          <a:lstStyle/>
+          <a:p>
+            <a:pPr algn="ctr">
+              <a:spcBef>
+                <a:spcPts val="0"/>
+              </a:spcBef>
+              <a:spcAft>
+                <a:spcPts val="0"/>
+              </a:spcAft>
+            </a:pPr>
+            <a:r>
+              <a:rPr sz="3700" b="1">
+                <a:solidFill>
+                  <a:srgbClr val="FFFFFF"/>
+                </a:solidFill>
+                <a:latin typeface="Microsoft YaHei"/>
+              </a:rPr>
+              <a:t>实验结果</a:t>
+            </a:r>
+          </a:p>
+        </p:txBody>
+      </p:sp>
+      <p:sp>
+        <p:nvSpPr>
+          <p:cNvPr id="3" name="Rectangle 2"/>
+          <p:cNvSpPr/>
+          <p:nvPr/>
+        </p:nvSpPr>
+        <p:spPr>
+          <a:xfrm>
+            <a:off x="658368" y="1490472"/>
+            <a:ext cx="36576" cy="530352"/>
+          </a:xfrm>
+          <a:prstGeom prst="rect">
+            <a:avLst/>
+          </a:prstGeom>
+          <a:solidFill>
+            <a:srgbClr val="1D3E62"/>
+          </a:solidFill>
+          <a:ln>
+            <a:noFill/>
+          </a:ln>
+        </p:spPr>
+        <p:style>
+          <a:lnRef idx="1">
+            <a:schemeClr val="accent1"/>
+          </a:lnRef>
+          <a:fillRef idx="3">
+            <a:schemeClr val="accent1"/>
+          </a:fillRef>
+          <a:effectRef idx="2">
+            <a:schemeClr val="accent1"/>
+          </a:effectRef>
+          <a:fontRef idx="minor">
+            <a:schemeClr val="lt1"/>
+          </a:fontRef>
+        </p:style>
+        <p:txBody>
+          <a:bodyPr rtlCol="0" anchor="ctr"/>
+          <a:lstStyle/>
+          <a:p>
+            <a:pPr algn="ctr"/>
+            <a:endParaRPr/>
+          </a:p>
+        </p:txBody>
+      </p:sp>
+      <p:sp>
+        <p:nvSpPr>
+          <p:cNvPr id="4" name="TextBox 3"/>
+          <p:cNvSpPr txBox="1"/>
+          <p:nvPr/>
+        </p:nvSpPr>
+        <p:spPr>
+          <a:xfrm>
+            <a:off x="841248" y="1481328"/>
+            <a:ext cx="15636240" cy="521207"/>
+          </a:xfrm>
+          <a:prstGeom prst="rect">
+            <a:avLst/>
+          </a:prstGeom>
+          <a:noFill/>
+        </p:spPr>
+        <p:txBody>
+          <a:bodyPr wrap="square" lIns="18288" tIns="18288" rIns="18288" bIns="18288" anchor="ctr">
+            <a:spAutoFit/>
+          </a:bodyPr>
+          <a:lstStyle/>
+          <a:p>
+            <a:pPr algn="l">
+              <a:spcBef>
+                <a:spcPts val="0"/>
+              </a:spcBef>
+              <a:spcAft>
+                <a:spcPts val="0"/>
+              </a:spcAft>
+            </a:pPr>
+            <a:r>
+              <a:rPr sz="2750" b="1">
+                <a:solidFill>
+                  <a:srgbClr val="193B5E"/>
+                </a:solidFill>
+                <a:latin typeface="Microsoft YaHei"/>
+              </a:rPr>
+              <a:t>偏好归纳五根：起点更强，最终小幅领先</a:t>
+            </a:r>
+          </a:p>
+        </p:txBody>
+      </p:sp>
+      <p:sp>
+        <p:nvSpPr>
+          <p:cNvPr id="5" name="Rounded Rectangle 4"/>
+          <p:cNvSpPr/>
+          <p:nvPr/>
+        </p:nvSpPr>
+        <p:spPr>
+          <a:xfrm>
+            <a:off x="658368" y="9693891"/>
+            <a:ext cx="7607808" cy="1307592"/>
+          </a:xfrm>
+          <a:prstGeom prst="roundRect">
+            <a:avLst>
+              <a:gd name="adj" fmla="val 12000"/>
+            </a:avLst>
+          </a:prstGeom>
+          <a:solidFill>
+            <a:srgbClr val="EBF6FE"/>
+          </a:solidFill>
+          <a:ln>
+            <a:noFill/>
+          </a:ln>
+        </p:spPr>
+        <p:style>
+          <a:lnRef idx="1">
+            <a:schemeClr val="accent1"/>
+          </a:lnRef>
+          <a:fillRef idx="3">
+            <a:schemeClr val="accent1"/>
+          </a:fillRef>
+          <a:effectRef idx="2">
+            <a:schemeClr val="accent1"/>
+          </a:effectRef>
+          <a:fontRef idx="minor">
+            <a:schemeClr val="lt1"/>
+          </a:fontRef>
+        </p:style>
+        <p:txBody>
+          <a:bodyPr rtlCol="0" anchor="ctr"/>
+          <a:lstStyle/>
+          <a:p>
+            <a:pPr algn="ctr"/>
+            <a:endParaRPr/>
+          </a:p>
+        </p:txBody>
+      </p:sp>
+      <p:sp>
+        <p:nvSpPr>
+          <p:cNvPr id="6" name="TextBox 5"/>
+          <p:cNvSpPr txBox="1"/>
+          <p:nvPr/>
+        </p:nvSpPr>
+        <p:spPr>
+          <a:xfrm>
+            <a:off x="877824" y="9849339"/>
+            <a:ext cx="7150608" cy="301752"/>
+          </a:xfrm>
+          <a:prstGeom prst="rect">
+            <a:avLst/>
+          </a:prstGeom>
+          <a:noFill/>
+        </p:spPr>
+        <p:txBody>
+          <a:bodyPr wrap="square" lIns="18288" tIns="18288" rIns="18288" bIns="18288" anchor="ctr">
+            <a:spAutoFit/>
+          </a:bodyPr>
+          <a:lstStyle/>
+          <a:p>
+            <a:pPr algn="l">
+              <a:spcBef>
+                <a:spcPts val="0"/>
+              </a:spcBef>
+              <a:spcAft>
+                <a:spcPts val="0"/>
+              </a:spcAft>
+            </a:pPr>
+            <a:r>
+              <a:rPr lang="en-US" altLang="zh-CN" sz="1700" dirty="0" err="1">
+                <a:solidFill>
+                  <a:srgbClr val="526A80"/>
+                </a:solidFill>
+                <a:latin typeface="Microsoft YaHei"/>
+              </a:rPr>
+              <a:t>Heldout</a:t>
+            </a:r>
+            <a:r>
+              <a:rPr lang="zh-CN" altLang="en-US" sz="1700" dirty="0">
+                <a:solidFill>
+                  <a:srgbClr val="526A80"/>
+                </a:solidFill>
+                <a:latin typeface="Microsoft YaHei"/>
+              </a:rPr>
+              <a:t>幻觉集</a:t>
+            </a:r>
+            <a:r>
+              <a:rPr sz="1700" b="0" dirty="0">
+                <a:solidFill>
+                  <a:srgbClr val="526A80"/>
+                </a:solidFill>
+                <a:latin typeface="Microsoft YaHei"/>
+              </a:rPr>
+              <a:t> 648 · </a:t>
+            </a:r>
+            <a:r>
+              <a:rPr sz="1700" b="0" dirty="0" err="1">
+                <a:solidFill>
+                  <a:srgbClr val="526A80"/>
+                </a:solidFill>
+                <a:latin typeface="Microsoft YaHei"/>
+              </a:rPr>
+              <a:t>五轮后：预设</a:t>
+            </a:r>
+            <a:r>
+              <a:rPr sz="1700" b="0" dirty="0">
+                <a:solidFill>
+                  <a:srgbClr val="526A80"/>
+                </a:solidFill>
+                <a:latin typeface="Microsoft YaHei"/>
+              </a:rPr>
+              <a:t> → </a:t>
+            </a:r>
+            <a:r>
+              <a:rPr sz="1700" b="0" dirty="0" err="1">
+                <a:solidFill>
+                  <a:srgbClr val="526A80"/>
+                </a:solidFill>
+                <a:latin typeface="Microsoft YaHei"/>
+              </a:rPr>
+              <a:t>归纳</a:t>
+            </a:r>
+            <a:endParaRPr sz="1700" b="0" dirty="0">
+              <a:solidFill>
+                <a:srgbClr val="526A80"/>
+              </a:solidFill>
+              <a:latin typeface="Microsoft YaHei"/>
+            </a:endParaRPr>
+          </a:p>
+        </p:txBody>
+      </p:sp>
+      <p:sp>
+        <p:nvSpPr>
+          <p:cNvPr id="7" name="TextBox 6"/>
+          <p:cNvSpPr txBox="1"/>
+          <p:nvPr/>
+        </p:nvSpPr>
+        <p:spPr>
+          <a:xfrm>
+            <a:off x="877824" y="10224243"/>
+            <a:ext cx="4983480" cy="457200"/>
+          </a:xfrm>
+          <a:prstGeom prst="rect">
+            <a:avLst/>
+          </a:prstGeom>
+          <a:noFill/>
+        </p:spPr>
+        <p:txBody>
+          <a:bodyPr wrap="square" lIns="18288" tIns="18288" rIns="18288" bIns="18288" anchor="ctr">
+            <a:spAutoFit/>
+          </a:bodyPr>
+          <a:lstStyle/>
+          <a:p>
+            <a:pPr algn="l">
+              <a:spcBef>
+                <a:spcPts val="0"/>
+              </a:spcBef>
+              <a:spcAft>
+                <a:spcPts val="0"/>
+              </a:spcAft>
+            </a:pPr>
+            <a:r>
+              <a:rPr sz="2600" b="1" dirty="0">
+                <a:solidFill>
+                  <a:srgbClr val="075B97"/>
+                </a:solidFill>
+                <a:latin typeface="Microsoft YaHei"/>
+              </a:rPr>
+              <a:t>82.41% → 83.33%</a:t>
+            </a:r>
+          </a:p>
+        </p:txBody>
+      </p:sp>
+      <p:sp>
+        <p:nvSpPr>
+          <p:cNvPr id="8" name="TextBox 7"/>
+          <p:cNvSpPr txBox="1"/>
+          <p:nvPr/>
+        </p:nvSpPr>
+        <p:spPr>
+          <a:xfrm>
+            <a:off x="5413248" y="10251675"/>
+            <a:ext cx="2578608" cy="384048"/>
+          </a:xfrm>
+          <a:prstGeom prst="rect">
+            <a:avLst/>
+          </a:prstGeom>
+          <a:noFill/>
+        </p:spPr>
+        <p:txBody>
+          <a:bodyPr wrap="square" lIns="18288" tIns="18288" rIns="18288" bIns="18288" anchor="ctr">
+            <a:spAutoFit/>
+          </a:bodyPr>
+          <a:lstStyle/>
+          <a:p>
+            <a:pPr algn="r">
+              <a:spcBef>
+                <a:spcPts val="0"/>
+              </a:spcBef>
+              <a:spcAft>
+                <a:spcPts val="0"/>
+              </a:spcAft>
+            </a:pPr>
+            <a:r>
+              <a:rPr sz="1770" b="1">
+                <a:solidFill>
+                  <a:srgbClr val="075B97"/>
+                </a:solidFill>
+                <a:latin typeface="Microsoft YaHei"/>
+              </a:rPr>
+              <a:t>+6 条 / +0.93 pp</a:t>
+            </a:r>
+          </a:p>
+        </p:txBody>
+      </p:sp>
+      <p:sp>
+        <p:nvSpPr>
+          <p:cNvPr id="9" name="Rounded Rectangle 8"/>
+          <p:cNvSpPr/>
+          <p:nvPr/>
+        </p:nvSpPr>
+        <p:spPr>
+          <a:xfrm>
+            <a:off x="8604504" y="9693891"/>
+            <a:ext cx="7671816" cy="1307592"/>
+          </a:xfrm>
+          <a:prstGeom prst="roundRect">
+            <a:avLst>
+              <a:gd name="adj" fmla="val 12000"/>
+            </a:avLst>
+          </a:prstGeom>
+          <a:solidFill>
+            <a:srgbClr val="F4F9FD"/>
+          </a:solidFill>
+          <a:ln>
+            <a:noFill/>
+          </a:ln>
+        </p:spPr>
+        <p:style>
+          <a:lnRef idx="1">
+            <a:schemeClr val="accent1"/>
+          </a:lnRef>
+          <a:fillRef idx="3">
+            <a:schemeClr val="accent1"/>
+          </a:fillRef>
+          <a:effectRef idx="2">
+            <a:schemeClr val="accent1"/>
+          </a:effectRef>
+          <a:fontRef idx="minor">
+            <a:schemeClr val="lt1"/>
+          </a:fontRef>
+        </p:style>
+        <p:txBody>
+          <a:bodyPr rtlCol="0" anchor="ctr"/>
+          <a:lstStyle/>
+          <a:p>
+            <a:pPr algn="ctr"/>
+            <a:endParaRPr/>
+          </a:p>
+        </p:txBody>
+      </p:sp>
+      <p:sp>
+        <p:nvSpPr>
+          <p:cNvPr id="10" name="TextBox 9"/>
+          <p:cNvSpPr txBox="1"/>
+          <p:nvPr/>
+        </p:nvSpPr>
+        <p:spPr>
+          <a:xfrm>
+            <a:off x="8814816" y="9849339"/>
+            <a:ext cx="7214616" cy="301752"/>
+          </a:xfrm>
+          <a:prstGeom prst="rect">
+            <a:avLst/>
+          </a:prstGeom>
+          <a:noFill/>
+        </p:spPr>
+        <p:txBody>
+          <a:bodyPr wrap="square" lIns="18288" tIns="18288" rIns="18288" bIns="18288" anchor="ctr">
+            <a:spAutoFit/>
+          </a:bodyPr>
+          <a:lstStyle/>
+          <a:p>
+            <a:pPr algn="l">
+              <a:spcBef>
+                <a:spcPts val="0"/>
+              </a:spcBef>
+              <a:spcAft>
+                <a:spcPts val="0"/>
+              </a:spcAft>
+            </a:pPr>
+            <a:r>
+              <a:rPr sz="1700" b="0" dirty="0">
+                <a:solidFill>
+                  <a:srgbClr val="526A80"/>
+                </a:solidFill>
+                <a:latin typeface="Microsoft YaHei"/>
+              </a:rPr>
+              <a:t>VLRB </a:t>
+            </a:r>
+            <a:r>
+              <a:rPr lang="zh-CN" altLang="en-US" sz="1700" dirty="0">
+                <a:solidFill>
+                  <a:srgbClr val="526A80"/>
+                </a:solidFill>
+                <a:latin typeface="Microsoft YaHei"/>
+              </a:rPr>
+              <a:t>去演化</a:t>
+            </a:r>
+            <a:r>
+              <a:rPr lang="en-US" altLang="zh-CN" sz="1700" dirty="0">
+                <a:solidFill>
+                  <a:srgbClr val="526A80"/>
+                </a:solidFill>
+                <a:latin typeface="Microsoft YaHei"/>
+              </a:rPr>
+              <a:t>100</a:t>
+            </a:r>
+            <a:r>
+              <a:rPr lang="zh-CN" altLang="en-US" sz="1700" dirty="0">
+                <a:solidFill>
+                  <a:srgbClr val="526A80"/>
+                </a:solidFill>
+                <a:latin typeface="Microsoft YaHei"/>
+              </a:rPr>
+              <a:t>条</a:t>
+            </a:r>
+            <a:r>
+              <a:rPr sz="1700" b="0" dirty="0">
+                <a:solidFill>
+                  <a:srgbClr val="526A80"/>
+                </a:solidFill>
+                <a:latin typeface="Microsoft YaHei"/>
+              </a:rPr>
+              <a:t> · </a:t>
+            </a:r>
+            <a:r>
+              <a:rPr sz="1700" b="0" dirty="0" err="1">
+                <a:solidFill>
+                  <a:srgbClr val="526A80"/>
+                </a:solidFill>
+                <a:latin typeface="Microsoft YaHei"/>
+              </a:rPr>
+              <a:t>五轮后：预设</a:t>
+            </a:r>
+            <a:r>
+              <a:rPr sz="1700" b="0" dirty="0">
+                <a:solidFill>
+                  <a:srgbClr val="526A80"/>
+                </a:solidFill>
+                <a:latin typeface="Microsoft YaHei"/>
+              </a:rPr>
+              <a:t> → </a:t>
+            </a:r>
+            <a:r>
+              <a:rPr sz="1700" b="0" dirty="0" err="1">
+                <a:solidFill>
+                  <a:srgbClr val="526A80"/>
+                </a:solidFill>
+                <a:latin typeface="Microsoft YaHei"/>
+              </a:rPr>
+              <a:t>归纳</a:t>
+            </a:r>
+            <a:endParaRPr sz="1700" b="0" dirty="0">
+              <a:solidFill>
+                <a:srgbClr val="526A80"/>
+              </a:solidFill>
+              <a:latin typeface="Microsoft YaHei"/>
+            </a:endParaRPr>
+          </a:p>
+        </p:txBody>
+      </p:sp>
+      <p:sp>
+        <p:nvSpPr>
+          <p:cNvPr id="11" name="TextBox 10"/>
+          <p:cNvSpPr txBox="1"/>
+          <p:nvPr/>
+        </p:nvSpPr>
+        <p:spPr>
+          <a:xfrm>
+            <a:off x="8814816" y="10234321"/>
+            <a:ext cx="5166360" cy="437043"/>
+          </a:xfrm>
+          <a:prstGeom prst="rect">
+            <a:avLst/>
+          </a:prstGeom>
+          <a:noFill/>
+        </p:spPr>
+        <p:txBody>
+          <a:bodyPr wrap="square" lIns="18288" tIns="18288" rIns="18288" bIns="18288" anchor="ctr">
+            <a:spAutoFit/>
+          </a:bodyPr>
+          <a:lstStyle/>
+          <a:p>
+            <a:pPr algn="l">
+              <a:spcBef>
+                <a:spcPts val="0"/>
+              </a:spcBef>
+              <a:spcAft>
+                <a:spcPts val="0"/>
+              </a:spcAft>
+            </a:pPr>
+            <a:r>
+              <a:rPr sz="2600" b="1" dirty="0">
+                <a:solidFill>
+                  <a:srgbClr val="075B97"/>
+                </a:solidFill>
+                <a:latin typeface="Microsoft YaHei"/>
+              </a:rPr>
+              <a:t>7</a:t>
+            </a:r>
+            <a:r>
+              <a:rPr lang="en-US" sz="2600" b="1" dirty="0">
+                <a:solidFill>
+                  <a:srgbClr val="075B97"/>
+                </a:solidFill>
+                <a:latin typeface="Microsoft YaHei"/>
+              </a:rPr>
+              <a:t>2.89</a:t>
+            </a:r>
+            <a:r>
+              <a:rPr sz="2600" b="1" dirty="0">
+                <a:solidFill>
+                  <a:srgbClr val="075B97"/>
+                </a:solidFill>
+                <a:latin typeface="Microsoft YaHei"/>
+              </a:rPr>
+              <a:t>% → 74.</a:t>
+            </a:r>
+            <a:r>
+              <a:rPr lang="en-US" sz="2600" b="1" dirty="0">
+                <a:solidFill>
+                  <a:srgbClr val="075B97"/>
+                </a:solidFill>
+                <a:latin typeface="Microsoft YaHei"/>
+              </a:rPr>
+              <a:t>19</a:t>
+            </a:r>
+            <a:r>
+              <a:rPr sz="2600" b="1" dirty="0">
+                <a:solidFill>
+                  <a:srgbClr val="075B97"/>
+                </a:solidFill>
+                <a:latin typeface="Microsoft YaHei"/>
+              </a:rPr>
+              <a:t>%</a:t>
+            </a:r>
+          </a:p>
+        </p:txBody>
+      </p:sp>
+      <p:sp>
+        <p:nvSpPr>
+          <p:cNvPr id="12" name="TextBox 11"/>
+          <p:cNvSpPr txBox="1"/>
+          <p:nvPr/>
+        </p:nvSpPr>
+        <p:spPr>
+          <a:xfrm>
+            <a:off x="13642848" y="10289041"/>
+            <a:ext cx="2359152" cy="309315"/>
+          </a:xfrm>
+          <a:prstGeom prst="rect">
+            <a:avLst/>
+          </a:prstGeom>
+          <a:noFill/>
+        </p:spPr>
+        <p:txBody>
+          <a:bodyPr wrap="square" lIns="18288" tIns="18288" rIns="18288" bIns="18288" anchor="ctr">
+            <a:spAutoFit/>
+          </a:bodyPr>
+          <a:lstStyle/>
+          <a:p>
+            <a:pPr algn="r">
+              <a:spcBef>
+                <a:spcPts val="0"/>
+              </a:spcBef>
+              <a:spcAft>
+                <a:spcPts val="0"/>
+              </a:spcAft>
+            </a:pPr>
+            <a:r>
+              <a:rPr sz="1770" b="1" dirty="0">
+                <a:solidFill>
+                  <a:srgbClr val="075B97"/>
+                </a:solidFill>
+                <a:latin typeface="Microsoft YaHei"/>
+              </a:rPr>
+              <a:t>+1</a:t>
+            </a:r>
+            <a:r>
+              <a:rPr lang="en-US" sz="1770" b="1" dirty="0">
+                <a:solidFill>
+                  <a:srgbClr val="075B97"/>
+                </a:solidFill>
+                <a:latin typeface="Microsoft YaHei"/>
+              </a:rPr>
+              <a:t>5</a:t>
+            </a:r>
+            <a:r>
+              <a:rPr sz="1770" b="1" dirty="0">
+                <a:solidFill>
+                  <a:srgbClr val="075B97"/>
+                </a:solidFill>
+                <a:latin typeface="Microsoft YaHei"/>
+              </a:rPr>
+              <a:t> 条 / +1.</a:t>
+            </a:r>
+            <a:r>
+              <a:rPr lang="en-US" sz="1770" b="1" dirty="0">
+                <a:solidFill>
+                  <a:srgbClr val="075B97"/>
+                </a:solidFill>
+                <a:latin typeface="Microsoft YaHei"/>
+              </a:rPr>
+              <a:t>3</a:t>
+            </a:r>
+            <a:r>
+              <a:rPr sz="1770" b="1" dirty="0">
+                <a:solidFill>
+                  <a:srgbClr val="075B97"/>
+                </a:solidFill>
+                <a:latin typeface="Microsoft YaHei"/>
+              </a:rPr>
+              <a:t> pp</a:t>
+            </a:r>
+          </a:p>
+        </p:txBody>
+      </p:sp>
+      <p:sp>
+        <p:nvSpPr>
+          <p:cNvPr id="13" name="TextBox 12"/>
+          <p:cNvSpPr txBox="1"/>
+          <p:nvPr/>
+        </p:nvSpPr>
+        <p:spPr>
+          <a:xfrm>
+            <a:off x="841248" y="2560319"/>
+            <a:ext cx="15599663" cy="321627"/>
+          </a:xfrm>
+          <a:prstGeom prst="rect">
+            <a:avLst/>
+          </a:prstGeom>
+          <a:noFill/>
+        </p:spPr>
+        <p:txBody>
+          <a:bodyPr wrap="square" lIns="18288" tIns="18288" rIns="18288" bIns="18288" anchor="ctr">
+            <a:spAutoFit/>
+          </a:bodyPr>
+          <a:lstStyle/>
+          <a:p>
+            <a:pPr algn="l">
+              <a:spcBef>
+                <a:spcPts val="0"/>
+              </a:spcBef>
+              <a:spcAft>
+                <a:spcPts val="0"/>
+              </a:spcAft>
+            </a:pPr>
+            <a:r>
+              <a:rPr sz="1850" b="1" dirty="0">
+                <a:solidFill>
+                  <a:srgbClr val="193B5E"/>
+                </a:solidFill>
+                <a:latin typeface="Microsoft YaHei"/>
+              </a:rPr>
+              <a:t>VLRB Strict </a:t>
+            </a:r>
+            <a:r>
+              <a:rPr sz="1850" b="1" dirty="0" err="1">
+                <a:solidFill>
+                  <a:srgbClr val="193B5E"/>
+                </a:solidFill>
+                <a:latin typeface="Microsoft YaHei"/>
+              </a:rPr>
+              <a:t>ACC（弃权计错</a:t>
+            </a:r>
+            <a:r>
+              <a:rPr sz="1850" b="1" dirty="0">
+                <a:solidFill>
+                  <a:srgbClr val="193B5E"/>
+                </a:solidFill>
+                <a:latin typeface="Microsoft YaHei"/>
+              </a:rPr>
+              <a:t>） · </a:t>
+            </a:r>
+            <a:r>
+              <a:rPr sz="1850" b="1" dirty="0" err="1">
+                <a:solidFill>
+                  <a:srgbClr val="193B5E"/>
+                </a:solidFill>
+                <a:latin typeface="Microsoft YaHei"/>
+              </a:rPr>
+              <a:t>两组均在</a:t>
+            </a:r>
+            <a:r>
+              <a:rPr sz="1850" b="1" dirty="0">
+                <a:solidFill>
+                  <a:srgbClr val="193B5E"/>
+                </a:solidFill>
+                <a:latin typeface="Microsoft YaHei"/>
+              </a:rPr>
+              <a:t> Hallucination100 </a:t>
+            </a:r>
+            <a:r>
+              <a:rPr sz="1850" b="1" dirty="0" err="1">
+                <a:solidFill>
+                  <a:srgbClr val="193B5E"/>
+                </a:solidFill>
+                <a:latin typeface="Microsoft YaHei"/>
+              </a:rPr>
+              <a:t>演化</a:t>
+            </a:r>
+            <a:r>
+              <a:rPr sz="1850" b="1" dirty="0">
+                <a:solidFill>
+                  <a:srgbClr val="193B5E"/>
+                </a:solidFill>
+                <a:latin typeface="Microsoft YaHei"/>
+              </a:rPr>
+              <a:t>；</a:t>
+            </a:r>
+          </a:p>
+        </p:txBody>
+      </p:sp>
+      <p:sp>
+        <p:nvSpPr>
+          <p:cNvPr id="14" name="Rectangle 13"/>
+          <p:cNvSpPr/>
+          <p:nvPr/>
+        </p:nvSpPr>
+        <p:spPr>
+          <a:xfrm>
+            <a:off x="713232" y="3367449"/>
+            <a:ext cx="2916936" cy="713232"/>
+          </a:xfrm>
+          <a:prstGeom prst="rect">
+            <a:avLst/>
+          </a:prstGeom>
+          <a:solidFill>
+            <a:srgbClr val="193B5E"/>
+          </a:solidFill>
+          <a:ln>
+            <a:noFill/>
+          </a:ln>
+        </p:spPr>
+        <p:style>
+          <a:lnRef idx="1">
+            <a:schemeClr val="accent1"/>
+          </a:lnRef>
+          <a:fillRef idx="3">
+            <a:schemeClr val="accent1"/>
+          </a:fillRef>
+          <a:effectRef idx="2">
+            <a:schemeClr val="accent1"/>
+          </a:effectRef>
+          <a:fontRef idx="minor">
+            <a:schemeClr val="lt1"/>
+          </a:fontRef>
+        </p:style>
+        <p:txBody>
+          <a:bodyPr rtlCol="0" anchor="ctr"/>
+          <a:lstStyle/>
+          <a:p>
+            <a:pPr algn="ctr"/>
+            <a:endParaRPr sz="2000"/>
+          </a:p>
+        </p:txBody>
+      </p:sp>
+      <p:sp>
+        <p:nvSpPr>
+          <p:cNvPr id="15" name="TextBox 14"/>
+          <p:cNvSpPr txBox="1"/>
+          <p:nvPr/>
+        </p:nvSpPr>
+        <p:spPr>
+          <a:xfrm>
+            <a:off x="745236" y="3582488"/>
+            <a:ext cx="2852928" cy="283154"/>
+          </a:xfrm>
+          <a:prstGeom prst="rect">
+            <a:avLst/>
+          </a:prstGeom>
+          <a:noFill/>
+        </p:spPr>
+        <p:txBody>
+          <a:bodyPr wrap="square" lIns="18288" tIns="18288" rIns="18288" bIns="18288" anchor="ctr">
+            <a:spAutoFit/>
+          </a:bodyPr>
+          <a:lstStyle/>
+          <a:p>
+            <a:pPr algn="ctr">
+              <a:spcBef>
+                <a:spcPts val="0"/>
+              </a:spcBef>
+              <a:spcAft>
+                <a:spcPts val="0"/>
+              </a:spcAft>
+            </a:pPr>
+            <a:r>
+              <a:rPr sz="1600" b="1">
+                <a:solidFill>
+                  <a:srgbClr val="FFFFFF"/>
+                </a:solidFill>
+                <a:latin typeface="Microsoft YaHei"/>
+              </a:rPr>
+              <a:t>版本 / 阶段</a:t>
+            </a:r>
+          </a:p>
+        </p:txBody>
+      </p:sp>
+      <p:sp>
+        <p:nvSpPr>
+          <p:cNvPr id="16" name="Rectangle 15"/>
+          <p:cNvSpPr/>
+          <p:nvPr/>
+        </p:nvSpPr>
+        <p:spPr>
+          <a:xfrm>
+            <a:off x="3630168" y="3367449"/>
+            <a:ext cx="1783080" cy="713232"/>
+          </a:xfrm>
+          <a:prstGeom prst="rect">
+            <a:avLst/>
+          </a:prstGeom>
+          <a:solidFill>
+            <a:srgbClr val="193B5E"/>
+          </a:solidFill>
+          <a:ln>
+            <a:noFill/>
+          </a:ln>
+        </p:spPr>
+        <p:style>
+          <a:lnRef idx="1">
+            <a:schemeClr val="accent1"/>
+          </a:lnRef>
+          <a:fillRef idx="3">
+            <a:schemeClr val="accent1"/>
+          </a:fillRef>
+          <a:effectRef idx="2">
+            <a:schemeClr val="accent1"/>
+          </a:effectRef>
+          <a:fontRef idx="minor">
+            <a:schemeClr val="lt1"/>
+          </a:fontRef>
+        </p:style>
+        <p:txBody>
+          <a:bodyPr rtlCol="0" anchor="ctr"/>
+          <a:lstStyle/>
+          <a:p>
+            <a:pPr algn="ctr"/>
+            <a:endParaRPr sz="2000"/>
+          </a:p>
+        </p:txBody>
+      </p:sp>
+      <p:sp>
+        <p:nvSpPr>
+          <p:cNvPr id="17" name="TextBox 16"/>
+          <p:cNvSpPr txBox="1"/>
+          <p:nvPr/>
+        </p:nvSpPr>
+        <p:spPr>
+          <a:xfrm>
+            <a:off x="3662172" y="3459377"/>
+            <a:ext cx="1719072" cy="529376"/>
+          </a:xfrm>
+          <a:prstGeom prst="rect">
+            <a:avLst/>
+          </a:prstGeom>
+          <a:noFill/>
+        </p:spPr>
+        <p:txBody>
+          <a:bodyPr wrap="square" lIns="18288" tIns="18288" rIns="18288" bIns="18288" anchor="ctr">
+            <a:spAutoFit/>
+          </a:bodyPr>
+          <a:lstStyle/>
+          <a:p>
+            <a:pPr algn="ctr">
+              <a:spcBef>
+                <a:spcPts val="0"/>
+              </a:spcBef>
+              <a:spcAft>
+                <a:spcPts val="0"/>
+              </a:spcAft>
+            </a:pPr>
+            <a:r>
+              <a:rPr sz="1600" b="1">
+                <a:solidFill>
+                  <a:srgbClr val="FFFFFF"/>
+                </a:solidFill>
+                <a:latin typeface="Microsoft YaHei"/>
+              </a:rPr>
+              <a:t>VLRB 全量</a:t>
+            </a:r>
+          </a:p>
+          <a:p>
+            <a:pPr algn="ctr">
+              <a:spcBef>
+                <a:spcPts val="0"/>
+              </a:spcBef>
+              <a:spcAft>
+                <a:spcPts val="0"/>
+              </a:spcAft>
+            </a:pPr>
+            <a:r>
+              <a:rPr sz="1600" b="1">
+                <a:solidFill>
+                  <a:srgbClr val="FFFFFF"/>
+                </a:solidFill>
+                <a:latin typeface="Microsoft YaHei"/>
+              </a:rPr>
+              <a:t>1247</a:t>
+            </a:r>
+          </a:p>
+        </p:txBody>
+      </p:sp>
+      <p:sp>
+        <p:nvSpPr>
+          <p:cNvPr id="18" name="Rectangle 17"/>
+          <p:cNvSpPr/>
+          <p:nvPr/>
+        </p:nvSpPr>
+        <p:spPr>
+          <a:xfrm>
+            <a:off x="5413248" y="3367449"/>
+            <a:ext cx="1856231" cy="713232"/>
+          </a:xfrm>
+          <a:prstGeom prst="rect">
+            <a:avLst/>
+          </a:prstGeom>
+          <a:solidFill>
+            <a:srgbClr val="193B5E"/>
+          </a:solidFill>
+          <a:ln>
+            <a:noFill/>
+          </a:ln>
+        </p:spPr>
+        <p:style>
+          <a:lnRef idx="1">
+            <a:schemeClr val="accent1"/>
+          </a:lnRef>
+          <a:fillRef idx="3">
+            <a:schemeClr val="accent1"/>
+          </a:fillRef>
+          <a:effectRef idx="2">
+            <a:schemeClr val="accent1"/>
+          </a:effectRef>
+          <a:fontRef idx="minor">
+            <a:schemeClr val="lt1"/>
+          </a:fontRef>
+        </p:style>
+        <p:txBody>
+          <a:bodyPr rtlCol="0" anchor="ctr"/>
+          <a:lstStyle/>
+          <a:p>
+            <a:pPr algn="ctr"/>
+            <a:endParaRPr sz="2000"/>
+          </a:p>
+        </p:txBody>
+      </p:sp>
+      <p:sp>
+        <p:nvSpPr>
+          <p:cNvPr id="19" name="TextBox 18"/>
+          <p:cNvSpPr txBox="1"/>
+          <p:nvPr/>
+        </p:nvSpPr>
+        <p:spPr>
+          <a:xfrm>
+            <a:off x="5445252" y="3459377"/>
+            <a:ext cx="1792223" cy="529376"/>
+          </a:xfrm>
+          <a:prstGeom prst="rect">
+            <a:avLst/>
+          </a:prstGeom>
+          <a:noFill/>
+        </p:spPr>
+        <p:txBody>
+          <a:bodyPr wrap="square" lIns="18288" tIns="18288" rIns="18288" bIns="18288" anchor="ctr">
+            <a:spAutoFit/>
+          </a:bodyPr>
+          <a:lstStyle/>
+          <a:p>
+            <a:pPr algn="ctr">
+              <a:spcBef>
+                <a:spcPts val="0"/>
+              </a:spcBef>
+              <a:spcAft>
+                <a:spcPts val="0"/>
+              </a:spcAft>
+            </a:pPr>
+            <a:r>
+              <a:rPr sz="1600" b="1" dirty="0">
+                <a:solidFill>
+                  <a:srgbClr val="FFFFFF"/>
+                </a:solidFill>
+                <a:latin typeface="Microsoft YaHei"/>
+              </a:rPr>
+              <a:t>去</a:t>
+            </a:r>
+            <a:r>
+              <a:rPr lang="zh-CN" altLang="en-US" sz="1600" b="1" dirty="0">
+                <a:solidFill>
+                  <a:srgbClr val="FFFFFF"/>
+                </a:solidFill>
+                <a:latin typeface="Microsoft YaHei"/>
+              </a:rPr>
+              <a:t>演化</a:t>
+            </a:r>
+            <a:r>
+              <a:rPr sz="1600" b="1" dirty="0">
+                <a:solidFill>
+                  <a:srgbClr val="FFFFFF"/>
+                </a:solidFill>
+                <a:latin typeface="Microsoft YaHei"/>
+              </a:rPr>
+              <a:t> 100</a:t>
+            </a:r>
+          </a:p>
+          <a:p>
+            <a:pPr algn="ctr">
+              <a:spcBef>
+                <a:spcPts val="0"/>
+              </a:spcBef>
+              <a:spcAft>
+                <a:spcPts val="0"/>
+              </a:spcAft>
+            </a:pPr>
+            <a:r>
+              <a:rPr sz="1600" b="1" dirty="0">
+                <a:solidFill>
+                  <a:srgbClr val="FFFFFF"/>
+                </a:solidFill>
+                <a:latin typeface="Microsoft YaHei"/>
+              </a:rPr>
+              <a:t>1147</a:t>
+            </a:r>
+          </a:p>
+        </p:txBody>
+      </p:sp>
+      <p:sp>
+        <p:nvSpPr>
+          <p:cNvPr id="20" name="Rectangle 19"/>
+          <p:cNvSpPr/>
+          <p:nvPr/>
+        </p:nvSpPr>
+        <p:spPr>
+          <a:xfrm>
+            <a:off x="7269480" y="3367449"/>
+            <a:ext cx="1307592" cy="713232"/>
+          </a:xfrm>
+          <a:prstGeom prst="rect">
+            <a:avLst/>
+          </a:prstGeom>
+          <a:solidFill>
+            <a:srgbClr val="193B5E"/>
+          </a:solidFill>
+          <a:ln>
+            <a:noFill/>
+          </a:ln>
+        </p:spPr>
+        <p:style>
+          <a:lnRef idx="1">
+            <a:schemeClr val="accent1"/>
+          </a:lnRef>
+          <a:fillRef idx="3">
+            <a:schemeClr val="accent1"/>
+          </a:fillRef>
+          <a:effectRef idx="2">
+            <a:schemeClr val="accent1"/>
+          </a:effectRef>
+          <a:fontRef idx="minor">
+            <a:schemeClr val="lt1"/>
+          </a:fontRef>
+        </p:style>
+        <p:txBody>
+          <a:bodyPr rtlCol="0" anchor="ctr"/>
+          <a:lstStyle/>
+          <a:p>
+            <a:pPr algn="ctr"/>
+            <a:endParaRPr sz="2000"/>
+          </a:p>
+        </p:txBody>
+      </p:sp>
+      <p:sp>
+        <p:nvSpPr>
+          <p:cNvPr id="21" name="TextBox 20"/>
+          <p:cNvSpPr txBox="1"/>
+          <p:nvPr/>
+        </p:nvSpPr>
+        <p:spPr>
+          <a:xfrm>
+            <a:off x="7301484" y="3459377"/>
+            <a:ext cx="1243584" cy="529376"/>
+          </a:xfrm>
+          <a:prstGeom prst="rect">
+            <a:avLst/>
+          </a:prstGeom>
+          <a:noFill/>
+        </p:spPr>
+        <p:txBody>
+          <a:bodyPr wrap="square" lIns="18288" tIns="18288" rIns="18288" bIns="18288" anchor="ctr">
+            <a:spAutoFit/>
+          </a:bodyPr>
+          <a:lstStyle/>
+          <a:p>
+            <a:pPr algn="ctr">
+              <a:spcBef>
+                <a:spcPts val="0"/>
+              </a:spcBef>
+              <a:spcAft>
+                <a:spcPts val="0"/>
+              </a:spcAft>
+            </a:pPr>
+            <a:r>
+              <a:rPr lang="zh-CN" altLang="en-US" sz="1600" b="1" dirty="0">
+                <a:solidFill>
+                  <a:srgbClr val="FFFFFF"/>
+                </a:solidFill>
+                <a:latin typeface="Microsoft YaHei"/>
+              </a:rPr>
+              <a:t>演化</a:t>
+            </a:r>
+            <a:r>
+              <a:rPr sz="1600" b="1" dirty="0">
+                <a:solidFill>
+                  <a:srgbClr val="FFFFFF"/>
+                </a:solidFill>
+                <a:latin typeface="Microsoft YaHei"/>
+              </a:rPr>
+              <a:t>集</a:t>
+            </a:r>
+          </a:p>
+          <a:p>
+            <a:pPr algn="ctr">
+              <a:spcBef>
+                <a:spcPts val="0"/>
+              </a:spcBef>
+              <a:spcAft>
+                <a:spcPts val="0"/>
+              </a:spcAft>
+            </a:pPr>
+            <a:r>
+              <a:rPr sz="1600" b="1" dirty="0">
+                <a:solidFill>
+                  <a:srgbClr val="FFFFFF"/>
+                </a:solidFill>
+                <a:latin typeface="Microsoft YaHei"/>
+              </a:rPr>
+              <a:t>100</a:t>
+            </a:r>
+          </a:p>
+        </p:txBody>
+      </p:sp>
+      <p:sp>
+        <p:nvSpPr>
+          <p:cNvPr id="22" name="Rectangle 21"/>
+          <p:cNvSpPr/>
+          <p:nvPr/>
+        </p:nvSpPr>
+        <p:spPr>
+          <a:xfrm>
+            <a:off x="8577072" y="3367449"/>
+            <a:ext cx="1993392" cy="713232"/>
+          </a:xfrm>
+          <a:prstGeom prst="rect">
+            <a:avLst/>
+          </a:prstGeom>
+          <a:solidFill>
+            <a:srgbClr val="193B5E"/>
+          </a:solidFill>
+          <a:ln>
+            <a:noFill/>
+          </a:ln>
+        </p:spPr>
+        <p:style>
+          <a:lnRef idx="1">
+            <a:schemeClr val="accent1"/>
+          </a:lnRef>
+          <a:fillRef idx="3">
+            <a:schemeClr val="accent1"/>
+          </a:fillRef>
+          <a:effectRef idx="2">
+            <a:schemeClr val="accent1"/>
+          </a:effectRef>
+          <a:fontRef idx="minor">
+            <a:schemeClr val="lt1"/>
+          </a:fontRef>
+        </p:style>
+        <p:txBody>
+          <a:bodyPr rtlCol="0" anchor="ctr"/>
+          <a:lstStyle/>
+          <a:p>
+            <a:pPr algn="ctr"/>
+            <a:endParaRPr sz="2000"/>
+          </a:p>
+        </p:txBody>
+      </p:sp>
+      <p:sp>
+        <p:nvSpPr>
+          <p:cNvPr id="23" name="TextBox 22"/>
+          <p:cNvSpPr txBox="1"/>
+          <p:nvPr/>
+        </p:nvSpPr>
+        <p:spPr>
+          <a:xfrm>
+            <a:off x="8609076" y="3459377"/>
+            <a:ext cx="1929384" cy="529376"/>
+          </a:xfrm>
+          <a:prstGeom prst="rect">
+            <a:avLst/>
+          </a:prstGeom>
+          <a:noFill/>
+        </p:spPr>
+        <p:txBody>
+          <a:bodyPr wrap="square" lIns="18288" tIns="18288" rIns="18288" bIns="18288" anchor="ctr">
+            <a:spAutoFit/>
+          </a:bodyPr>
+          <a:lstStyle/>
+          <a:p>
+            <a:pPr algn="ctr">
+              <a:spcBef>
+                <a:spcPts val="0"/>
+              </a:spcBef>
+              <a:spcAft>
+                <a:spcPts val="0"/>
+              </a:spcAft>
+            </a:pPr>
+            <a:r>
+              <a:rPr lang="en-US" altLang="zh-CN" sz="1600" b="1" dirty="0" err="1">
+                <a:solidFill>
+                  <a:srgbClr val="FFFFFF"/>
+                </a:solidFill>
+                <a:latin typeface="Microsoft YaHei"/>
+              </a:rPr>
+              <a:t>heldout</a:t>
+            </a:r>
+            <a:r>
+              <a:rPr lang="zh-CN" altLang="en-US" sz="1600" b="1" dirty="0">
+                <a:solidFill>
+                  <a:srgbClr val="FFFFFF"/>
+                </a:solidFill>
+                <a:latin typeface="Microsoft YaHei"/>
+              </a:rPr>
+              <a:t>幻觉集</a:t>
+            </a:r>
+          </a:p>
+          <a:p>
+            <a:pPr algn="ctr">
+              <a:spcBef>
+                <a:spcPts val="0"/>
+              </a:spcBef>
+              <a:spcAft>
+                <a:spcPts val="0"/>
+              </a:spcAft>
+            </a:pPr>
+            <a:r>
+              <a:rPr sz="1600" b="1" dirty="0">
+                <a:solidFill>
+                  <a:srgbClr val="FFFFFF"/>
+                </a:solidFill>
+                <a:latin typeface="Microsoft YaHei"/>
+              </a:rPr>
+              <a:t>648</a:t>
+            </a:r>
+          </a:p>
+        </p:txBody>
+      </p:sp>
+      <p:sp>
+        <p:nvSpPr>
+          <p:cNvPr id="24" name="Rectangle 23"/>
+          <p:cNvSpPr/>
+          <p:nvPr/>
+        </p:nvSpPr>
+        <p:spPr>
+          <a:xfrm>
+            <a:off x="10570464" y="3367449"/>
+            <a:ext cx="1554480" cy="713232"/>
+          </a:xfrm>
+          <a:prstGeom prst="rect">
+            <a:avLst/>
+          </a:prstGeom>
+          <a:solidFill>
+            <a:srgbClr val="193B5E"/>
+          </a:solidFill>
+          <a:ln>
+            <a:noFill/>
+          </a:ln>
+        </p:spPr>
+        <p:style>
+          <a:lnRef idx="1">
+            <a:schemeClr val="accent1"/>
+          </a:lnRef>
+          <a:fillRef idx="3">
+            <a:schemeClr val="accent1"/>
+          </a:fillRef>
+          <a:effectRef idx="2">
+            <a:schemeClr val="accent1"/>
+          </a:effectRef>
+          <a:fontRef idx="minor">
+            <a:schemeClr val="lt1"/>
+          </a:fontRef>
+        </p:style>
+        <p:txBody>
+          <a:bodyPr rtlCol="0" anchor="ctr"/>
+          <a:lstStyle/>
+          <a:p>
+            <a:pPr algn="ctr"/>
+            <a:endParaRPr sz="2000"/>
+          </a:p>
+        </p:txBody>
+      </p:sp>
+      <p:sp>
+        <p:nvSpPr>
+          <p:cNvPr id="25" name="TextBox 24"/>
+          <p:cNvSpPr txBox="1"/>
+          <p:nvPr/>
+        </p:nvSpPr>
+        <p:spPr>
+          <a:xfrm>
+            <a:off x="10602468" y="3459377"/>
+            <a:ext cx="1490472" cy="529376"/>
+          </a:xfrm>
+          <a:prstGeom prst="rect">
+            <a:avLst/>
+          </a:prstGeom>
+          <a:noFill/>
+        </p:spPr>
+        <p:txBody>
+          <a:bodyPr wrap="square" lIns="18288" tIns="18288" rIns="18288" bIns="18288" anchor="ctr">
+            <a:spAutoFit/>
+          </a:bodyPr>
+          <a:lstStyle/>
+          <a:p>
+            <a:pPr algn="ctr">
+              <a:spcBef>
+                <a:spcPts val="0"/>
+              </a:spcBef>
+              <a:spcAft>
+                <a:spcPts val="0"/>
+              </a:spcAft>
+            </a:pPr>
+            <a:r>
+              <a:rPr sz="1600" b="1">
+                <a:solidFill>
+                  <a:srgbClr val="FFFFFF"/>
+                </a:solidFill>
+                <a:latin typeface="Microsoft YaHei"/>
+              </a:rPr>
+              <a:t>General</a:t>
+            </a:r>
+          </a:p>
+          <a:p>
+            <a:pPr algn="ctr">
+              <a:spcBef>
+                <a:spcPts val="0"/>
+              </a:spcBef>
+              <a:spcAft>
+                <a:spcPts val="0"/>
+              </a:spcAft>
+            </a:pPr>
+            <a:r>
+              <a:rPr sz="1600" b="1">
+                <a:solidFill>
+                  <a:srgbClr val="FFFFFF"/>
+                </a:solidFill>
+                <a:latin typeface="Microsoft YaHei"/>
+              </a:rPr>
+              <a:t>181</a:t>
+            </a:r>
+          </a:p>
+        </p:txBody>
+      </p:sp>
+      <p:sp>
+        <p:nvSpPr>
+          <p:cNvPr id="26" name="Rectangle 25"/>
+          <p:cNvSpPr/>
+          <p:nvPr/>
+        </p:nvSpPr>
+        <p:spPr>
+          <a:xfrm>
+            <a:off x="12124944" y="3367449"/>
+            <a:ext cx="2167128" cy="713232"/>
+          </a:xfrm>
+          <a:prstGeom prst="rect">
+            <a:avLst/>
+          </a:prstGeom>
+          <a:solidFill>
+            <a:srgbClr val="193B5E"/>
+          </a:solidFill>
+          <a:ln>
+            <a:noFill/>
+          </a:ln>
+        </p:spPr>
+        <p:style>
+          <a:lnRef idx="1">
+            <a:schemeClr val="accent1"/>
+          </a:lnRef>
+          <a:fillRef idx="3">
+            <a:schemeClr val="accent1"/>
+          </a:fillRef>
+          <a:effectRef idx="2">
+            <a:schemeClr val="accent1"/>
+          </a:effectRef>
+          <a:fontRef idx="minor">
+            <a:schemeClr val="lt1"/>
+          </a:fontRef>
+        </p:style>
+        <p:txBody>
+          <a:bodyPr rtlCol="0" anchor="ctr"/>
+          <a:lstStyle/>
+          <a:p>
+            <a:pPr algn="ctr"/>
+            <a:endParaRPr sz="2000"/>
+          </a:p>
+        </p:txBody>
+      </p:sp>
+      <p:sp>
+        <p:nvSpPr>
+          <p:cNvPr id="27" name="TextBox 26"/>
+          <p:cNvSpPr txBox="1"/>
+          <p:nvPr/>
+        </p:nvSpPr>
+        <p:spPr>
+          <a:xfrm>
+            <a:off x="12156948" y="3459377"/>
+            <a:ext cx="2103120" cy="529376"/>
+          </a:xfrm>
+          <a:prstGeom prst="rect">
+            <a:avLst/>
+          </a:prstGeom>
+          <a:noFill/>
+        </p:spPr>
+        <p:txBody>
+          <a:bodyPr wrap="square" lIns="18288" tIns="18288" rIns="18288" bIns="18288" anchor="ctr">
+            <a:spAutoFit/>
+          </a:bodyPr>
+          <a:lstStyle/>
+          <a:p>
+            <a:pPr algn="ctr">
+              <a:spcBef>
+                <a:spcPts val="0"/>
+              </a:spcBef>
+              <a:spcAft>
+                <a:spcPts val="0"/>
+              </a:spcAft>
+            </a:pPr>
+            <a:r>
+              <a:rPr sz="1600" b="1">
+                <a:solidFill>
+                  <a:srgbClr val="FFFFFF"/>
+                </a:solidFill>
+                <a:latin typeface="Microsoft YaHei"/>
+              </a:rPr>
+              <a:t>Hallucination</a:t>
+            </a:r>
+          </a:p>
+          <a:p>
+            <a:pPr algn="ctr">
+              <a:spcBef>
+                <a:spcPts val="0"/>
+              </a:spcBef>
+              <a:spcAft>
+                <a:spcPts val="0"/>
+              </a:spcAft>
+            </a:pPr>
+            <a:r>
+              <a:rPr sz="1600" b="1">
+                <a:solidFill>
+                  <a:srgbClr val="FFFFFF"/>
+                </a:solidFill>
+                <a:latin typeface="Microsoft YaHei"/>
+              </a:rPr>
+              <a:t>749</a:t>
+            </a:r>
+          </a:p>
+        </p:txBody>
+      </p:sp>
+      <p:sp>
+        <p:nvSpPr>
+          <p:cNvPr id="28" name="Rectangle 27"/>
+          <p:cNvSpPr/>
+          <p:nvPr/>
+        </p:nvSpPr>
+        <p:spPr>
+          <a:xfrm>
+            <a:off x="14292072" y="3367449"/>
+            <a:ext cx="2048256" cy="713232"/>
+          </a:xfrm>
+          <a:prstGeom prst="rect">
+            <a:avLst/>
+          </a:prstGeom>
+          <a:solidFill>
+            <a:srgbClr val="193B5E"/>
+          </a:solidFill>
+          <a:ln>
+            <a:noFill/>
+          </a:ln>
+        </p:spPr>
+        <p:style>
+          <a:lnRef idx="1">
+            <a:schemeClr val="accent1"/>
+          </a:lnRef>
+          <a:fillRef idx="3">
+            <a:schemeClr val="accent1"/>
+          </a:fillRef>
+          <a:effectRef idx="2">
+            <a:schemeClr val="accent1"/>
+          </a:effectRef>
+          <a:fontRef idx="minor">
+            <a:schemeClr val="lt1"/>
+          </a:fontRef>
+        </p:style>
+        <p:txBody>
+          <a:bodyPr rtlCol="0" anchor="ctr"/>
+          <a:lstStyle/>
+          <a:p>
+            <a:pPr algn="ctr"/>
+            <a:endParaRPr sz="2000"/>
+          </a:p>
+        </p:txBody>
+      </p:sp>
+      <p:sp>
+        <p:nvSpPr>
+          <p:cNvPr id="29" name="TextBox 28"/>
+          <p:cNvSpPr txBox="1"/>
+          <p:nvPr/>
+        </p:nvSpPr>
+        <p:spPr>
+          <a:xfrm>
+            <a:off x="14324076" y="3459377"/>
+            <a:ext cx="1984248" cy="529376"/>
+          </a:xfrm>
+          <a:prstGeom prst="rect">
+            <a:avLst/>
+          </a:prstGeom>
+          <a:noFill/>
+        </p:spPr>
+        <p:txBody>
+          <a:bodyPr wrap="square" lIns="18288" tIns="18288" rIns="18288" bIns="18288" anchor="ctr">
+            <a:spAutoFit/>
+          </a:bodyPr>
+          <a:lstStyle/>
+          <a:p>
+            <a:pPr algn="ctr">
+              <a:spcBef>
+                <a:spcPts val="0"/>
+              </a:spcBef>
+              <a:spcAft>
+                <a:spcPts val="0"/>
+              </a:spcAft>
+            </a:pPr>
+            <a:r>
+              <a:rPr sz="1600" b="1">
+                <a:solidFill>
+                  <a:srgbClr val="FFFFFF"/>
+                </a:solidFill>
+                <a:latin typeface="Microsoft YaHei"/>
+              </a:rPr>
+              <a:t>Reasoning</a:t>
+            </a:r>
+          </a:p>
+          <a:p>
+            <a:pPr algn="ctr">
+              <a:spcBef>
+                <a:spcPts val="0"/>
+              </a:spcBef>
+              <a:spcAft>
+                <a:spcPts val="0"/>
+              </a:spcAft>
+            </a:pPr>
+            <a:r>
+              <a:rPr sz="1600" b="1">
+                <a:solidFill>
+                  <a:srgbClr val="FFFFFF"/>
+                </a:solidFill>
+                <a:latin typeface="Microsoft YaHei"/>
+              </a:rPr>
+              <a:t>317</a:t>
+            </a:r>
+          </a:p>
+        </p:txBody>
+      </p:sp>
+      <p:sp>
+        <p:nvSpPr>
+          <p:cNvPr id="30" name="Rectangle 29"/>
+          <p:cNvSpPr/>
+          <p:nvPr/>
+        </p:nvSpPr>
+        <p:spPr>
+          <a:xfrm>
+            <a:off x="713232" y="4080681"/>
+            <a:ext cx="2916936" cy="955547"/>
+          </a:xfrm>
+          <a:prstGeom prst="rect">
+            <a:avLst/>
+          </a:prstGeom>
+          <a:solidFill>
+            <a:srgbClr val="FFFFFF"/>
+          </a:solidFill>
+          <a:ln w="8890">
+            <a:solidFill>
+              <a:srgbClr val="D2E1ED"/>
+            </a:solidFill>
+          </a:ln>
+        </p:spPr>
+        <p:style>
+          <a:lnRef idx="1">
+            <a:schemeClr val="accent1"/>
+          </a:lnRef>
+          <a:fillRef idx="3">
+            <a:schemeClr val="accent1"/>
+          </a:fillRef>
+          <a:effectRef idx="2">
+            <a:schemeClr val="accent1"/>
+          </a:effectRef>
+          <a:fontRef idx="minor">
+            <a:schemeClr val="lt1"/>
+          </a:fontRef>
+        </p:style>
+        <p:txBody>
+          <a:bodyPr rtlCol="0" anchor="ctr"/>
+          <a:lstStyle/>
+          <a:p>
+            <a:pPr algn="ctr"/>
+            <a:endParaRPr sz="2000"/>
+          </a:p>
+        </p:txBody>
+      </p:sp>
+      <p:sp>
+        <p:nvSpPr>
+          <p:cNvPr id="31" name="Rectangle 30"/>
+          <p:cNvSpPr/>
+          <p:nvPr/>
+        </p:nvSpPr>
+        <p:spPr>
+          <a:xfrm>
+            <a:off x="3630168" y="4080681"/>
+            <a:ext cx="1783080" cy="955547"/>
+          </a:xfrm>
+          <a:prstGeom prst="rect">
+            <a:avLst/>
+          </a:prstGeom>
+          <a:solidFill>
+            <a:srgbClr val="FFFFFF"/>
+          </a:solidFill>
+          <a:ln w="8890">
+            <a:solidFill>
+              <a:srgbClr val="D2E1ED"/>
+            </a:solidFill>
+          </a:ln>
+        </p:spPr>
+        <p:style>
+          <a:lnRef idx="1">
+            <a:schemeClr val="accent1"/>
+          </a:lnRef>
+          <a:fillRef idx="3">
+            <a:schemeClr val="accent1"/>
+          </a:fillRef>
+          <a:effectRef idx="2">
+            <a:schemeClr val="accent1"/>
+          </a:effectRef>
+          <a:fontRef idx="minor">
+            <a:schemeClr val="lt1"/>
+          </a:fontRef>
+        </p:style>
+        <p:txBody>
+          <a:bodyPr rtlCol="0" anchor="ctr"/>
+          <a:lstStyle/>
+          <a:p>
+            <a:pPr algn="ctr"/>
+            <a:endParaRPr/>
+          </a:p>
+        </p:txBody>
+      </p:sp>
+      <p:sp>
+        <p:nvSpPr>
+          <p:cNvPr id="32" name="Rectangle 31"/>
+          <p:cNvSpPr/>
+          <p:nvPr/>
+        </p:nvSpPr>
+        <p:spPr>
+          <a:xfrm>
+            <a:off x="5413248" y="4080681"/>
+            <a:ext cx="1856231" cy="955547"/>
+          </a:xfrm>
+          <a:prstGeom prst="rect">
+            <a:avLst/>
+          </a:prstGeom>
+          <a:solidFill>
+            <a:srgbClr val="FFFFFF"/>
+          </a:solidFill>
+          <a:ln w="8890">
+            <a:solidFill>
+              <a:srgbClr val="D2E1ED"/>
+            </a:solidFill>
+          </a:ln>
+        </p:spPr>
+        <p:style>
+          <a:lnRef idx="1">
+            <a:schemeClr val="accent1"/>
+          </a:lnRef>
+          <a:fillRef idx="3">
+            <a:schemeClr val="accent1"/>
+          </a:fillRef>
+          <a:effectRef idx="2">
+            <a:schemeClr val="accent1"/>
+          </a:effectRef>
+          <a:fontRef idx="minor">
+            <a:schemeClr val="lt1"/>
+          </a:fontRef>
+        </p:style>
+        <p:txBody>
+          <a:bodyPr rtlCol="0" anchor="ctr"/>
+          <a:lstStyle/>
+          <a:p>
+            <a:pPr algn="ctr"/>
+            <a:endParaRPr/>
+          </a:p>
+        </p:txBody>
+      </p:sp>
+      <p:sp>
+        <p:nvSpPr>
+          <p:cNvPr id="33" name="Rectangle 32"/>
+          <p:cNvSpPr/>
+          <p:nvPr/>
+        </p:nvSpPr>
+        <p:spPr>
+          <a:xfrm>
+            <a:off x="7269480" y="4080681"/>
+            <a:ext cx="1307592" cy="955547"/>
+          </a:xfrm>
+          <a:prstGeom prst="rect">
+            <a:avLst/>
+          </a:prstGeom>
+          <a:solidFill>
+            <a:srgbClr val="FFFFFF"/>
+          </a:solidFill>
+          <a:ln w="8890">
+            <a:solidFill>
+              <a:srgbClr val="D2E1ED"/>
+            </a:solidFill>
+          </a:ln>
+        </p:spPr>
+        <p:style>
+          <a:lnRef idx="1">
+            <a:schemeClr val="accent1"/>
+          </a:lnRef>
+          <a:fillRef idx="3">
+            <a:schemeClr val="accent1"/>
+          </a:fillRef>
+          <a:effectRef idx="2">
+            <a:schemeClr val="accent1"/>
+          </a:effectRef>
+          <a:fontRef idx="minor">
+            <a:schemeClr val="lt1"/>
+          </a:fontRef>
+        </p:style>
+        <p:txBody>
+          <a:bodyPr rtlCol="0" anchor="ctr"/>
+          <a:lstStyle/>
+          <a:p>
+            <a:pPr algn="ctr"/>
+            <a:endParaRPr/>
+          </a:p>
+        </p:txBody>
+      </p:sp>
+      <p:sp>
+        <p:nvSpPr>
+          <p:cNvPr id="34" name="Rectangle 33"/>
+          <p:cNvSpPr/>
+          <p:nvPr/>
+        </p:nvSpPr>
+        <p:spPr>
+          <a:xfrm>
+            <a:off x="8577072" y="4080681"/>
+            <a:ext cx="1993392" cy="955547"/>
+          </a:xfrm>
+          <a:prstGeom prst="rect">
+            <a:avLst/>
+          </a:prstGeom>
+          <a:solidFill>
+            <a:srgbClr val="FFFFFF"/>
+          </a:solidFill>
+          <a:ln w="8890">
+            <a:solidFill>
+              <a:srgbClr val="D2E1ED"/>
+            </a:solidFill>
+          </a:ln>
+        </p:spPr>
+        <p:style>
+          <a:lnRef idx="1">
+            <a:schemeClr val="accent1"/>
+          </a:lnRef>
+          <a:fillRef idx="3">
+            <a:schemeClr val="accent1"/>
+          </a:fillRef>
+          <a:effectRef idx="2">
+            <a:schemeClr val="accent1"/>
+          </a:effectRef>
+          <a:fontRef idx="minor">
+            <a:schemeClr val="lt1"/>
+          </a:fontRef>
+        </p:style>
+        <p:txBody>
+          <a:bodyPr rtlCol="0" anchor="ctr"/>
+          <a:lstStyle/>
+          <a:p>
+            <a:pPr algn="ctr"/>
+            <a:endParaRPr/>
+          </a:p>
+        </p:txBody>
+      </p:sp>
+      <p:sp>
+        <p:nvSpPr>
+          <p:cNvPr id="35" name="Rectangle 34"/>
+          <p:cNvSpPr/>
+          <p:nvPr/>
+        </p:nvSpPr>
+        <p:spPr>
+          <a:xfrm>
+            <a:off x="10570464" y="4080681"/>
+            <a:ext cx="1554480" cy="955547"/>
+          </a:xfrm>
+          <a:prstGeom prst="rect">
+            <a:avLst/>
+          </a:prstGeom>
+          <a:solidFill>
+            <a:srgbClr val="FFFFFF"/>
+          </a:solidFill>
+          <a:ln w="8890">
+            <a:solidFill>
+              <a:srgbClr val="D2E1ED"/>
+            </a:solidFill>
+          </a:ln>
+        </p:spPr>
+        <p:style>
+          <a:lnRef idx="1">
+            <a:schemeClr val="accent1"/>
+          </a:lnRef>
+          <a:fillRef idx="3">
+            <a:schemeClr val="accent1"/>
+          </a:fillRef>
+          <a:effectRef idx="2">
+            <a:schemeClr val="accent1"/>
+          </a:effectRef>
+          <a:fontRef idx="minor">
+            <a:schemeClr val="lt1"/>
+          </a:fontRef>
+        </p:style>
+        <p:txBody>
+          <a:bodyPr rtlCol="0" anchor="ctr"/>
+          <a:lstStyle/>
+          <a:p>
+            <a:pPr algn="ctr"/>
+            <a:endParaRPr/>
+          </a:p>
+        </p:txBody>
+      </p:sp>
+      <p:sp>
+        <p:nvSpPr>
+          <p:cNvPr id="36" name="Rectangle 35"/>
+          <p:cNvSpPr/>
+          <p:nvPr/>
+        </p:nvSpPr>
+        <p:spPr>
+          <a:xfrm>
+            <a:off x="12124944" y="4080681"/>
+            <a:ext cx="2167128" cy="955547"/>
+          </a:xfrm>
+          <a:prstGeom prst="rect">
+            <a:avLst/>
+          </a:prstGeom>
+          <a:solidFill>
+            <a:srgbClr val="FFFFFF"/>
+          </a:solidFill>
+          <a:ln w="8890">
+            <a:solidFill>
+              <a:srgbClr val="D2E1ED"/>
+            </a:solidFill>
+          </a:ln>
+        </p:spPr>
+        <p:style>
+          <a:lnRef idx="1">
+            <a:schemeClr val="accent1"/>
+          </a:lnRef>
+          <a:fillRef idx="3">
+            <a:schemeClr val="accent1"/>
+          </a:fillRef>
+          <a:effectRef idx="2">
+            <a:schemeClr val="accent1"/>
+          </a:effectRef>
+          <a:fontRef idx="minor">
+            <a:schemeClr val="lt1"/>
+          </a:fontRef>
+        </p:style>
+        <p:txBody>
+          <a:bodyPr rtlCol="0" anchor="ctr"/>
+          <a:lstStyle/>
+          <a:p>
+            <a:pPr algn="ctr"/>
+            <a:endParaRPr/>
+          </a:p>
+        </p:txBody>
+      </p:sp>
+      <p:sp>
+        <p:nvSpPr>
+          <p:cNvPr id="37" name="Rectangle 36"/>
+          <p:cNvSpPr/>
+          <p:nvPr/>
+        </p:nvSpPr>
+        <p:spPr>
+          <a:xfrm>
+            <a:off x="14292072" y="4080681"/>
+            <a:ext cx="2048256" cy="955547"/>
+          </a:xfrm>
+          <a:prstGeom prst="rect">
+            <a:avLst/>
+          </a:prstGeom>
+          <a:solidFill>
+            <a:srgbClr val="FFFFFF"/>
+          </a:solidFill>
+          <a:ln w="8890">
+            <a:solidFill>
+              <a:srgbClr val="D2E1ED"/>
+            </a:solidFill>
+          </a:ln>
+        </p:spPr>
+        <p:style>
+          <a:lnRef idx="1">
+            <a:schemeClr val="accent1"/>
+          </a:lnRef>
+          <a:fillRef idx="3">
+            <a:schemeClr val="accent1"/>
+          </a:fillRef>
+          <a:effectRef idx="2">
+            <a:schemeClr val="accent1"/>
+          </a:effectRef>
+          <a:fontRef idx="minor">
+            <a:schemeClr val="lt1"/>
+          </a:fontRef>
+        </p:style>
+        <p:txBody>
+          <a:bodyPr rtlCol="0" anchor="ctr"/>
+          <a:lstStyle/>
+          <a:p>
+            <a:pPr algn="ctr"/>
+            <a:endParaRPr/>
+          </a:p>
+        </p:txBody>
+      </p:sp>
+      <p:sp>
+        <p:nvSpPr>
+          <p:cNvPr id="38" name="TextBox 37"/>
+          <p:cNvSpPr txBox="1"/>
+          <p:nvPr/>
+        </p:nvSpPr>
+        <p:spPr>
+          <a:xfrm>
+            <a:off x="841248" y="4262989"/>
+            <a:ext cx="2679191" cy="590931"/>
+          </a:xfrm>
+          <a:prstGeom prst="rect">
+            <a:avLst/>
+          </a:prstGeom>
+          <a:noFill/>
+        </p:spPr>
+        <p:txBody>
+          <a:bodyPr wrap="square" lIns="18288" tIns="18288" rIns="18288" bIns="18288" anchor="ctr">
+            <a:spAutoFit/>
+          </a:bodyPr>
+          <a:lstStyle/>
+          <a:p>
+            <a:pPr algn="l">
+              <a:spcBef>
+                <a:spcPts val="0"/>
+              </a:spcBef>
+              <a:spcAft>
+                <a:spcPts val="0"/>
+              </a:spcAft>
+            </a:pPr>
+            <a:r>
+              <a:rPr b="0" dirty="0" err="1">
+                <a:solidFill>
+                  <a:srgbClr val="193B5E"/>
+                </a:solidFill>
+                <a:latin typeface="Microsoft YaHei"/>
+              </a:rPr>
+              <a:t>预设五根</a:t>
+            </a:r>
+            <a:endParaRPr b="0" dirty="0">
+              <a:solidFill>
+                <a:srgbClr val="193B5E"/>
+              </a:solidFill>
+              <a:latin typeface="Microsoft YaHei"/>
+            </a:endParaRPr>
+          </a:p>
+          <a:p>
+            <a:pPr algn="l">
+              <a:spcBef>
+                <a:spcPts val="0"/>
+              </a:spcBef>
+              <a:spcAft>
+                <a:spcPts val="0"/>
+              </a:spcAft>
+            </a:pPr>
+            <a:r>
+              <a:rPr b="0" dirty="0" err="1">
+                <a:solidFill>
+                  <a:srgbClr val="193B5E"/>
+                </a:solidFill>
+                <a:latin typeface="Microsoft YaHei"/>
+              </a:rPr>
+              <a:t>初始子树</a:t>
+            </a:r>
+            <a:endParaRPr b="0" dirty="0">
+              <a:solidFill>
+                <a:srgbClr val="193B5E"/>
+              </a:solidFill>
+              <a:latin typeface="Microsoft YaHei"/>
+            </a:endParaRPr>
+          </a:p>
+        </p:txBody>
+      </p:sp>
+      <p:sp>
+        <p:nvSpPr>
+          <p:cNvPr id="39" name="TextBox 38"/>
+          <p:cNvSpPr txBox="1"/>
+          <p:nvPr/>
+        </p:nvSpPr>
+        <p:spPr>
+          <a:xfrm>
+            <a:off x="3666744" y="4207491"/>
+            <a:ext cx="1709928" cy="249299"/>
+          </a:xfrm>
+          <a:prstGeom prst="rect">
+            <a:avLst/>
+          </a:prstGeom>
+          <a:noFill/>
+        </p:spPr>
+        <p:txBody>
+          <a:bodyPr wrap="square" lIns="18288" tIns="18288" rIns="18288" bIns="18288" anchor="ctr">
+            <a:spAutoFit/>
+          </a:bodyPr>
+          <a:lstStyle/>
+          <a:p>
+            <a:pPr algn="ctr">
+              <a:spcBef>
+                <a:spcPts val="0"/>
+              </a:spcBef>
+              <a:spcAft>
+                <a:spcPts val="0"/>
+              </a:spcAft>
+            </a:pPr>
+            <a:r>
+              <a:rPr sz="1380" b="1">
+                <a:solidFill>
+                  <a:srgbClr val="526A80"/>
+                </a:solidFill>
+                <a:latin typeface="Microsoft YaHei"/>
+              </a:rPr>
+              <a:t>906/1247</a:t>
+            </a:r>
+          </a:p>
+        </p:txBody>
+      </p:sp>
+      <p:sp>
+        <p:nvSpPr>
+          <p:cNvPr id="40" name="TextBox 39"/>
+          <p:cNvSpPr txBox="1"/>
+          <p:nvPr/>
+        </p:nvSpPr>
+        <p:spPr>
+          <a:xfrm>
+            <a:off x="3666744" y="4527129"/>
+            <a:ext cx="1709928" cy="332399"/>
+          </a:xfrm>
+          <a:prstGeom prst="rect">
+            <a:avLst/>
+          </a:prstGeom>
+          <a:noFill/>
+        </p:spPr>
+        <p:txBody>
+          <a:bodyPr wrap="square" lIns="18288" tIns="18288" rIns="18288" bIns="18288" anchor="ctr">
+            <a:spAutoFit/>
+          </a:bodyPr>
+          <a:lstStyle/>
+          <a:p>
+            <a:pPr algn="ctr">
+              <a:spcBef>
+                <a:spcPts val="0"/>
+              </a:spcBef>
+              <a:spcAft>
+                <a:spcPts val="0"/>
+              </a:spcAft>
+            </a:pPr>
+            <a:r>
+              <a:rPr sz="1920" b="1" dirty="0">
+                <a:solidFill>
+                  <a:srgbClr val="193B5E"/>
+                </a:solidFill>
+                <a:latin typeface="Microsoft YaHei"/>
+              </a:rPr>
+              <a:t>72.65%</a:t>
+            </a:r>
+          </a:p>
+        </p:txBody>
+      </p:sp>
+      <p:sp>
+        <p:nvSpPr>
+          <p:cNvPr id="41" name="TextBox 40"/>
+          <p:cNvSpPr txBox="1"/>
+          <p:nvPr/>
+        </p:nvSpPr>
+        <p:spPr>
+          <a:xfrm>
+            <a:off x="5449824" y="4207491"/>
+            <a:ext cx="1783079" cy="249299"/>
+          </a:xfrm>
+          <a:prstGeom prst="rect">
+            <a:avLst/>
+          </a:prstGeom>
+          <a:noFill/>
+        </p:spPr>
+        <p:txBody>
+          <a:bodyPr wrap="square" lIns="18288" tIns="18288" rIns="18288" bIns="18288" anchor="ctr">
+            <a:spAutoFit/>
+          </a:bodyPr>
+          <a:lstStyle/>
+          <a:p>
+            <a:pPr algn="ctr">
+              <a:spcBef>
+                <a:spcPts val="0"/>
+              </a:spcBef>
+              <a:spcAft>
+                <a:spcPts val="0"/>
+              </a:spcAft>
+            </a:pPr>
+            <a:r>
+              <a:rPr sz="1380" b="1">
+                <a:solidFill>
+                  <a:srgbClr val="526A80"/>
+                </a:solidFill>
+                <a:latin typeface="Microsoft YaHei"/>
+              </a:rPr>
+              <a:t>828/1147</a:t>
+            </a:r>
+          </a:p>
+        </p:txBody>
+      </p:sp>
+      <p:sp>
+        <p:nvSpPr>
+          <p:cNvPr id="42" name="TextBox 41"/>
+          <p:cNvSpPr txBox="1"/>
+          <p:nvPr/>
+        </p:nvSpPr>
+        <p:spPr>
+          <a:xfrm>
+            <a:off x="5449824" y="4527129"/>
+            <a:ext cx="1783079" cy="332399"/>
+          </a:xfrm>
+          <a:prstGeom prst="rect">
+            <a:avLst/>
+          </a:prstGeom>
+          <a:noFill/>
+        </p:spPr>
+        <p:txBody>
+          <a:bodyPr wrap="square" lIns="18288" tIns="18288" rIns="18288" bIns="18288" anchor="ctr">
+            <a:spAutoFit/>
+          </a:bodyPr>
+          <a:lstStyle/>
+          <a:p>
+            <a:pPr algn="ctr">
+              <a:spcBef>
+                <a:spcPts val="0"/>
+              </a:spcBef>
+              <a:spcAft>
+                <a:spcPts val="0"/>
+              </a:spcAft>
+            </a:pPr>
+            <a:r>
+              <a:rPr sz="1920" b="1">
+                <a:solidFill>
+                  <a:srgbClr val="193B5E"/>
+                </a:solidFill>
+                <a:latin typeface="Microsoft YaHei"/>
+              </a:rPr>
+              <a:t>72.19%</a:t>
+            </a:r>
+          </a:p>
+        </p:txBody>
+      </p:sp>
+      <p:sp>
+        <p:nvSpPr>
+          <p:cNvPr id="43" name="TextBox 42"/>
+          <p:cNvSpPr txBox="1"/>
+          <p:nvPr/>
+        </p:nvSpPr>
+        <p:spPr>
+          <a:xfrm>
+            <a:off x="7306056" y="4207491"/>
+            <a:ext cx="1234439" cy="249299"/>
+          </a:xfrm>
+          <a:prstGeom prst="rect">
+            <a:avLst/>
+          </a:prstGeom>
+          <a:noFill/>
+        </p:spPr>
+        <p:txBody>
+          <a:bodyPr wrap="square" lIns="18288" tIns="18288" rIns="18288" bIns="18288" anchor="ctr">
+            <a:spAutoFit/>
+          </a:bodyPr>
+          <a:lstStyle/>
+          <a:p>
+            <a:pPr algn="ctr">
+              <a:spcBef>
+                <a:spcPts val="0"/>
+              </a:spcBef>
+              <a:spcAft>
+                <a:spcPts val="0"/>
+              </a:spcAft>
+            </a:pPr>
+            <a:r>
+              <a:rPr sz="1380" b="1">
+                <a:solidFill>
+                  <a:srgbClr val="526A80"/>
+                </a:solidFill>
+                <a:latin typeface="Microsoft YaHei"/>
+              </a:rPr>
+              <a:t>78/100</a:t>
+            </a:r>
+          </a:p>
+        </p:txBody>
+      </p:sp>
+      <p:sp>
+        <p:nvSpPr>
+          <p:cNvPr id="44" name="TextBox 43"/>
+          <p:cNvSpPr txBox="1"/>
+          <p:nvPr/>
+        </p:nvSpPr>
+        <p:spPr>
+          <a:xfrm>
+            <a:off x="7306056" y="4527129"/>
+            <a:ext cx="1234439" cy="332399"/>
+          </a:xfrm>
+          <a:prstGeom prst="rect">
+            <a:avLst/>
+          </a:prstGeom>
+          <a:noFill/>
+        </p:spPr>
+        <p:txBody>
+          <a:bodyPr wrap="square" lIns="18288" tIns="18288" rIns="18288" bIns="18288" anchor="ctr">
+            <a:spAutoFit/>
+          </a:bodyPr>
+          <a:lstStyle/>
+          <a:p>
+            <a:pPr algn="ctr">
+              <a:spcBef>
+                <a:spcPts val="0"/>
+              </a:spcBef>
+              <a:spcAft>
+                <a:spcPts val="0"/>
+              </a:spcAft>
+            </a:pPr>
+            <a:r>
+              <a:rPr sz="1920" b="1">
+                <a:solidFill>
+                  <a:srgbClr val="193B5E"/>
+                </a:solidFill>
+                <a:latin typeface="Microsoft YaHei"/>
+              </a:rPr>
+              <a:t>78.00%</a:t>
+            </a:r>
+          </a:p>
+        </p:txBody>
+      </p:sp>
+      <p:sp>
+        <p:nvSpPr>
+          <p:cNvPr id="45" name="TextBox 44"/>
+          <p:cNvSpPr txBox="1"/>
+          <p:nvPr/>
+        </p:nvSpPr>
+        <p:spPr>
+          <a:xfrm>
+            <a:off x="8613648" y="4207491"/>
+            <a:ext cx="1920240" cy="249299"/>
+          </a:xfrm>
+          <a:prstGeom prst="rect">
+            <a:avLst/>
+          </a:prstGeom>
+          <a:noFill/>
+        </p:spPr>
+        <p:txBody>
+          <a:bodyPr wrap="square" lIns="18288" tIns="18288" rIns="18288" bIns="18288" anchor="ctr">
+            <a:spAutoFit/>
+          </a:bodyPr>
+          <a:lstStyle/>
+          <a:p>
+            <a:pPr algn="ctr">
+              <a:spcBef>
+                <a:spcPts val="0"/>
+              </a:spcBef>
+              <a:spcAft>
+                <a:spcPts val="0"/>
+              </a:spcAft>
+            </a:pPr>
+            <a:r>
+              <a:rPr sz="1380" b="1">
+                <a:solidFill>
+                  <a:srgbClr val="526A80"/>
+                </a:solidFill>
+                <a:latin typeface="Microsoft YaHei"/>
+              </a:rPr>
+              <a:t>527/648</a:t>
+            </a:r>
+          </a:p>
+        </p:txBody>
+      </p:sp>
+      <p:sp>
+        <p:nvSpPr>
+          <p:cNvPr id="46" name="TextBox 45"/>
+          <p:cNvSpPr txBox="1"/>
+          <p:nvPr/>
+        </p:nvSpPr>
+        <p:spPr>
+          <a:xfrm>
+            <a:off x="8613648" y="4527129"/>
+            <a:ext cx="1920240" cy="332399"/>
+          </a:xfrm>
+          <a:prstGeom prst="rect">
+            <a:avLst/>
+          </a:prstGeom>
+          <a:noFill/>
+        </p:spPr>
+        <p:txBody>
+          <a:bodyPr wrap="square" lIns="18288" tIns="18288" rIns="18288" bIns="18288" anchor="ctr">
+            <a:spAutoFit/>
+          </a:bodyPr>
+          <a:lstStyle/>
+          <a:p>
+            <a:pPr algn="ctr">
+              <a:spcBef>
+                <a:spcPts val="0"/>
+              </a:spcBef>
+              <a:spcAft>
+                <a:spcPts val="0"/>
+              </a:spcAft>
+            </a:pPr>
+            <a:r>
+              <a:rPr sz="1920" b="1">
+                <a:solidFill>
+                  <a:srgbClr val="193B5E"/>
+                </a:solidFill>
+                <a:latin typeface="Microsoft YaHei"/>
+              </a:rPr>
+              <a:t>81.33%</a:t>
+            </a:r>
+          </a:p>
+        </p:txBody>
+      </p:sp>
+      <p:sp>
+        <p:nvSpPr>
+          <p:cNvPr id="47" name="TextBox 46"/>
+          <p:cNvSpPr txBox="1"/>
+          <p:nvPr/>
+        </p:nvSpPr>
+        <p:spPr>
+          <a:xfrm>
+            <a:off x="10607040" y="4207491"/>
+            <a:ext cx="1481328" cy="249299"/>
+          </a:xfrm>
+          <a:prstGeom prst="rect">
+            <a:avLst/>
+          </a:prstGeom>
+          <a:noFill/>
+        </p:spPr>
+        <p:txBody>
+          <a:bodyPr wrap="square" lIns="18288" tIns="18288" rIns="18288" bIns="18288" anchor="ctr">
+            <a:spAutoFit/>
+          </a:bodyPr>
+          <a:lstStyle/>
+          <a:p>
+            <a:pPr algn="ctr">
+              <a:spcBef>
+                <a:spcPts val="0"/>
+              </a:spcBef>
+              <a:spcAft>
+                <a:spcPts val="0"/>
+              </a:spcAft>
+            </a:pPr>
+            <a:r>
+              <a:rPr sz="1380" b="1">
+                <a:solidFill>
+                  <a:srgbClr val="526A80"/>
+                </a:solidFill>
+                <a:latin typeface="Microsoft YaHei"/>
+              </a:rPr>
+              <a:t>92/181</a:t>
+            </a:r>
+          </a:p>
+        </p:txBody>
+      </p:sp>
+      <p:sp>
+        <p:nvSpPr>
+          <p:cNvPr id="48" name="TextBox 47"/>
+          <p:cNvSpPr txBox="1"/>
+          <p:nvPr/>
+        </p:nvSpPr>
+        <p:spPr>
+          <a:xfrm>
+            <a:off x="10607040" y="4527129"/>
+            <a:ext cx="1481328" cy="332399"/>
+          </a:xfrm>
+          <a:prstGeom prst="rect">
+            <a:avLst/>
+          </a:prstGeom>
+          <a:noFill/>
+        </p:spPr>
+        <p:txBody>
+          <a:bodyPr wrap="square" lIns="18288" tIns="18288" rIns="18288" bIns="18288" anchor="ctr">
+            <a:spAutoFit/>
+          </a:bodyPr>
+          <a:lstStyle/>
+          <a:p>
+            <a:pPr algn="ctr">
+              <a:spcBef>
+                <a:spcPts val="0"/>
+              </a:spcBef>
+              <a:spcAft>
+                <a:spcPts val="0"/>
+              </a:spcAft>
+            </a:pPr>
+            <a:r>
+              <a:rPr sz="1920" b="1">
+                <a:solidFill>
+                  <a:srgbClr val="193B5E"/>
+                </a:solidFill>
+                <a:latin typeface="Microsoft YaHei"/>
+              </a:rPr>
+              <a:t>50.83%</a:t>
+            </a:r>
+          </a:p>
+        </p:txBody>
+      </p:sp>
+      <p:sp>
+        <p:nvSpPr>
+          <p:cNvPr id="49" name="TextBox 48"/>
+          <p:cNvSpPr txBox="1"/>
+          <p:nvPr/>
+        </p:nvSpPr>
+        <p:spPr>
+          <a:xfrm>
+            <a:off x="12161519" y="4207491"/>
+            <a:ext cx="2093976" cy="249299"/>
+          </a:xfrm>
+          <a:prstGeom prst="rect">
+            <a:avLst/>
+          </a:prstGeom>
+          <a:noFill/>
+        </p:spPr>
+        <p:txBody>
+          <a:bodyPr wrap="square" lIns="18288" tIns="18288" rIns="18288" bIns="18288" anchor="ctr">
+            <a:spAutoFit/>
+          </a:bodyPr>
+          <a:lstStyle/>
+          <a:p>
+            <a:pPr algn="ctr">
+              <a:spcBef>
+                <a:spcPts val="0"/>
+              </a:spcBef>
+              <a:spcAft>
+                <a:spcPts val="0"/>
+              </a:spcAft>
+            </a:pPr>
+            <a:r>
+              <a:rPr sz="1380" b="1">
+                <a:solidFill>
+                  <a:srgbClr val="526A80"/>
+                </a:solidFill>
+                <a:latin typeface="Microsoft YaHei"/>
+              </a:rPr>
+              <a:t>606/749</a:t>
+            </a:r>
+          </a:p>
+        </p:txBody>
+      </p:sp>
+      <p:sp>
+        <p:nvSpPr>
+          <p:cNvPr id="50" name="TextBox 49"/>
+          <p:cNvSpPr txBox="1"/>
+          <p:nvPr/>
+        </p:nvSpPr>
+        <p:spPr>
+          <a:xfrm>
+            <a:off x="12161519" y="4527129"/>
+            <a:ext cx="2093976" cy="332399"/>
+          </a:xfrm>
+          <a:prstGeom prst="rect">
+            <a:avLst/>
+          </a:prstGeom>
+          <a:noFill/>
+        </p:spPr>
+        <p:txBody>
+          <a:bodyPr wrap="square" lIns="18288" tIns="18288" rIns="18288" bIns="18288" anchor="ctr">
+            <a:spAutoFit/>
+          </a:bodyPr>
+          <a:lstStyle/>
+          <a:p>
+            <a:pPr algn="ctr">
+              <a:spcBef>
+                <a:spcPts val="0"/>
+              </a:spcBef>
+              <a:spcAft>
+                <a:spcPts val="0"/>
+              </a:spcAft>
+            </a:pPr>
+            <a:r>
+              <a:rPr sz="1920" b="1">
+                <a:solidFill>
+                  <a:srgbClr val="193B5E"/>
+                </a:solidFill>
+                <a:latin typeface="Microsoft YaHei"/>
+              </a:rPr>
+              <a:t>80.91%</a:t>
+            </a:r>
+          </a:p>
+        </p:txBody>
+      </p:sp>
+      <p:sp>
+        <p:nvSpPr>
+          <p:cNvPr id="51" name="TextBox 50"/>
+          <p:cNvSpPr txBox="1"/>
+          <p:nvPr/>
+        </p:nvSpPr>
+        <p:spPr>
+          <a:xfrm>
+            <a:off x="14328648" y="4207491"/>
+            <a:ext cx="1975104" cy="249299"/>
+          </a:xfrm>
+          <a:prstGeom prst="rect">
+            <a:avLst/>
+          </a:prstGeom>
+          <a:noFill/>
+        </p:spPr>
+        <p:txBody>
+          <a:bodyPr wrap="square" lIns="18288" tIns="18288" rIns="18288" bIns="18288" anchor="ctr">
+            <a:spAutoFit/>
+          </a:bodyPr>
+          <a:lstStyle/>
+          <a:p>
+            <a:pPr algn="ctr">
+              <a:spcBef>
+                <a:spcPts val="0"/>
+              </a:spcBef>
+              <a:spcAft>
+                <a:spcPts val="0"/>
+              </a:spcAft>
+            </a:pPr>
+            <a:r>
+              <a:rPr sz="1380" b="1">
+                <a:solidFill>
+                  <a:srgbClr val="526A80"/>
+                </a:solidFill>
+                <a:latin typeface="Microsoft YaHei"/>
+              </a:rPr>
+              <a:t>208/317</a:t>
+            </a:r>
+          </a:p>
+        </p:txBody>
+      </p:sp>
+      <p:sp>
+        <p:nvSpPr>
+          <p:cNvPr id="52" name="TextBox 51"/>
+          <p:cNvSpPr txBox="1"/>
+          <p:nvPr/>
+        </p:nvSpPr>
+        <p:spPr>
+          <a:xfrm>
+            <a:off x="14328648" y="4527129"/>
+            <a:ext cx="1975104" cy="332399"/>
+          </a:xfrm>
+          <a:prstGeom prst="rect">
+            <a:avLst/>
+          </a:prstGeom>
+          <a:noFill/>
+        </p:spPr>
+        <p:txBody>
+          <a:bodyPr wrap="square" lIns="18288" tIns="18288" rIns="18288" bIns="18288" anchor="ctr">
+            <a:spAutoFit/>
+          </a:bodyPr>
+          <a:lstStyle/>
+          <a:p>
+            <a:pPr algn="ctr">
+              <a:spcBef>
+                <a:spcPts val="0"/>
+              </a:spcBef>
+              <a:spcAft>
+                <a:spcPts val="0"/>
+              </a:spcAft>
+            </a:pPr>
+            <a:r>
+              <a:rPr sz="1920" b="1">
+                <a:solidFill>
+                  <a:srgbClr val="193B5E"/>
+                </a:solidFill>
+                <a:latin typeface="Microsoft YaHei"/>
+              </a:rPr>
+              <a:t>65.62%</a:t>
+            </a:r>
+          </a:p>
+        </p:txBody>
+      </p:sp>
+      <p:sp>
+        <p:nvSpPr>
+          <p:cNvPr id="53" name="Rectangle 52"/>
+          <p:cNvSpPr/>
+          <p:nvPr/>
+        </p:nvSpPr>
+        <p:spPr>
+          <a:xfrm>
+            <a:off x="713232" y="5036229"/>
+            <a:ext cx="2916936" cy="955547"/>
+          </a:xfrm>
+          <a:prstGeom prst="rect">
+            <a:avLst/>
+          </a:prstGeom>
+          <a:solidFill>
+            <a:srgbClr val="F4F9FD"/>
+          </a:solidFill>
+          <a:ln w="8890">
+            <a:solidFill>
+              <a:srgbClr val="D2E1ED"/>
+            </a:solidFill>
+          </a:ln>
+        </p:spPr>
+        <p:style>
+          <a:lnRef idx="1">
+            <a:schemeClr val="accent1"/>
+          </a:lnRef>
+          <a:fillRef idx="3">
+            <a:schemeClr val="accent1"/>
+          </a:fillRef>
+          <a:effectRef idx="2">
+            <a:schemeClr val="accent1"/>
+          </a:effectRef>
+          <a:fontRef idx="minor">
+            <a:schemeClr val="lt1"/>
+          </a:fontRef>
+        </p:style>
+        <p:txBody>
+          <a:bodyPr rtlCol="0" anchor="ctr"/>
+          <a:lstStyle/>
+          <a:p>
+            <a:pPr algn="ctr"/>
+            <a:endParaRPr sz="2000"/>
+          </a:p>
+        </p:txBody>
+      </p:sp>
+      <p:sp>
+        <p:nvSpPr>
+          <p:cNvPr id="54" name="Rectangle 53"/>
+          <p:cNvSpPr/>
+          <p:nvPr/>
+        </p:nvSpPr>
+        <p:spPr>
+          <a:xfrm>
+            <a:off x="3630168" y="5036229"/>
+            <a:ext cx="1783080" cy="955547"/>
+          </a:xfrm>
+          <a:prstGeom prst="rect">
+            <a:avLst/>
+          </a:prstGeom>
+          <a:solidFill>
+            <a:srgbClr val="F4F9FD"/>
+          </a:solidFill>
+          <a:ln w="8890">
+            <a:solidFill>
+              <a:srgbClr val="D2E1ED"/>
+            </a:solidFill>
+          </a:ln>
+        </p:spPr>
+        <p:style>
+          <a:lnRef idx="1">
+            <a:schemeClr val="accent1"/>
+          </a:lnRef>
+          <a:fillRef idx="3">
+            <a:schemeClr val="accent1"/>
+          </a:fillRef>
+          <a:effectRef idx="2">
+            <a:schemeClr val="accent1"/>
+          </a:effectRef>
+          <a:fontRef idx="minor">
+            <a:schemeClr val="lt1"/>
+          </a:fontRef>
+        </p:style>
+        <p:txBody>
+          <a:bodyPr rtlCol="0" anchor="ctr"/>
+          <a:lstStyle/>
+          <a:p>
+            <a:pPr algn="ctr"/>
+            <a:endParaRPr b="1"/>
+          </a:p>
+        </p:txBody>
+      </p:sp>
+      <p:sp>
+        <p:nvSpPr>
+          <p:cNvPr id="55" name="Rectangle 54"/>
+          <p:cNvSpPr/>
+          <p:nvPr/>
+        </p:nvSpPr>
+        <p:spPr>
+          <a:xfrm>
+            <a:off x="5413248" y="5036229"/>
+            <a:ext cx="1856231" cy="955547"/>
+          </a:xfrm>
+          <a:prstGeom prst="rect">
+            <a:avLst/>
+          </a:prstGeom>
+          <a:solidFill>
+            <a:srgbClr val="F4F9FD"/>
+          </a:solidFill>
+          <a:ln w="8890">
+            <a:solidFill>
+              <a:srgbClr val="D2E1ED"/>
+            </a:solidFill>
+          </a:ln>
+        </p:spPr>
+        <p:style>
+          <a:lnRef idx="1">
+            <a:schemeClr val="accent1"/>
+          </a:lnRef>
+          <a:fillRef idx="3">
+            <a:schemeClr val="accent1"/>
+          </a:fillRef>
+          <a:effectRef idx="2">
+            <a:schemeClr val="accent1"/>
+          </a:effectRef>
+          <a:fontRef idx="minor">
+            <a:schemeClr val="lt1"/>
+          </a:fontRef>
+        </p:style>
+        <p:txBody>
+          <a:bodyPr rtlCol="0" anchor="ctr"/>
+          <a:lstStyle/>
+          <a:p>
+            <a:pPr algn="ctr"/>
+            <a:endParaRPr b="1"/>
+          </a:p>
+        </p:txBody>
+      </p:sp>
+      <p:sp>
+        <p:nvSpPr>
+          <p:cNvPr id="56" name="Rectangle 55"/>
+          <p:cNvSpPr/>
+          <p:nvPr/>
+        </p:nvSpPr>
+        <p:spPr>
+          <a:xfrm>
+            <a:off x="7269480" y="5036229"/>
+            <a:ext cx="1307592" cy="955547"/>
+          </a:xfrm>
+          <a:prstGeom prst="rect">
+            <a:avLst/>
+          </a:prstGeom>
+          <a:solidFill>
+            <a:srgbClr val="F4F9FD"/>
+          </a:solidFill>
+          <a:ln w="8890">
+            <a:solidFill>
+              <a:srgbClr val="D2E1ED"/>
+            </a:solidFill>
+          </a:ln>
+        </p:spPr>
+        <p:style>
+          <a:lnRef idx="1">
+            <a:schemeClr val="accent1"/>
+          </a:lnRef>
+          <a:fillRef idx="3">
+            <a:schemeClr val="accent1"/>
+          </a:fillRef>
+          <a:effectRef idx="2">
+            <a:schemeClr val="accent1"/>
+          </a:effectRef>
+          <a:fontRef idx="minor">
+            <a:schemeClr val="lt1"/>
+          </a:fontRef>
+        </p:style>
+        <p:txBody>
+          <a:bodyPr rtlCol="0" anchor="ctr"/>
+          <a:lstStyle/>
+          <a:p>
+            <a:pPr algn="ctr"/>
+            <a:endParaRPr b="1"/>
+          </a:p>
+        </p:txBody>
+      </p:sp>
+      <p:sp>
+        <p:nvSpPr>
+          <p:cNvPr id="57" name="Rectangle 56"/>
+          <p:cNvSpPr/>
+          <p:nvPr/>
+        </p:nvSpPr>
+        <p:spPr>
+          <a:xfrm>
+            <a:off x="8577072" y="5036229"/>
+            <a:ext cx="1993392" cy="955547"/>
+          </a:xfrm>
+          <a:prstGeom prst="rect">
+            <a:avLst/>
+          </a:prstGeom>
+          <a:solidFill>
+            <a:srgbClr val="F4F9FD"/>
+          </a:solidFill>
+          <a:ln w="8890">
+            <a:solidFill>
+              <a:srgbClr val="D2E1ED"/>
+            </a:solidFill>
+          </a:ln>
+        </p:spPr>
+        <p:style>
+          <a:lnRef idx="1">
+            <a:schemeClr val="accent1"/>
+          </a:lnRef>
+          <a:fillRef idx="3">
+            <a:schemeClr val="accent1"/>
+          </a:fillRef>
+          <a:effectRef idx="2">
+            <a:schemeClr val="accent1"/>
+          </a:effectRef>
+          <a:fontRef idx="minor">
+            <a:schemeClr val="lt1"/>
+          </a:fontRef>
+        </p:style>
+        <p:txBody>
+          <a:bodyPr rtlCol="0" anchor="ctr"/>
+          <a:lstStyle/>
+          <a:p>
+            <a:pPr algn="ctr"/>
+            <a:endParaRPr b="1"/>
+          </a:p>
+        </p:txBody>
+      </p:sp>
+      <p:sp>
+        <p:nvSpPr>
+          <p:cNvPr id="58" name="Rectangle 57"/>
+          <p:cNvSpPr/>
+          <p:nvPr/>
+        </p:nvSpPr>
+        <p:spPr>
+          <a:xfrm>
+            <a:off x="10570464" y="5036229"/>
+            <a:ext cx="1554480" cy="955547"/>
+          </a:xfrm>
+          <a:prstGeom prst="rect">
+            <a:avLst/>
+          </a:prstGeom>
+          <a:solidFill>
+            <a:srgbClr val="F4F9FD"/>
+          </a:solidFill>
+          <a:ln w="8890">
+            <a:solidFill>
+              <a:srgbClr val="D2E1ED"/>
+            </a:solidFill>
+          </a:ln>
+        </p:spPr>
+        <p:style>
+          <a:lnRef idx="1">
+            <a:schemeClr val="accent1"/>
+          </a:lnRef>
+          <a:fillRef idx="3">
+            <a:schemeClr val="accent1"/>
+          </a:fillRef>
+          <a:effectRef idx="2">
+            <a:schemeClr val="accent1"/>
+          </a:effectRef>
+          <a:fontRef idx="minor">
+            <a:schemeClr val="lt1"/>
+          </a:fontRef>
+        </p:style>
+        <p:txBody>
+          <a:bodyPr rtlCol="0" anchor="ctr"/>
+          <a:lstStyle/>
+          <a:p>
+            <a:pPr algn="ctr"/>
+            <a:endParaRPr b="1"/>
+          </a:p>
+        </p:txBody>
+      </p:sp>
+      <p:sp>
+        <p:nvSpPr>
+          <p:cNvPr id="59" name="Rectangle 58"/>
+          <p:cNvSpPr/>
+          <p:nvPr/>
+        </p:nvSpPr>
+        <p:spPr>
+          <a:xfrm>
+            <a:off x="12124944" y="5036229"/>
+            <a:ext cx="2167128" cy="955547"/>
+          </a:xfrm>
+          <a:prstGeom prst="rect">
+            <a:avLst/>
+          </a:prstGeom>
+          <a:solidFill>
+            <a:srgbClr val="F4F9FD"/>
+          </a:solidFill>
+          <a:ln w="8890">
+            <a:solidFill>
+              <a:srgbClr val="D2E1ED"/>
+            </a:solidFill>
+          </a:ln>
+        </p:spPr>
+        <p:style>
+          <a:lnRef idx="1">
+            <a:schemeClr val="accent1"/>
+          </a:lnRef>
+          <a:fillRef idx="3">
+            <a:schemeClr val="accent1"/>
+          </a:fillRef>
+          <a:effectRef idx="2">
+            <a:schemeClr val="accent1"/>
+          </a:effectRef>
+          <a:fontRef idx="minor">
+            <a:schemeClr val="lt1"/>
+          </a:fontRef>
+        </p:style>
+        <p:txBody>
+          <a:bodyPr rtlCol="0" anchor="ctr"/>
+          <a:lstStyle/>
+          <a:p>
+            <a:pPr algn="ctr"/>
+            <a:endParaRPr b="1"/>
+          </a:p>
+        </p:txBody>
+      </p:sp>
+      <p:sp>
+        <p:nvSpPr>
+          <p:cNvPr id="60" name="Rectangle 59"/>
+          <p:cNvSpPr/>
+          <p:nvPr/>
+        </p:nvSpPr>
+        <p:spPr>
+          <a:xfrm>
+            <a:off x="14292072" y="5036229"/>
+            <a:ext cx="2048256" cy="955547"/>
+          </a:xfrm>
+          <a:prstGeom prst="rect">
+            <a:avLst/>
+          </a:prstGeom>
+          <a:solidFill>
+            <a:srgbClr val="F4F9FD"/>
+          </a:solidFill>
+          <a:ln w="8890">
+            <a:solidFill>
+              <a:srgbClr val="D2E1ED"/>
+            </a:solidFill>
+          </a:ln>
+        </p:spPr>
+        <p:style>
+          <a:lnRef idx="1">
+            <a:schemeClr val="accent1"/>
+          </a:lnRef>
+          <a:fillRef idx="3">
+            <a:schemeClr val="accent1"/>
+          </a:fillRef>
+          <a:effectRef idx="2">
+            <a:schemeClr val="accent1"/>
+          </a:effectRef>
+          <a:fontRef idx="minor">
+            <a:schemeClr val="lt1"/>
+          </a:fontRef>
+        </p:style>
+        <p:txBody>
+          <a:bodyPr rtlCol="0" anchor="ctr"/>
+          <a:lstStyle/>
+          <a:p>
+            <a:pPr algn="ctr"/>
+            <a:endParaRPr b="1"/>
+          </a:p>
+        </p:txBody>
+      </p:sp>
+      <p:sp>
+        <p:nvSpPr>
+          <p:cNvPr id="61" name="TextBox 60"/>
+          <p:cNvSpPr txBox="1"/>
+          <p:nvPr/>
+        </p:nvSpPr>
+        <p:spPr>
+          <a:xfrm>
+            <a:off x="841248" y="5218537"/>
+            <a:ext cx="2679191" cy="590931"/>
+          </a:xfrm>
+          <a:prstGeom prst="rect">
+            <a:avLst/>
+          </a:prstGeom>
+          <a:noFill/>
+        </p:spPr>
+        <p:txBody>
+          <a:bodyPr wrap="square" lIns="18288" tIns="18288" rIns="18288" bIns="18288" anchor="ctr">
+            <a:spAutoFit/>
+          </a:bodyPr>
+          <a:lstStyle/>
+          <a:p>
+            <a:pPr algn="l">
+              <a:spcBef>
+                <a:spcPts val="0"/>
+              </a:spcBef>
+              <a:spcAft>
+                <a:spcPts val="0"/>
+              </a:spcAft>
+            </a:pPr>
+            <a:r>
+              <a:rPr b="0">
+                <a:solidFill>
+                  <a:srgbClr val="193B5E"/>
+                </a:solidFill>
+                <a:latin typeface="Microsoft YaHei"/>
+              </a:rPr>
+              <a:t>预设五根</a:t>
+            </a:r>
+          </a:p>
+          <a:p>
+            <a:pPr algn="l">
+              <a:spcBef>
+                <a:spcPts val="0"/>
+              </a:spcBef>
+              <a:spcAft>
+                <a:spcPts val="0"/>
+              </a:spcAft>
+            </a:pPr>
+            <a:r>
+              <a:rPr b="0">
+                <a:solidFill>
+                  <a:srgbClr val="193B5E"/>
+                </a:solidFill>
+                <a:latin typeface="Microsoft YaHei"/>
+              </a:rPr>
+              <a:t>五轮演化后</a:t>
+            </a:r>
+          </a:p>
+        </p:txBody>
+      </p:sp>
+      <p:sp>
+        <p:nvSpPr>
+          <p:cNvPr id="62" name="TextBox 61"/>
+          <p:cNvSpPr txBox="1"/>
+          <p:nvPr/>
+        </p:nvSpPr>
+        <p:spPr>
+          <a:xfrm>
+            <a:off x="3666744" y="5163039"/>
+            <a:ext cx="1709928" cy="249299"/>
+          </a:xfrm>
+          <a:prstGeom prst="rect">
+            <a:avLst/>
+          </a:prstGeom>
+          <a:noFill/>
+        </p:spPr>
+        <p:txBody>
+          <a:bodyPr wrap="square" lIns="18288" tIns="18288" rIns="18288" bIns="18288" anchor="ctr">
+            <a:spAutoFit/>
+          </a:bodyPr>
+          <a:lstStyle/>
+          <a:p>
+            <a:pPr algn="ctr">
+              <a:spcBef>
+                <a:spcPts val="0"/>
+              </a:spcBef>
+              <a:spcAft>
+                <a:spcPts val="0"/>
+              </a:spcAft>
+            </a:pPr>
+            <a:r>
+              <a:rPr sz="1380" b="1">
+                <a:solidFill>
+                  <a:srgbClr val="526A80"/>
+                </a:solidFill>
+                <a:latin typeface="Microsoft YaHei"/>
+              </a:rPr>
+              <a:t>920/1247</a:t>
+            </a:r>
+          </a:p>
+        </p:txBody>
+      </p:sp>
+      <p:sp>
+        <p:nvSpPr>
+          <p:cNvPr id="63" name="TextBox 62"/>
+          <p:cNvSpPr txBox="1"/>
+          <p:nvPr/>
+        </p:nvSpPr>
+        <p:spPr>
+          <a:xfrm>
+            <a:off x="3666744" y="5482677"/>
+            <a:ext cx="1709928" cy="332399"/>
+          </a:xfrm>
+          <a:prstGeom prst="rect">
+            <a:avLst/>
+          </a:prstGeom>
+          <a:noFill/>
+        </p:spPr>
+        <p:txBody>
+          <a:bodyPr wrap="square" lIns="18288" tIns="18288" rIns="18288" bIns="18288" anchor="ctr">
+            <a:spAutoFit/>
+          </a:bodyPr>
+          <a:lstStyle/>
+          <a:p>
+            <a:pPr algn="ctr">
+              <a:spcBef>
+                <a:spcPts val="0"/>
+              </a:spcBef>
+              <a:spcAft>
+                <a:spcPts val="0"/>
+              </a:spcAft>
+            </a:pPr>
+            <a:r>
+              <a:rPr sz="1920" b="1">
+                <a:solidFill>
+                  <a:srgbClr val="193B5E"/>
+                </a:solidFill>
+                <a:latin typeface="Microsoft YaHei"/>
+              </a:rPr>
+              <a:t>73.78%</a:t>
+            </a:r>
+          </a:p>
+        </p:txBody>
+      </p:sp>
+      <p:sp>
+        <p:nvSpPr>
+          <p:cNvPr id="64" name="TextBox 63"/>
+          <p:cNvSpPr txBox="1"/>
+          <p:nvPr/>
+        </p:nvSpPr>
+        <p:spPr>
+          <a:xfrm>
+            <a:off x="5449824" y="5163039"/>
+            <a:ext cx="1783079" cy="249299"/>
+          </a:xfrm>
+          <a:prstGeom prst="rect">
+            <a:avLst/>
+          </a:prstGeom>
+          <a:noFill/>
+        </p:spPr>
+        <p:txBody>
+          <a:bodyPr wrap="square" lIns="18288" tIns="18288" rIns="18288" bIns="18288" anchor="ctr">
+            <a:spAutoFit/>
+          </a:bodyPr>
+          <a:lstStyle/>
+          <a:p>
+            <a:pPr algn="ctr">
+              <a:spcBef>
+                <a:spcPts val="0"/>
+              </a:spcBef>
+              <a:spcAft>
+                <a:spcPts val="0"/>
+              </a:spcAft>
+            </a:pPr>
+            <a:r>
+              <a:rPr sz="1380" b="1">
+                <a:solidFill>
+                  <a:srgbClr val="526A80"/>
+                </a:solidFill>
+                <a:latin typeface="Microsoft YaHei"/>
+              </a:rPr>
+              <a:t>836/1147</a:t>
+            </a:r>
+          </a:p>
+        </p:txBody>
+      </p:sp>
+      <p:sp>
+        <p:nvSpPr>
+          <p:cNvPr id="65" name="TextBox 64"/>
+          <p:cNvSpPr txBox="1"/>
+          <p:nvPr/>
+        </p:nvSpPr>
+        <p:spPr>
+          <a:xfrm>
+            <a:off x="5449824" y="5482677"/>
+            <a:ext cx="1783079" cy="332399"/>
+          </a:xfrm>
+          <a:prstGeom prst="rect">
+            <a:avLst/>
+          </a:prstGeom>
+          <a:noFill/>
+        </p:spPr>
+        <p:txBody>
+          <a:bodyPr wrap="square" lIns="18288" tIns="18288" rIns="18288" bIns="18288" anchor="ctr">
+            <a:spAutoFit/>
+          </a:bodyPr>
+          <a:lstStyle/>
+          <a:p>
+            <a:pPr algn="ctr">
+              <a:spcBef>
+                <a:spcPts val="0"/>
+              </a:spcBef>
+              <a:spcAft>
+                <a:spcPts val="0"/>
+              </a:spcAft>
+            </a:pPr>
+            <a:r>
+              <a:rPr sz="1920" b="1">
+                <a:solidFill>
+                  <a:srgbClr val="193B5E"/>
+                </a:solidFill>
+                <a:latin typeface="Microsoft YaHei"/>
+              </a:rPr>
+              <a:t>72.89%</a:t>
+            </a:r>
+          </a:p>
+        </p:txBody>
+      </p:sp>
+      <p:sp>
+        <p:nvSpPr>
+          <p:cNvPr id="66" name="TextBox 65"/>
+          <p:cNvSpPr txBox="1"/>
+          <p:nvPr/>
+        </p:nvSpPr>
+        <p:spPr>
+          <a:xfrm>
+            <a:off x="7306056" y="5163039"/>
+            <a:ext cx="1234439" cy="249299"/>
+          </a:xfrm>
+          <a:prstGeom prst="rect">
+            <a:avLst/>
+          </a:prstGeom>
+          <a:noFill/>
+        </p:spPr>
+        <p:txBody>
+          <a:bodyPr wrap="square" lIns="18288" tIns="18288" rIns="18288" bIns="18288" anchor="ctr">
+            <a:spAutoFit/>
+          </a:bodyPr>
+          <a:lstStyle/>
+          <a:p>
+            <a:pPr algn="ctr">
+              <a:spcBef>
+                <a:spcPts val="0"/>
+              </a:spcBef>
+              <a:spcAft>
+                <a:spcPts val="0"/>
+              </a:spcAft>
+            </a:pPr>
+            <a:r>
+              <a:rPr sz="1380" b="1">
+                <a:solidFill>
+                  <a:srgbClr val="526A80"/>
+                </a:solidFill>
+                <a:latin typeface="Microsoft YaHei"/>
+              </a:rPr>
+              <a:t>84/100</a:t>
+            </a:r>
+          </a:p>
+        </p:txBody>
+      </p:sp>
+      <p:sp>
+        <p:nvSpPr>
+          <p:cNvPr id="67" name="TextBox 66"/>
+          <p:cNvSpPr txBox="1"/>
+          <p:nvPr/>
+        </p:nvSpPr>
+        <p:spPr>
+          <a:xfrm>
+            <a:off x="7306056" y="5482677"/>
+            <a:ext cx="1234439" cy="332399"/>
+          </a:xfrm>
+          <a:prstGeom prst="rect">
+            <a:avLst/>
+          </a:prstGeom>
+          <a:noFill/>
+        </p:spPr>
+        <p:txBody>
+          <a:bodyPr wrap="square" lIns="18288" tIns="18288" rIns="18288" bIns="18288" anchor="ctr">
+            <a:spAutoFit/>
+          </a:bodyPr>
+          <a:lstStyle/>
+          <a:p>
+            <a:pPr algn="ctr">
+              <a:spcBef>
+                <a:spcPts val="0"/>
+              </a:spcBef>
+              <a:spcAft>
+                <a:spcPts val="0"/>
+              </a:spcAft>
+            </a:pPr>
+            <a:r>
+              <a:rPr sz="1920" b="1">
+                <a:solidFill>
+                  <a:srgbClr val="193B5E"/>
+                </a:solidFill>
+                <a:latin typeface="Microsoft YaHei"/>
+              </a:rPr>
+              <a:t>84.00%</a:t>
+            </a:r>
+          </a:p>
+        </p:txBody>
+      </p:sp>
+      <p:sp>
+        <p:nvSpPr>
+          <p:cNvPr id="68" name="TextBox 67"/>
+          <p:cNvSpPr txBox="1"/>
+          <p:nvPr/>
+        </p:nvSpPr>
+        <p:spPr>
+          <a:xfrm>
+            <a:off x="8613648" y="5163039"/>
+            <a:ext cx="1920240" cy="249299"/>
+          </a:xfrm>
+          <a:prstGeom prst="rect">
+            <a:avLst/>
+          </a:prstGeom>
+          <a:noFill/>
+        </p:spPr>
+        <p:txBody>
+          <a:bodyPr wrap="square" lIns="18288" tIns="18288" rIns="18288" bIns="18288" anchor="ctr">
+            <a:spAutoFit/>
+          </a:bodyPr>
+          <a:lstStyle/>
+          <a:p>
+            <a:pPr algn="ctr">
+              <a:spcBef>
+                <a:spcPts val="0"/>
+              </a:spcBef>
+              <a:spcAft>
+                <a:spcPts val="0"/>
+              </a:spcAft>
+            </a:pPr>
+            <a:r>
+              <a:rPr sz="1380" b="1">
+                <a:solidFill>
+                  <a:srgbClr val="526A80"/>
+                </a:solidFill>
+                <a:latin typeface="Microsoft YaHei"/>
+              </a:rPr>
+              <a:t>534/648</a:t>
+            </a:r>
+          </a:p>
+        </p:txBody>
+      </p:sp>
+      <p:sp>
+        <p:nvSpPr>
+          <p:cNvPr id="69" name="TextBox 68"/>
+          <p:cNvSpPr txBox="1"/>
+          <p:nvPr/>
+        </p:nvSpPr>
+        <p:spPr>
+          <a:xfrm>
+            <a:off x="8613648" y="5482677"/>
+            <a:ext cx="1920240" cy="332399"/>
+          </a:xfrm>
+          <a:prstGeom prst="rect">
+            <a:avLst/>
+          </a:prstGeom>
+          <a:noFill/>
+        </p:spPr>
+        <p:txBody>
+          <a:bodyPr wrap="square" lIns="18288" tIns="18288" rIns="18288" bIns="18288" anchor="ctr">
+            <a:spAutoFit/>
+          </a:bodyPr>
+          <a:lstStyle/>
+          <a:p>
+            <a:pPr algn="ctr">
+              <a:spcBef>
+                <a:spcPts val="0"/>
+              </a:spcBef>
+              <a:spcAft>
+                <a:spcPts val="0"/>
+              </a:spcAft>
+            </a:pPr>
+            <a:r>
+              <a:rPr sz="1920" b="1">
+                <a:solidFill>
+                  <a:srgbClr val="193B5E"/>
+                </a:solidFill>
+                <a:latin typeface="Microsoft YaHei"/>
+              </a:rPr>
+              <a:t>82.41%</a:t>
+            </a:r>
+          </a:p>
+        </p:txBody>
+      </p:sp>
+      <p:sp>
+        <p:nvSpPr>
+          <p:cNvPr id="70" name="TextBox 69"/>
+          <p:cNvSpPr txBox="1"/>
+          <p:nvPr/>
+        </p:nvSpPr>
+        <p:spPr>
+          <a:xfrm>
+            <a:off x="10607040" y="5163039"/>
+            <a:ext cx="1481328" cy="249299"/>
+          </a:xfrm>
+          <a:prstGeom prst="rect">
+            <a:avLst/>
+          </a:prstGeom>
+          <a:noFill/>
+        </p:spPr>
+        <p:txBody>
+          <a:bodyPr wrap="square" lIns="18288" tIns="18288" rIns="18288" bIns="18288" anchor="ctr">
+            <a:spAutoFit/>
+          </a:bodyPr>
+          <a:lstStyle/>
+          <a:p>
+            <a:pPr algn="ctr">
+              <a:spcBef>
+                <a:spcPts val="0"/>
+              </a:spcBef>
+              <a:spcAft>
+                <a:spcPts val="0"/>
+              </a:spcAft>
+            </a:pPr>
+            <a:r>
+              <a:rPr sz="1380" b="1">
+                <a:solidFill>
+                  <a:srgbClr val="526A80"/>
+                </a:solidFill>
+                <a:latin typeface="Microsoft YaHei"/>
+              </a:rPr>
+              <a:t>89/181</a:t>
+            </a:r>
+          </a:p>
+        </p:txBody>
+      </p:sp>
+      <p:sp>
+        <p:nvSpPr>
+          <p:cNvPr id="71" name="TextBox 70"/>
+          <p:cNvSpPr txBox="1"/>
+          <p:nvPr/>
+        </p:nvSpPr>
+        <p:spPr>
+          <a:xfrm>
+            <a:off x="10607040" y="5482677"/>
+            <a:ext cx="1481328" cy="332399"/>
+          </a:xfrm>
+          <a:prstGeom prst="rect">
+            <a:avLst/>
+          </a:prstGeom>
+          <a:noFill/>
+        </p:spPr>
+        <p:txBody>
+          <a:bodyPr wrap="square" lIns="18288" tIns="18288" rIns="18288" bIns="18288" anchor="ctr">
+            <a:spAutoFit/>
+          </a:bodyPr>
+          <a:lstStyle/>
+          <a:p>
+            <a:pPr algn="ctr">
+              <a:spcBef>
+                <a:spcPts val="0"/>
+              </a:spcBef>
+              <a:spcAft>
+                <a:spcPts val="0"/>
+              </a:spcAft>
+            </a:pPr>
+            <a:r>
+              <a:rPr sz="1920" b="1">
+                <a:solidFill>
+                  <a:srgbClr val="193B5E"/>
+                </a:solidFill>
+                <a:latin typeface="Microsoft YaHei"/>
+              </a:rPr>
+              <a:t>49.17%</a:t>
+            </a:r>
+          </a:p>
+        </p:txBody>
+      </p:sp>
+      <p:sp>
+        <p:nvSpPr>
+          <p:cNvPr id="72" name="TextBox 71"/>
+          <p:cNvSpPr txBox="1"/>
+          <p:nvPr/>
+        </p:nvSpPr>
+        <p:spPr>
+          <a:xfrm>
+            <a:off x="12161519" y="5163039"/>
+            <a:ext cx="2093976" cy="249299"/>
+          </a:xfrm>
+          <a:prstGeom prst="rect">
+            <a:avLst/>
+          </a:prstGeom>
+          <a:noFill/>
+        </p:spPr>
+        <p:txBody>
+          <a:bodyPr wrap="square" lIns="18288" tIns="18288" rIns="18288" bIns="18288" anchor="ctr">
+            <a:spAutoFit/>
+          </a:bodyPr>
+          <a:lstStyle/>
+          <a:p>
+            <a:pPr algn="ctr">
+              <a:spcBef>
+                <a:spcPts val="0"/>
+              </a:spcBef>
+              <a:spcAft>
+                <a:spcPts val="0"/>
+              </a:spcAft>
+            </a:pPr>
+            <a:r>
+              <a:rPr sz="1380" b="1">
+                <a:solidFill>
+                  <a:srgbClr val="526A80"/>
+                </a:solidFill>
+                <a:latin typeface="Microsoft YaHei"/>
+              </a:rPr>
+              <a:t>619/749</a:t>
+            </a:r>
+          </a:p>
+        </p:txBody>
+      </p:sp>
+      <p:sp>
+        <p:nvSpPr>
+          <p:cNvPr id="73" name="TextBox 72"/>
+          <p:cNvSpPr txBox="1"/>
+          <p:nvPr/>
+        </p:nvSpPr>
+        <p:spPr>
+          <a:xfrm>
+            <a:off x="12161519" y="5482677"/>
+            <a:ext cx="2093976" cy="332399"/>
+          </a:xfrm>
+          <a:prstGeom prst="rect">
+            <a:avLst/>
+          </a:prstGeom>
+          <a:noFill/>
+        </p:spPr>
+        <p:txBody>
+          <a:bodyPr wrap="square" lIns="18288" tIns="18288" rIns="18288" bIns="18288" anchor="ctr">
+            <a:spAutoFit/>
+          </a:bodyPr>
+          <a:lstStyle/>
+          <a:p>
+            <a:pPr algn="ctr">
+              <a:spcBef>
+                <a:spcPts val="0"/>
+              </a:spcBef>
+              <a:spcAft>
+                <a:spcPts val="0"/>
+              </a:spcAft>
+            </a:pPr>
+            <a:r>
+              <a:rPr sz="1920" b="1">
+                <a:solidFill>
+                  <a:srgbClr val="193B5E"/>
+                </a:solidFill>
+                <a:latin typeface="Microsoft YaHei"/>
+              </a:rPr>
+              <a:t>82.64%</a:t>
+            </a:r>
+          </a:p>
+        </p:txBody>
+      </p:sp>
+      <p:sp>
+        <p:nvSpPr>
+          <p:cNvPr id="74" name="TextBox 73"/>
+          <p:cNvSpPr txBox="1"/>
+          <p:nvPr/>
+        </p:nvSpPr>
+        <p:spPr>
+          <a:xfrm>
+            <a:off x="14328648" y="5163039"/>
+            <a:ext cx="1975104" cy="249299"/>
+          </a:xfrm>
+          <a:prstGeom prst="rect">
+            <a:avLst/>
+          </a:prstGeom>
+          <a:noFill/>
+        </p:spPr>
+        <p:txBody>
+          <a:bodyPr wrap="square" lIns="18288" tIns="18288" rIns="18288" bIns="18288" anchor="ctr">
+            <a:spAutoFit/>
+          </a:bodyPr>
+          <a:lstStyle/>
+          <a:p>
+            <a:pPr algn="ctr">
+              <a:spcBef>
+                <a:spcPts val="0"/>
+              </a:spcBef>
+              <a:spcAft>
+                <a:spcPts val="0"/>
+              </a:spcAft>
+            </a:pPr>
+            <a:r>
+              <a:rPr sz="1380" b="1">
+                <a:solidFill>
+                  <a:srgbClr val="526A80"/>
+                </a:solidFill>
+                <a:latin typeface="Microsoft YaHei"/>
+              </a:rPr>
+              <a:t>212/317</a:t>
+            </a:r>
+          </a:p>
+        </p:txBody>
+      </p:sp>
+      <p:sp>
+        <p:nvSpPr>
+          <p:cNvPr id="75" name="TextBox 74"/>
+          <p:cNvSpPr txBox="1"/>
+          <p:nvPr/>
+        </p:nvSpPr>
+        <p:spPr>
+          <a:xfrm>
+            <a:off x="14328648" y="5482677"/>
+            <a:ext cx="1975104" cy="332399"/>
+          </a:xfrm>
+          <a:prstGeom prst="rect">
+            <a:avLst/>
+          </a:prstGeom>
+          <a:noFill/>
+        </p:spPr>
+        <p:txBody>
+          <a:bodyPr wrap="square" lIns="18288" tIns="18288" rIns="18288" bIns="18288" anchor="ctr">
+            <a:spAutoFit/>
+          </a:bodyPr>
+          <a:lstStyle/>
+          <a:p>
+            <a:pPr algn="ctr">
+              <a:spcBef>
+                <a:spcPts val="0"/>
+              </a:spcBef>
+              <a:spcAft>
+                <a:spcPts val="0"/>
+              </a:spcAft>
+            </a:pPr>
+            <a:r>
+              <a:rPr sz="1920" b="1">
+                <a:solidFill>
+                  <a:srgbClr val="193B5E"/>
+                </a:solidFill>
+                <a:latin typeface="Microsoft YaHei"/>
+              </a:rPr>
+              <a:t>66.88%</a:t>
+            </a:r>
+          </a:p>
+        </p:txBody>
+      </p:sp>
+      <p:sp>
+        <p:nvSpPr>
+          <p:cNvPr id="76" name="Rectangle 75"/>
+          <p:cNvSpPr/>
+          <p:nvPr/>
+        </p:nvSpPr>
+        <p:spPr>
+          <a:xfrm>
+            <a:off x="713232" y="5991777"/>
+            <a:ext cx="2916936" cy="955547"/>
+          </a:xfrm>
+          <a:prstGeom prst="rect">
+            <a:avLst/>
+          </a:prstGeom>
+          <a:solidFill>
+            <a:srgbClr val="F7FBFF"/>
+          </a:solidFill>
+          <a:ln w="8890">
+            <a:solidFill>
+              <a:srgbClr val="D2E1ED"/>
+            </a:solidFill>
+          </a:ln>
+        </p:spPr>
+        <p:style>
+          <a:lnRef idx="1">
+            <a:schemeClr val="accent1"/>
+          </a:lnRef>
+          <a:fillRef idx="3">
+            <a:schemeClr val="accent1"/>
+          </a:fillRef>
+          <a:effectRef idx="2">
+            <a:schemeClr val="accent1"/>
+          </a:effectRef>
+          <a:fontRef idx="minor">
+            <a:schemeClr val="lt1"/>
+          </a:fontRef>
+        </p:style>
+        <p:txBody>
+          <a:bodyPr rtlCol="0" anchor="ctr"/>
+          <a:lstStyle/>
+          <a:p>
+            <a:pPr algn="ctr"/>
+            <a:endParaRPr sz="2000"/>
+          </a:p>
+        </p:txBody>
+      </p:sp>
+      <p:sp>
+        <p:nvSpPr>
+          <p:cNvPr id="77" name="Rectangle 76"/>
+          <p:cNvSpPr/>
+          <p:nvPr/>
+        </p:nvSpPr>
+        <p:spPr>
+          <a:xfrm>
+            <a:off x="3630168" y="5991777"/>
+            <a:ext cx="1783080" cy="955547"/>
+          </a:xfrm>
+          <a:prstGeom prst="rect">
+            <a:avLst/>
+          </a:prstGeom>
+          <a:solidFill>
+            <a:srgbClr val="F7FBFF"/>
+          </a:solidFill>
+          <a:ln w="8890">
+            <a:solidFill>
+              <a:srgbClr val="D2E1ED"/>
+            </a:solidFill>
+          </a:ln>
+        </p:spPr>
+        <p:style>
+          <a:lnRef idx="1">
+            <a:schemeClr val="accent1"/>
+          </a:lnRef>
+          <a:fillRef idx="3">
+            <a:schemeClr val="accent1"/>
+          </a:fillRef>
+          <a:effectRef idx="2">
+            <a:schemeClr val="accent1"/>
+          </a:effectRef>
+          <a:fontRef idx="minor">
+            <a:schemeClr val="lt1"/>
+          </a:fontRef>
+        </p:style>
+        <p:txBody>
+          <a:bodyPr rtlCol="0" anchor="ctr"/>
+          <a:lstStyle/>
+          <a:p>
+            <a:pPr algn="ctr"/>
+            <a:endParaRPr b="1"/>
+          </a:p>
+        </p:txBody>
+      </p:sp>
+      <p:sp>
+        <p:nvSpPr>
+          <p:cNvPr id="78" name="Rectangle 77"/>
+          <p:cNvSpPr/>
+          <p:nvPr/>
+        </p:nvSpPr>
+        <p:spPr>
+          <a:xfrm>
+            <a:off x="5413248" y="5991777"/>
+            <a:ext cx="1856231" cy="955547"/>
+          </a:xfrm>
+          <a:prstGeom prst="rect">
+            <a:avLst/>
+          </a:prstGeom>
+          <a:solidFill>
+            <a:srgbClr val="F7FBFF"/>
+          </a:solidFill>
+          <a:ln w="8890">
+            <a:solidFill>
+              <a:srgbClr val="D2E1ED"/>
+            </a:solidFill>
+          </a:ln>
+        </p:spPr>
+        <p:style>
+          <a:lnRef idx="1">
+            <a:schemeClr val="accent1"/>
+          </a:lnRef>
+          <a:fillRef idx="3">
+            <a:schemeClr val="accent1"/>
+          </a:fillRef>
+          <a:effectRef idx="2">
+            <a:schemeClr val="accent1"/>
+          </a:effectRef>
+          <a:fontRef idx="minor">
+            <a:schemeClr val="lt1"/>
+          </a:fontRef>
+        </p:style>
+        <p:txBody>
+          <a:bodyPr rtlCol="0" anchor="ctr"/>
+          <a:lstStyle/>
+          <a:p>
+            <a:pPr algn="ctr"/>
+            <a:endParaRPr b="1"/>
+          </a:p>
+        </p:txBody>
+      </p:sp>
+      <p:sp>
+        <p:nvSpPr>
+          <p:cNvPr id="79" name="Rectangle 78"/>
+          <p:cNvSpPr/>
+          <p:nvPr/>
+        </p:nvSpPr>
+        <p:spPr>
+          <a:xfrm>
+            <a:off x="7269480" y="5991777"/>
+            <a:ext cx="1307592" cy="955547"/>
+          </a:xfrm>
+          <a:prstGeom prst="rect">
+            <a:avLst/>
+          </a:prstGeom>
+          <a:solidFill>
+            <a:srgbClr val="F7FBFF"/>
+          </a:solidFill>
+          <a:ln w="8890">
+            <a:solidFill>
+              <a:srgbClr val="D2E1ED"/>
+            </a:solidFill>
+          </a:ln>
+        </p:spPr>
+        <p:style>
+          <a:lnRef idx="1">
+            <a:schemeClr val="accent1"/>
+          </a:lnRef>
+          <a:fillRef idx="3">
+            <a:schemeClr val="accent1"/>
+          </a:fillRef>
+          <a:effectRef idx="2">
+            <a:schemeClr val="accent1"/>
+          </a:effectRef>
+          <a:fontRef idx="minor">
+            <a:schemeClr val="lt1"/>
+          </a:fontRef>
+        </p:style>
+        <p:txBody>
+          <a:bodyPr rtlCol="0" anchor="ctr"/>
+          <a:lstStyle/>
+          <a:p>
+            <a:pPr algn="ctr"/>
+            <a:endParaRPr b="1"/>
+          </a:p>
+        </p:txBody>
+      </p:sp>
+      <p:sp>
+        <p:nvSpPr>
+          <p:cNvPr id="80" name="Rectangle 79"/>
+          <p:cNvSpPr/>
+          <p:nvPr/>
+        </p:nvSpPr>
+        <p:spPr>
+          <a:xfrm>
+            <a:off x="8577072" y="5991777"/>
+            <a:ext cx="1993392" cy="955547"/>
+          </a:xfrm>
+          <a:prstGeom prst="rect">
+            <a:avLst/>
+          </a:prstGeom>
+          <a:solidFill>
+            <a:srgbClr val="F7FBFF"/>
+          </a:solidFill>
+          <a:ln w="8890">
+            <a:solidFill>
+              <a:srgbClr val="D2E1ED"/>
+            </a:solidFill>
+          </a:ln>
+        </p:spPr>
+        <p:style>
+          <a:lnRef idx="1">
+            <a:schemeClr val="accent1"/>
+          </a:lnRef>
+          <a:fillRef idx="3">
+            <a:schemeClr val="accent1"/>
+          </a:fillRef>
+          <a:effectRef idx="2">
+            <a:schemeClr val="accent1"/>
+          </a:effectRef>
+          <a:fontRef idx="minor">
+            <a:schemeClr val="lt1"/>
+          </a:fontRef>
+        </p:style>
+        <p:txBody>
+          <a:bodyPr rtlCol="0" anchor="ctr"/>
+          <a:lstStyle/>
+          <a:p>
+            <a:pPr algn="ctr"/>
+            <a:endParaRPr b="1"/>
+          </a:p>
+        </p:txBody>
+      </p:sp>
+      <p:sp>
+        <p:nvSpPr>
+          <p:cNvPr id="81" name="Rectangle 80"/>
+          <p:cNvSpPr/>
+          <p:nvPr/>
+        </p:nvSpPr>
+        <p:spPr>
+          <a:xfrm>
+            <a:off x="10570464" y="5991777"/>
+            <a:ext cx="1554480" cy="955547"/>
+          </a:xfrm>
+          <a:prstGeom prst="rect">
+            <a:avLst/>
+          </a:prstGeom>
+          <a:solidFill>
+            <a:srgbClr val="F7FBFF"/>
+          </a:solidFill>
+          <a:ln w="8890">
+            <a:solidFill>
+              <a:srgbClr val="D2E1ED"/>
+            </a:solidFill>
+          </a:ln>
+        </p:spPr>
+        <p:style>
+          <a:lnRef idx="1">
+            <a:schemeClr val="accent1"/>
+          </a:lnRef>
+          <a:fillRef idx="3">
+            <a:schemeClr val="accent1"/>
+          </a:fillRef>
+          <a:effectRef idx="2">
+            <a:schemeClr val="accent1"/>
+          </a:effectRef>
+          <a:fontRef idx="minor">
+            <a:schemeClr val="lt1"/>
+          </a:fontRef>
+        </p:style>
+        <p:txBody>
+          <a:bodyPr rtlCol="0" anchor="ctr"/>
+          <a:lstStyle/>
+          <a:p>
+            <a:pPr algn="ctr"/>
+            <a:endParaRPr b="1"/>
+          </a:p>
+        </p:txBody>
+      </p:sp>
+      <p:sp>
+        <p:nvSpPr>
+          <p:cNvPr id="82" name="Rectangle 81"/>
+          <p:cNvSpPr/>
+          <p:nvPr/>
+        </p:nvSpPr>
+        <p:spPr>
+          <a:xfrm>
+            <a:off x="12124944" y="5991777"/>
+            <a:ext cx="2167128" cy="955547"/>
+          </a:xfrm>
+          <a:prstGeom prst="rect">
+            <a:avLst/>
+          </a:prstGeom>
+          <a:solidFill>
+            <a:srgbClr val="F7FBFF"/>
+          </a:solidFill>
+          <a:ln w="8890">
+            <a:solidFill>
+              <a:srgbClr val="D2E1ED"/>
+            </a:solidFill>
+          </a:ln>
+        </p:spPr>
+        <p:style>
+          <a:lnRef idx="1">
+            <a:schemeClr val="accent1"/>
+          </a:lnRef>
+          <a:fillRef idx="3">
+            <a:schemeClr val="accent1"/>
+          </a:fillRef>
+          <a:effectRef idx="2">
+            <a:schemeClr val="accent1"/>
+          </a:effectRef>
+          <a:fontRef idx="minor">
+            <a:schemeClr val="lt1"/>
+          </a:fontRef>
+        </p:style>
+        <p:txBody>
+          <a:bodyPr rtlCol="0" anchor="ctr"/>
+          <a:lstStyle/>
+          <a:p>
+            <a:pPr algn="ctr"/>
+            <a:endParaRPr b="1"/>
+          </a:p>
+        </p:txBody>
+      </p:sp>
+      <p:sp>
+        <p:nvSpPr>
+          <p:cNvPr id="83" name="Rectangle 82"/>
+          <p:cNvSpPr/>
+          <p:nvPr/>
+        </p:nvSpPr>
+        <p:spPr>
+          <a:xfrm>
+            <a:off x="14292072" y="5991777"/>
+            <a:ext cx="2048256" cy="955547"/>
+          </a:xfrm>
+          <a:prstGeom prst="rect">
+            <a:avLst/>
+          </a:prstGeom>
+          <a:solidFill>
+            <a:srgbClr val="F7FBFF"/>
+          </a:solidFill>
+          <a:ln w="8890">
+            <a:solidFill>
+              <a:srgbClr val="D2E1ED"/>
+            </a:solidFill>
+          </a:ln>
+        </p:spPr>
+        <p:style>
+          <a:lnRef idx="1">
+            <a:schemeClr val="accent1"/>
+          </a:lnRef>
+          <a:fillRef idx="3">
+            <a:schemeClr val="accent1"/>
+          </a:fillRef>
+          <a:effectRef idx="2">
+            <a:schemeClr val="accent1"/>
+          </a:effectRef>
+          <a:fontRef idx="minor">
+            <a:schemeClr val="lt1"/>
+          </a:fontRef>
+        </p:style>
+        <p:txBody>
+          <a:bodyPr rtlCol="0" anchor="ctr"/>
+          <a:lstStyle/>
+          <a:p>
+            <a:pPr algn="ctr"/>
+            <a:endParaRPr b="1"/>
+          </a:p>
+        </p:txBody>
+      </p:sp>
+      <p:sp>
+        <p:nvSpPr>
+          <p:cNvPr id="84" name="TextBox 83"/>
+          <p:cNvSpPr txBox="1"/>
+          <p:nvPr/>
+        </p:nvSpPr>
+        <p:spPr>
+          <a:xfrm>
+            <a:off x="841248" y="6174085"/>
+            <a:ext cx="2679191" cy="590931"/>
+          </a:xfrm>
+          <a:prstGeom prst="rect">
+            <a:avLst/>
+          </a:prstGeom>
+          <a:noFill/>
+        </p:spPr>
+        <p:txBody>
+          <a:bodyPr wrap="square" lIns="18288" tIns="18288" rIns="18288" bIns="18288" anchor="ctr">
+            <a:spAutoFit/>
+          </a:bodyPr>
+          <a:lstStyle/>
+          <a:p>
+            <a:pPr algn="l">
+              <a:spcBef>
+                <a:spcPts val="0"/>
+              </a:spcBef>
+              <a:spcAft>
+                <a:spcPts val="0"/>
+              </a:spcAft>
+            </a:pPr>
+            <a:r>
+              <a:rPr b="0">
+                <a:solidFill>
+                  <a:srgbClr val="193B5E"/>
+                </a:solidFill>
+                <a:latin typeface="Microsoft YaHei"/>
+              </a:rPr>
+              <a:t>偏好归纳五根</a:t>
+            </a:r>
+          </a:p>
+          <a:p>
+            <a:pPr algn="l">
+              <a:spcBef>
+                <a:spcPts val="0"/>
+              </a:spcBef>
+              <a:spcAft>
+                <a:spcPts val="0"/>
+              </a:spcAft>
+            </a:pPr>
+            <a:r>
+              <a:rPr b="0">
+                <a:solidFill>
+                  <a:srgbClr val="193B5E"/>
+                </a:solidFill>
+                <a:latin typeface="Microsoft YaHei"/>
+              </a:rPr>
+              <a:t>初始子树</a:t>
+            </a:r>
+          </a:p>
+        </p:txBody>
+      </p:sp>
+      <p:sp>
+        <p:nvSpPr>
+          <p:cNvPr id="85" name="TextBox 84"/>
+          <p:cNvSpPr txBox="1"/>
+          <p:nvPr/>
+        </p:nvSpPr>
+        <p:spPr>
+          <a:xfrm>
+            <a:off x="3666744" y="6118587"/>
+            <a:ext cx="1709928" cy="249299"/>
+          </a:xfrm>
+          <a:prstGeom prst="rect">
+            <a:avLst/>
+          </a:prstGeom>
+          <a:noFill/>
+        </p:spPr>
+        <p:txBody>
+          <a:bodyPr wrap="square" lIns="18288" tIns="18288" rIns="18288" bIns="18288" anchor="ctr">
+            <a:spAutoFit/>
+          </a:bodyPr>
+          <a:lstStyle/>
+          <a:p>
+            <a:pPr algn="ctr">
+              <a:spcBef>
+                <a:spcPts val="0"/>
+              </a:spcBef>
+              <a:spcAft>
+                <a:spcPts val="0"/>
+              </a:spcAft>
+            </a:pPr>
+            <a:r>
+              <a:rPr sz="1380" b="1">
+                <a:solidFill>
+                  <a:srgbClr val="526A80"/>
+                </a:solidFill>
+                <a:latin typeface="Microsoft YaHei"/>
+              </a:rPr>
+              <a:t>929/1247</a:t>
+            </a:r>
+          </a:p>
+        </p:txBody>
+      </p:sp>
+      <p:sp>
+        <p:nvSpPr>
+          <p:cNvPr id="86" name="TextBox 85"/>
+          <p:cNvSpPr txBox="1"/>
+          <p:nvPr/>
+        </p:nvSpPr>
+        <p:spPr>
+          <a:xfrm>
+            <a:off x="3666744" y="6438225"/>
+            <a:ext cx="1709928" cy="332399"/>
+          </a:xfrm>
+          <a:prstGeom prst="rect">
+            <a:avLst/>
+          </a:prstGeom>
+          <a:noFill/>
+        </p:spPr>
+        <p:txBody>
+          <a:bodyPr wrap="square" lIns="18288" tIns="18288" rIns="18288" bIns="18288" anchor="ctr">
+            <a:spAutoFit/>
+          </a:bodyPr>
+          <a:lstStyle/>
+          <a:p>
+            <a:pPr algn="ctr">
+              <a:spcBef>
+                <a:spcPts val="0"/>
+              </a:spcBef>
+              <a:spcAft>
+                <a:spcPts val="0"/>
+              </a:spcAft>
+            </a:pPr>
+            <a:r>
+              <a:rPr sz="1920" b="1">
+                <a:solidFill>
+                  <a:srgbClr val="193B5E"/>
+                </a:solidFill>
+                <a:latin typeface="Microsoft YaHei"/>
+              </a:rPr>
+              <a:t>74.50%</a:t>
+            </a:r>
+          </a:p>
+        </p:txBody>
+      </p:sp>
+      <p:sp>
+        <p:nvSpPr>
+          <p:cNvPr id="87" name="TextBox 86"/>
+          <p:cNvSpPr txBox="1"/>
+          <p:nvPr/>
+        </p:nvSpPr>
+        <p:spPr>
+          <a:xfrm>
+            <a:off x="5449824" y="6118587"/>
+            <a:ext cx="1783079" cy="249299"/>
+          </a:xfrm>
+          <a:prstGeom prst="rect">
+            <a:avLst/>
+          </a:prstGeom>
+          <a:noFill/>
+        </p:spPr>
+        <p:txBody>
+          <a:bodyPr wrap="square" lIns="18288" tIns="18288" rIns="18288" bIns="18288" anchor="ctr">
+            <a:spAutoFit/>
+          </a:bodyPr>
+          <a:lstStyle/>
+          <a:p>
+            <a:pPr algn="ctr">
+              <a:spcBef>
+                <a:spcPts val="0"/>
+              </a:spcBef>
+              <a:spcAft>
+                <a:spcPts val="0"/>
+              </a:spcAft>
+            </a:pPr>
+            <a:r>
+              <a:rPr sz="1380" b="1">
+                <a:solidFill>
+                  <a:srgbClr val="526A80"/>
+                </a:solidFill>
+                <a:latin typeface="Microsoft YaHei"/>
+              </a:rPr>
+              <a:t>850/1147</a:t>
+            </a:r>
+          </a:p>
+        </p:txBody>
+      </p:sp>
+      <p:sp>
+        <p:nvSpPr>
+          <p:cNvPr id="88" name="TextBox 87"/>
+          <p:cNvSpPr txBox="1"/>
+          <p:nvPr/>
+        </p:nvSpPr>
+        <p:spPr>
+          <a:xfrm>
+            <a:off x="5449824" y="6438225"/>
+            <a:ext cx="1783079" cy="332399"/>
+          </a:xfrm>
+          <a:prstGeom prst="rect">
+            <a:avLst/>
+          </a:prstGeom>
+          <a:noFill/>
+        </p:spPr>
+        <p:txBody>
+          <a:bodyPr wrap="square" lIns="18288" tIns="18288" rIns="18288" bIns="18288" anchor="ctr">
+            <a:spAutoFit/>
+          </a:bodyPr>
+          <a:lstStyle/>
+          <a:p>
+            <a:pPr algn="ctr">
+              <a:spcBef>
+                <a:spcPts val="0"/>
+              </a:spcBef>
+              <a:spcAft>
+                <a:spcPts val="0"/>
+              </a:spcAft>
+            </a:pPr>
+            <a:r>
+              <a:rPr sz="1920" b="1">
+                <a:solidFill>
+                  <a:srgbClr val="193B5E"/>
+                </a:solidFill>
+                <a:latin typeface="Microsoft YaHei"/>
+              </a:rPr>
+              <a:t>74.11%</a:t>
+            </a:r>
+          </a:p>
+        </p:txBody>
+      </p:sp>
+      <p:sp>
+        <p:nvSpPr>
+          <p:cNvPr id="89" name="TextBox 88"/>
+          <p:cNvSpPr txBox="1"/>
+          <p:nvPr/>
+        </p:nvSpPr>
+        <p:spPr>
+          <a:xfrm>
+            <a:off x="7306056" y="6118587"/>
+            <a:ext cx="1234439" cy="249299"/>
+          </a:xfrm>
+          <a:prstGeom prst="rect">
+            <a:avLst/>
+          </a:prstGeom>
+          <a:noFill/>
+        </p:spPr>
+        <p:txBody>
+          <a:bodyPr wrap="square" lIns="18288" tIns="18288" rIns="18288" bIns="18288" anchor="ctr">
+            <a:spAutoFit/>
+          </a:bodyPr>
+          <a:lstStyle/>
+          <a:p>
+            <a:pPr algn="ctr">
+              <a:spcBef>
+                <a:spcPts val="0"/>
+              </a:spcBef>
+              <a:spcAft>
+                <a:spcPts val="0"/>
+              </a:spcAft>
+            </a:pPr>
+            <a:r>
+              <a:rPr sz="1380" b="1">
+                <a:solidFill>
+                  <a:srgbClr val="526A80"/>
+                </a:solidFill>
+                <a:latin typeface="Microsoft YaHei"/>
+              </a:rPr>
+              <a:t>79/100</a:t>
+            </a:r>
+          </a:p>
+        </p:txBody>
+      </p:sp>
+      <p:sp>
+        <p:nvSpPr>
+          <p:cNvPr id="90" name="TextBox 89"/>
+          <p:cNvSpPr txBox="1"/>
+          <p:nvPr/>
+        </p:nvSpPr>
+        <p:spPr>
+          <a:xfrm>
+            <a:off x="7306056" y="6438225"/>
+            <a:ext cx="1234439" cy="332399"/>
+          </a:xfrm>
+          <a:prstGeom prst="rect">
+            <a:avLst/>
+          </a:prstGeom>
+          <a:noFill/>
+        </p:spPr>
+        <p:txBody>
+          <a:bodyPr wrap="square" lIns="18288" tIns="18288" rIns="18288" bIns="18288" anchor="ctr">
+            <a:spAutoFit/>
+          </a:bodyPr>
+          <a:lstStyle/>
+          <a:p>
+            <a:pPr algn="ctr">
+              <a:spcBef>
+                <a:spcPts val="0"/>
+              </a:spcBef>
+              <a:spcAft>
+                <a:spcPts val="0"/>
+              </a:spcAft>
+            </a:pPr>
+            <a:r>
+              <a:rPr sz="1920" b="1">
+                <a:solidFill>
+                  <a:srgbClr val="193B5E"/>
+                </a:solidFill>
+                <a:latin typeface="Microsoft YaHei"/>
+              </a:rPr>
+              <a:t>79.00%</a:t>
+            </a:r>
+          </a:p>
+        </p:txBody>
+      </p:sp>
+      <p:sp>
+        <p:nvSpPr>
+          <p:cNvPr id="91" name="TextBox 90"/>
+          <p:cNvSpPr txBox="1"/>
+          <p:nvPr/>
+        </p:nvSpPr>
+        <p:spPr>
+          <a:xfrm>
+            <a:off x="8613648" y="6118587"/>
+            <a:ext cx="1920240" cy="249299"/>
+          </a:xfrm>
+          <a:prstGeom prst="rect">
+            <a:avLst/>
+          </a:prstGeom>
+          <a:noFill/>
+        </p:spPr>
+        <p:txBody>
+          <a:bodyPr wrap="square" lIns="18288" tIns="18288" rIns="18288" bIns="18288" anchor="ctr">
+            <a:spAutoFit/>
+          </a:bodyPr>
+          <a:lstStyle/>
+          <a:p>
+            <a:pPr algn="ctr">
+              <a:spcBef>
+                <a:spcPts val="0"/>
+              </a:spcBef>
+              <a:spcAft>
+                <a:spcPts val="0"/>
+              </a:spcAft>
+            </a:pPr>
+            <a:r>
+              <a:rPr sz="1380" b="1">
+                <a:solidFill>
+                  <a:srgbClr val="526A80"/>
+                </a:solidFill>
+                <a:latin typeface="Microsoft YaHei"/>
+              </a:rPr>
+              <a:t>538/648</a:t>
+            </a:r>
+          </a:p>
+        </p:txBody>
+      </p:sp>
+      <p:sp>
+        <p:nvSpPr>
+          <p:cNvPr id="92" name="TextBox 91"/>
+          <p:cNvSpPr txBox="1"/>
+          <p:nvPr/>
+        </p:nvSpPr>
+        <p:spPr>
+          <a:xfrm>
+            <a:off x="8613648" y="6438225"/>
+            <a:ext cx="1920240" cy="332399"/>
+          </a:xfrm>
+          <a:prstGeom prst="rect">
+            <a:avLst/>
+          </a:prstGeom>
+          <a:noFill/>
+        </p:spPr>
+        <p:txBody>
+          <a:bodyPr wrap="square" lIns="18288" tIns="18288" rIns="18288" bIns="18288" anchor="ctr">
+            <a:spAutoFit/>
+          </a:bodyPr>
+          <a:lstStyle/>
+          <a:p>
+            <a:pPr algn="ctr">
+              <a:spcBef>
+                <a:spcPts val="0"/>
+              </a:spcBef>
+              <a:spcAft>
+                <a:spcPts val="0"/>
+              </a:spcAft>
+            </a:pPr>
+            <a:r>
+              <a:rPr sz="1920" b="1" dirty="0">
+                <a:solidFill>
+                  <a:srgbClr val="193B5E"/>
+                </a:solidFill>
+                <a:latin typeface="Microsoft YaHei"/>
+              </a:rPr>
+              <a:t>83.02%</a:t>
+            </a:r>
+          </a:p>
+        </p:txBody>
+      </p:sp>
+      <p:sp>
+        <p:nvSpPr>
+          <p:cNvPr id="93" name="TextBox 92"/>
+          <p:cNvSpPr txBox="1"/>
+          <p:nvPr/>
+        </p:nvSpPr>
+        <p:spPr>
+          <a:xfrm>
+            <a:off x="10607040" y="6118587"/>
+            <a:ext cx="1481328" cy="249299"/>
+          </a:xfrm>
+          <a:prstGeom prst="rect">
+            <a:avLst/>
+          </a:prstGeom>
+          <a:noFill/>
+        </p:spPr>
+        <p:txBody>
+          <a:bodyPr wrap="square" lIns="18288" tIns="18288" rIns="18288" bIns="18288" anchor="ctr">
+            <a:spAutoFit/>
+          </a:bodyPr>
+          <a:lstStyle/>
+          <a:p>
+            <a:pPr algn="ctr">
+              <a:spcBef>
+                <a:spcPts val="0"/>
+              </a:spcBef>
+              <a:spcAft>
+                <a:spcPts val="0"/>
+              </a:spcAft>
+            </a:pPr>
+            <a:r>
+              <a:rPr sz="1380" b="1">
+                <a:solidFill>
+                  <a:srgbClr val="526A80"/>
+                </a:solidFill>
+                <a:latin typeface="Microsoft YaHei"/>
+              </a:rPr>
+              <a:t>99/181</a:t>
+            </a:r>
+          </a:p>
+        </p:txBody>
+      </p:sp>
+      <p:sp>
+        <p:nvSpPr>
+          <p:cNvPr id="94" name="TextBox 93"/>
+          <p:cNvSpPr txBox="1"/>
+          <p:nvPr/>
+        </p:nvSpPr>
+        <p:spPr>
+          <a:xfrm>
+            <a:off x="10607040" y="6438225"/>
+            <a:ext cx="1481328" cy="332399"/>
+          </a:xfrm>
+          <a:prstGeom prst="rect">
+            <a:avLst/>
+          </a:prstGeom>
+          <a:noFill/>
+        </p:spPr>
+        <p:txBody>
+          <a:bodyPr wrap="square" lIns="18288" tIns="18288" rIns="18288" bIns="18288" anchor="ctr">
+            <a:spAutoFit/>
+          </a:bodyPr>
+          <a:lstStyle/>
+          <a:p>
+            <a:pPr algn="ctr">
+              <a:spcBef>
+                <a:spcPts val="0"/>
+              </a:spcBef>
+              <a:spcAft>
+                <a:spcPts val="0"/>
+              </a:spcAft>
+            </a:pPr>
+            <a:r>
+              <a:rPr sz="1920" b="1">
+                <a:solidFill>
+                  <a:srgbClr val="193B5E"/>
+                </a:solidFill>
+                <a:latin typeface="Microsoft YaHei"/>
+              </a:rPr>
+              <a:t>54.70%</a:t>
+            </a:r>
+          </a:p>
+        </p:txBody>
+      </p:sp>
+      <p:sp>
+        <p:nvSpPr>
+          <p:cNvPr id="95" name="TextBox 94"/>
+          <p:cNvSpPr txBox="1"/>
+          <p:nvPr/>
+        </p:nvSpPr>
+        <p:spPr>
+          <a:xfrm>
+            <a:off x="12161519" y="6118587"/>
+            <a:ext cx="2093976" cy="249299"/>
+          </a:xfrm>
+          <a:prstGeom prst="rect">
+            <a:avLst/>
+          </a:prstGeom>
+          <a:noFill/>
+        </p:spPr>
+        <p:txBody>
+          <a:bodyPr wrap="square" lIns="18288" tIns="18288" rIns="18288" bIns="18288" anchor="ctr">
+            <a:spAutoFit/>
+          </a:bodyPr>
+          <a:lstStyle/>
+          <a:p>
+            <a:pPr algn="ctr">
+              <a:spcBef>
+                <a:spcPts val="0"/>
+              </a:spcBef>
+              <a:spcAft>
+                <a:spcPts val="0"/>
+              </a:spcAft>
+            </a:pPr>
+            <a:r>
+              <a:rPr sz="1380" b="1">
+                <a:solidFill>
+                  <a:srgbClr val="526A80"/>
+                </a:solidFill>
+                <a:latin typeface="Microsoft YaHei"/>
+              </a:rPr>
+              <a:t>618/749</a:t>
+            </a:r>
+          </a:p>
+        </p:txBody>
+      </p:sp>
+      <p:sp>
+        <p:nvSpPr>
+          <p:cNvPr id="96" name="TextBox 95"/>
+          <p:cNvSpPr txBox="1"/>
+          <p:nvPr/>
+        </p:nvSpPr>
+        <p:spPr>
+          <a:xfrm>
+            <a:off x="12161519" y="6438225"/>
+            <a:ext cx="2093976" cy="332399"/>
+          </a:xfrm>
+          <a:prstGeom prst="rect">
+            <a:avLst/>
+          </a:prstGeom>
+          <a:noFill/>
+        </p:spPr>
+        <p:txBody>
+          <a:bodyPr wrap="square" lIns="18288" tIns="18288" rIns="18288" bIns="18288" anchor="ctr">
+            <a:spAutoFit/>
+          </a:bodyPr>
+          <a:lstStyle/>
+          <a:p>
+            <a:pPr algn="ctr">
+              <a:spcBef>
+                <a:spcPts val="0"/>
+              </a:spcBef>
+              <a:spcAft>
+                <a:spcPts val="0"/>
+              </a:spcAft>
+            </a:pPr>
+            <a:r>
+              <a:rPr sz="1920" b="1">
+                <a:solidFill>
+                  <a:srgbClr val="193B5E"/>
+                </a:solidFill>
+                <a:latin typeface="Microsoft YaHei"/>
+              </a:rPr>
+              <a:t>82.51%</a:t>
+            </a:r>
+          </a:p>
+        </p:txBody>
+      </p:sp>
+      <p:sp>
+        <p:nvSpPr>
+          <p:cNvPr id="97" name="TextBox 96"/>
+          <p:cNvSpPr txBox="1"/>
+          <p:nvPr/>
+        </p:nvSpPr>
+        <p:spPr>
+          <a:xfrm>
+            <a:off x="14328648" y="6118587"/>
+            <a:ext cx="1975104" cy="249299"/>
+          </a:xfrm>
+          <a:prstGeom prst="rect">
+            <a:avLst/>
+          </a:prstGeom>
+          <a:noFill/>
+        </p:spPr>
+        <p:txBody>
+          <a:bodyPr wrap="square" lIns="18288" tIns="18288" rIns="18288" bIns="18288" anchor="ctr">
+            <a:spAutoFit/>
+          </a:bodyPr>
+          <a:lstStyle/>
+          <a:p>
+            <a:pPr algn="ctr">
+              <a:spcBef>
+                <a:spcPts val="0"/>
+              </a:spcBef>
+              <a:spcAft>
+                <a:spcPts val="0"/>
+              </a:spcAft>
+            </a:pPr>
+            <a:r>
+              <a:rPr sz="1380" b="1">
+                <a:solidFill>
+                  <a:srgbClr val="526A80"/>
+                </a:solidFill>
+                <a:latin typeface="Microsoft YaHei"/>
+              </a:rPr>
+              <a:t>212/317</a:t>
+            </a:r>
+          </a:p>
+        </p:txBody>
+      </p:sp>
+      <p:sp>
+        <p:nvSpPr>
+          <p:cNvPr id="98" name="TextBox 97"/>
+          <p:cNvSpPr txBox="1"/>
+          <p:nvPr/>
+        </p:nvSpPr>
+        <p:spPr>
+          <a:xfrm>
+            <a:off x="14328648" y="6438225"/>
+            <a:ext cx="1975104" cy="332399"/>
+          </a:xfrm>
+          <a:prstGeom prst="rect">
+            <a:avLst/>
+          </a:prstGeom>
+          <a:noFill/>
+        </p:spPr>
+        <p:txBody>
+          <a:bodyPr wrap="square" lIns="18288" tIns="18288" rIns="18288" bIns="18288" anchor="ctr">
+            <a:spAutoFit/>
+          </a:bodyPr>
+          <a:lstStyle/>
+          <a:p>
+            <a:pPr algn="ctr">
+              <a:spcBef>
+                <a:spcPts val="0"/>
+              </a:spcBef>
+              <a:spcAft>
+                <a:spcPts val="0"/>
+              </a:spcAft>
+            </a:pPr>
+            <a:r>
+              <a:rPr sz="1920" b="1">
+                <a:solidFill>
+                  <a:srgbClr val="193B5E"/>
+                </a:solidFill>
+                <a:latin typeface="Microsoft YaHei"/>
+              </a:rPr>
+              <a:t>66.88%</a:t>
+            </a:r>
+          </a:p>
+        </p:txBody>
+      </p:sp>
+      <p:sp>
+        <p:nvSpPr>
+          <p:cNvPr id="99" name="Rectangle 98"/>
+          <p:cNvSpPr/>
+          <p:nvPr/>
+        </p:nvSpPr>
+        <p:spPr>
+          <a:xfrm>
+            <a:off x="713232" y="6947324"/>
+            <a:ext cx="2916936" cy="955547"/>
+          </a:xfrm>
+          <a:prstGeom prst="rect">
+            <a:avLst/>
+          </a:prstGeom>
+          <a:solidFill>
+            <a:srgbClr val="EBF6FE"/>
+          </a:solidFill>
+          <a:ln w="8890">
+            <a:solidFill>
+              <a:srgbClr val="D2E1ED"/>
+            </a:solidFill>
+          </a:ln>
+        </p:spPr>
+        <p:style>
+          <a:lnRef idx="1">
+            <a:schemeClr val="accent1"/>
+          </a:lnRef>
+          <a:fillRef idx="3">
+            <a:schemeClr val="accent1"/>
+          </a:fillRef>
+          <a:effectRef idx="2">
+            <a:schemeClr val="accent1"/>
+          </a:effectRef>
+          <a:fontRef idx="minor">
+            <a:schemeClr val="lt1"/>
+          </a:fontRef>
+        </p:style>
+        <p:txBody>
+          <a:bodyPr rtlCol="0" anchor="ctr"/>
+          <a:lstStyle/>
+          <a:p>
+            <a:pPr algn="ctr"/>
+            <a:endParaRPr sz="2000"/>
+          </a:p>
+        </p:txBody>
+      </p:sp>
+      <p:sp>
+        <p:nvSpPr>
+          <p:cNvPr id="100" name="Rectangle 99"/>
+          <p:cNvSpPr/>
+          <p:nvPr/>
+        </p:nvSpPr>
+        <p:spPr>
+          <a:xfrm>
+            <a:off x="3630168" y="6947324"/>
+            <a:ext cx="1783080" cy="955547"/>
+          </a:xfrm>
+          <a:prstGeom prst="rect">
+            <a:avLst/>
+          </a:prstGeom>
+          <a:solidFill>
+            <a:srgbClr val="EBF6FE"/>
+          </a:solidFill>
+          <a:ln w="8890">
+            <a:solidFill>
+              <a:srgbClr val="D2E1ED"/>
+            </a:solidFill>
+          </a:ln>
+        </p:spPr>
+        <p:style>
+          <a:lnRef idx="1">
+            <a:schemeClr val="accent1"/>
+          </a:lnRef>
+          <a:fillRef idx="3">
+            <a:schemeClr val="accent1"/>
+          </a:fillRef>
+          <a:effectRef idx="2">
+            <a:schemeClr val="accent1"/>
+          </a:effectRef>
+          <a:fontRef idx="minor">
+            <a:schemeClr val="lt1"/>
+          </a:fontRef>
+        </p:style>
+        <p:txBody>
+          <a:bodyPr rtlCol="0" anchor="ctr"/>
+          <a:lstStyle/>
+          <a:p>
+            <a:pPr algn="ctr"/>
+            <a:endParaRPr/>
+          </a:p>
+        </p:txBody>
+      </p:sp>
+      <p:sp>
+        <p:nvSpPr>
+          <p:cNvPr id="101" name="Rectangle 100"/>
+          <p:cNvSpPr/>
+          <p:nvPr/>
+        </p:nvSpPr>
+        <p:spPr>
+          <a:xfrm>
+            <a:off x="5413248" y="6947324"/>
+            <a:ext cx="1856231" cy="955547"/>
+          </a:xfrm>
+          <a:prstGeom prst="rect">
+            <a:avLst/>
+          </a:prstGeom>
+          <a:solidFill>
+            <a:srgbClr val="EBF6FE"/>
+          </a:solidFill>
+          <a:ln w="8890">
+            <a:solidFill>
+              <a:srgbClr val="D2E1ED"/>
+            </a:solidFill>
+          </a:ln>
+        </p:spPr>
+        <p:style>
+          <a:lnRef idx="1">
+            <a:schemeClr val="accent1"/>
+          </a:lnRef>
+          <a:fillRef idx="3">
+            <a:schemeClr val="accent1"/>
+          </a:fillRef>
+          <a:effectRef idx="2">
+            <a:schemeClr val="accent1"/>
+          </a:effectRef>
+          <a:fontRef idx="minor">
+            <a:schemeClr val="lt1"/>
+          </a:fontRef>
+        </p:style>
+        <p:txBody>
+          <a:bodyPr rtlCol="0" anchor="ctr"/>
+          <a:lstStyle/>
+          <a:p>
+            <a:pPr algn="ctr"/>
+            <a:endParaRPr/>
+          </a:p>
+        </p:txBody>
+      </p:sp>
+      <p:sp>
+        <p:nvSpPr>
+          <p:cNvPr id="102" name="Rectangle 101"/>
+          <p:cNvSpPr/>
+          <p:nvPr/>
+        </p:nvSpPr>
+        <p:spPr>
+          <a:xfrm>
+            <a:off x="7269480" y="6947324"/>
+            <a:ext cx="1307592" cy="955547"/>
+          </a:xfrm>
+          <a:prstGeom prst="rect">
+            <a:avLst/>
+          </a:prstGeom>
+          <a:solidFill>
+            <a:srgbClr val="EBF6FE"/>
+          </a:solidFill>
+          <a:ln w="8890">
+            <a:solidFill>
+              <a:srgbClr val="D2E1ED"/>
+            </a:solidFill>
+          </a:ln>
+        </p:spPr>
+        <p:style>
+          <a:lnRef idx="1">
+            <a:schemeClr val="accent1"/>
+          </a:lnRef>
+          <a:fillRef idx="3">
+            <a:schemeClr val="accent1"/>
+          </a:fillRef>
+          <a:effectRef idx="2">
+            <a:schemeClr val="accent1"/>
+          </a:effectRef>
+          <a:fontRef idx="minor">
+            <a:schemeClr val="lt1"/>
+          </a:fontRef>
+        </p:style>
+        <p:txBody>
+          <a:bodyPr rtlCol="0" anchor="ctr"/>
+          <a:lstStyle/>
+          <a:p>
+            <a:pPr algn="ctr"/>
+            <a:endParaRPr/>
+          </a:p>
+        </p:txBody>
+      </p:sp>
+      <p:sp>
+        <p:nvSpPr>
+          <p:cNvPr id="103" name="Rectangle 102"/>
+          <p:cNvSpPr/>
+          <p:nvPr/>
+        </p:nvSpPr>
+        <p:spPr>
+          <a:xfrm>
+            <a:off x="8577072" y="6947324"/>
+            <a:ext cx="1993392" cy="955547"/>
+          </a:xfrm>
+          <a:prstGeom prst="rect">
+            <a:avLst/>
+          </a:prstGeom>
+          <a:solidFill>
+            <a:srgbClr val="EBF6FE"/>
+          </a:solidFill>
+          <a:ln w="8890">
+            <a:solidFill>
+              <a:srgbClr val="D2E1ED"/>
+            </a:solidFill>
+          </a:ln>
+        </p:spPr>
+        <p:style>
+          <a:lnRef idx="1">
+            <a:schemeClr val="accent1"/>
+          </a:lnRef>
+          <a:fillRef idx="3">
+            <a:schemeClr val="accent1"/>
+          </a:fillRef>
+          <a:effectRef idx="2">
+            <a:schemeClr val="accent1"/>
+          </a:effectRef>
+          <a:fontRef idx="minor">
+            <a:schemeClr val="lt1"/>
+          </a:fontRef>
+        </p:style>
+        <p:txBody>
+          <a:bodyPr rtlCol="0" anchor="ctr"/>
+          <a:lstStyle/>
+          <a:p>
+            <a:pPr algn="ctr"/>
+            <a:endParaRPr/>
+          </a:p>
+        </p:txBody>
+      </p:sp>
+      <p:sp>
+        <p:nvSpPr>
+          <p:cNvPr id="104" name="Rectangle 103"/>
+          <p:cNvSpPr/>
+          <p:nvPr/>
+        </p:nvSpPr>
+        <p:spPr>
+          <a:xfrm>
+            <a:off x="10570464" y="6947324"/>
+            <a:ext cx="1554480" cy="955547"/>
+          </a:xfrm>
+          <a:prstGeom prst="rect">
+            <a:avLst/>
+          </a:prstGeom>
+          <a:solidFill>
+            <a:srgbClr val="EBF6FE"/>
+          </a:solidFill>
+          <a:ln w="8890">
+            <a:solidFill>
+              <a:srgbClr val="D2E1ED"/>
+            </a:solidFill>
+          </a:ln>
+        </p:spPr>
+        <p:style>
+          <a:lnRef idx="1">
+            <a:schemeClr val="accent1"/>
+          </a:lnRef>
+          <a:fillRef idx="3">
+            <a:schemeClr val="accent1"/>
+          </a:fillRef>
+          <a:effectRef idx="2">
+            <a:schemeClr val="accent1"/>
+          </a:effectRef>
+          <a:fontRef idx="minor">
+            <a:schemeClr val="lt1"/>
+          </a:fontRef>
+        </p:style>
+        <p:txBody>
+          <a:bodyPr rtlCol="0" anchor="ctr"/>
+          <a:lstStyle/>
+          <a:p>
+            <a:pPr algn="ctr"/>
+            <a:endParaRPr/>
+          </a:p>
+        </p:txBody>
+      </p:sp>
+      <p:sp>
+        <p:nvSpPr>
+          <p:cNvPr id="105" name="Rectangle 104"/>
+          <p:cNvSpPr/>
+          <p:nvPr/>
+        </p:nvSpPr>
+        <p:spPr>
+          <a:xfrm>
+            <a:off x="12124944" y="6947324"/>
+            <a:ext cx="2167128" cy="955547"/>
+          </a:xfrm>
+          <a:prstGeom prst="rect">
+            <a:avLst/>
+          </a:prstGeom>
+          <a:solidFill>
+            <a:srgbClr val="EBF6FE"/>
+          </a:solidFill>
+          <a:ln w="8890">
+            <a:solidFill>
+              <a:srgbClr val="D2E1ED"/>
+            </a:solidFill>
+          </a:ln>
+        </p:spPr>
+        <p:style>
+          <a:lnRef idx="1">
+            <a:schemeClr val="accent1"/>
+          </a:lnRef>
+          <a:fillRef idx="3">
+            <a:schemeClr val="accent1"/>
+          </a:fillRef>
+          <a:effectRef idx="2">
+            <a:schemeClr val="accent1"/>
+          </a:effectRef>
+          <a:fontRef idx="minor">
+            <a:schemeClr val="lt1"/>
+          </a:fontRef>
+        </p:style>
+        <p:txBody>
+          <a:bodyPr rtlCol="0" anchor="ctr"/>
+          <a:lstStyle/>
+          <a:p>
+            <a:pPr algn="ctr"/>
+            <a:endParaRPr/>
+          </a:p>
+        </p:txBody>
+      </p:sp>
+      <p:sp>
+        <p:nvSpPr>
+          <p:cNvPr id="106" name="Rectangle 105"/>
+          <p:cNvSpPr/>
+          <p:nvPr/>
+        </p:nvSpPr>
+        <p:spPr>
+          <a:xfrm>
+            <a:off x="14292072" y="6947324"/>
+            <a:ext cx="2048256" cy="955547"/>
+          </a:xfrm>
+          <a:prstGeom prst="rect">
+            <a:avLst/>
+          </a:prstGeom>
+          <a:solidFill>
+            <a:srgbClr val="EBF6FE"/>
+          </a:solidFill>
+          <a:ln w="8890">
+            <a:solidFill>
+              <a:srgbClr val="D2E1ED"/>
+            </a:solidFill>
+          </a:ln>
+        </p:spPr>
+        <p:style>
+          <a:lnRef idx="1">
+            <a:schemeClr val="accent1"/>
+          </a:lnRef>
+          <a:fillRef idx="3">
+            <a:schemeClr val="accent1"/>
+          </a:fillRef>
+          <a:effectRef idx="2">
+            <a:schemeClr val="accent1"/>
+          </a:effectRef>
+          <a:fontRef idx="minor">
+            <a:schemeClr val="lt1"/>
+          </a:fontRef>
+        </p:style>
+        <p:txBody>
+          <a:bodyPr rtlCol="0" anchor="ctr"/>
+          <a:lstStyle/>
+          <a:p>
+            <a:pPr algn="ctr"/>
+            <a:endParaRPr/>
+          </a:p>
+        </p:txBody>
+      </p:sp>
+      <p:sp>
+        <p:nvSpPr>
+          <p:cNvPr id="107" name="TextBox 106"/>
+          <p:cNvSpPr txBox="1"/>
+          <p:nvPr/>
+        </p:nvSpPr>
+        <p:spPr>
+          <a:xfrm>
+            <a:off x="841248" y="7129632"/>
+            <a:ext cx="2679191" cy="590931"/>
+          </a:xfrm>
+          <a:prstGeom prst="rect">
+            <a:avLst/>
+          </a:prstGeom>
+          <a:noFill/>
+        </p:spPr>
+        <p:txBody>
+          <a:bodyPr wrap="square" lIns="18288" tIns="18288" rIns="18288" bIns="18288" anchor="ctr">
+            <a:spAutoFit/>
+          </a:bodyPr>
+          <a:lstStyle/>
+          <a:p>
+            <a:pPr algn="l">
+              <a:spcBef>
+                <a:spcPts val="0"/>
+              </a:spcBef>
+              <a:spcAft>
+                <a:spcPts val="0"/>
+              </a:spcAft>
+            </a:pPr>
+            <a:r>
+              <a:rPr b="1">
+                <a:solidFill>
+                  <a:srgbClr val="075B97"/>
+                </a:solidFill>
+                <a:latin typeface="Microsoft YaHei"/>
+              </a:rPr>
+              <a:t>偏好归纳五根</a:t>
+            </a:r>
+          </a:p>
+          <a:p>
+            <a:pPr algn="l">
+              <a:spcBef>
+                <a:spcPts val="0"/>
+              </a:spcBef>
+              <a:spcAft>
+                <a:spcPts val="0"/>
+              </a:spcAft>
+            </a:pPr>
+            <a:r>
+              <a:rPr b="1">
+                <a:solidFill>
+                  <a:srgbClr val="075B97"/>
+                </a:solidFill>
+                <a:latin typeface="Microsoft YaHei"/>
+              </a:rPr>
+              <a:t>五轮演化后</a:t>
+            </a:r>
+          </a:p>
+        </p:txBody>
+      </p:sp>
+      <p:sp>
+        <p:nvSpPr>
+          <p:cNvPr id="108" name="TextBox 107"/>
+          <p:cNvSpPr txBox="1"/>
+          <p:nvPr/>
+        </p:nvSpPr>
+        <p:spPr>
+          <a:xfrm>
+            <a:off x="3666744" y="7066197"/>
+            <a:ext cx="1709928" cy="265176"/>
+          </a:xfrm>
+          <a:prstGeom prst="rect">
+            <a:avLst/>
+          </a:prstGeom>
+          <a:noFill/>
+        </p:spPr>
+        <p:txBody>
+          <a:bodyPr wrap="square" lIns="18288" tIns="18288" rIns="18288" bIns="18288" anchor="ctr">
+            <a:spAutoFit/>
+          </a:bodyPr>
+          <a:lstStyle/>
+          <a:p>
+            <a:pPr algn="ctr">
+              <a:spcBef>
+                <a:spcPts val="0"/>
+              </a:spcBef>
+              <a:spcAft>
+                <a:spcPts val="0"/>
+              </a:spcAft>
+            </a:pPr>
+            <a:r>
+              <a:rPr sz="1380" b="0">
+                <a:solidFill>
+                  <a:srgbClr val="526A80"/>
+                </a:solidFill>
+                <a:latin typeface="Microsoft YaHei"/>
+              </a:rPr>
+              <a:t>934/1247</a:t>
+            </a:r>
+          </a:p>
+        </p:txBody>
+      </p:sp>
+      <p:sp>
+        <p:nvSpPr>
+          <p:cNvPr id="109" name="TextBox 108"/>
+          <p:cNvSpPr txBox="1"/>
+          <p:nvPr/>
+        </p:nvSpPr>
+        <p:spPr>
+          <a:xfrm>
+            <a:off x="3666744" y="7377093"/>
+            <a:ext cx="1709928" cy="365760"/>
+          </a:xfrm>
+          <a:prstGeom prst="rect">
+            <a:avLst/>
+          </a:prstGeom>
+          <a:noFill/>
+        </p:spPr>
+        <p:txBody>
+          <a:bodyPr wrap="square" lIns="18288" tIns="18288" rIns="18288" bIns="18288" anchor="ctr">
+            <a:spAutoFit/>
+          </a:bodyPr>
+          <a:lstStyle/>
+          <a:p>
+            <a:pPr algn="ctr">
+              <a:spcBef>
+                <a:spcPts val="0"/>
+              </a:spcBef>
+              <a:spcAft>
+                <a:spcPts val="0"/>
+              </a:spcAft>
+            </a:pPr>
+            <a:r>
+              <a:rPr sz="1920" b="1" dirty="0">
+                <a:solidFill>
+                  <a:srgbClr val="075B97"/>
+                </a:solidFill>
+                <a:latin typeface="Microsoft YaHei"/>
+              </a:rPr>
+              <a:t>74.90%</a:t>
+            </a:r>
+          </a:p>
+        </p:txBody>
+      </p:sp>
+      <p:sp>
+        <p:nvSpPr>
+          <p:cNvPr id="110" name="TextBox 109"/>
+          <p:cNvSpPr txBox="1"/>
+          <p:nvPr/>
+        </p:nvSpPr>
+        <p:spPr>
+          <a:xfrm>
+            <a:off x="5449824" y="7066197"/>
+            <a:ext cx="1783079" cy="265176"/>
+          </a:xfrm>
+          <a:prstGeom prst="rect">
+            <a:avLst/>
+          </a:prstGeom>
+          <a:noFill/>
+        </p:spPr>
+        <p:txBody>
+          <a:bodyPr wrap="square" lIns="18288" tIns="18288" rIns="18288" bIns="18288" anchor="ctr">
+            <a:spAutoFit/>
+          </a:bodyPr>
+          <a:lstStyle/>
+          <a:p>
+            <a:pPr algn="ctr">
+              <a:spcBef>
+                <a:spcPts val="0"/>
+              </a:spcBef>
+              <a:spcAft>
+                <a:spcPts val="0"/>
+              </a:spcAft>
+            </a:pPr>
+            <a:r>
+              <a:rPr sz="1380" b="0">
+                <a:solidFill>
+                  <a:srgbClr val="526A80"/>
+                </a:solidFill>
+                <a:latin typeface="Microsoft YaHei"/>
+              </a:rPr>
+              <a:t>851/1147</a:t>
+            </a:r>
+          </a:p>
+        </p:txBody>
+      </p:sp>
+      <p:sp>
+        <p:nvSpPr>
+          <p:cNvPr id="111" name="TextBox 110"/>
+          <p:cNvSpPr txBox="1"/>
+          <p:nvPr/>
+        </p:nvSpPr>
+        <p:spPr>
+          <a:xfrm>
+            <a:off x="5449824" y="7377093"/>
+            <a:ext cx="1783079" cy="365760"/>
+          </a:xfrm>
+          <a:prstGeom prst="rect">
+            <a:avLst/>
+          </a:prstGeom>
+          <a:noFill/>
+        </p:spPr>
+        <p:txBody>
+          <a:bodyPr wrap="square" lIns="18288" tIns="18288" rIns="18288" bIns="18288" anchor="ctr">
+            <a:spAutoFit/>
+          </a:bodyPr>
+          <a:lstStyle/>
+          <a:p>
+            <a:pPr algn="ctr">
+              <a:spcBef>
+                <a:spcPts val="0"/>
+              </a:spcBef>
+              <a:spcAft>
+                <a:spcPts val="0"/>
+              </a:spcAft>
+            </a:pPr>
+            <a:r>
+              <a:rPr sz="1920" b="1">
+                <a:solidFill>
+                  <a:srgbClr val="075B97"/>
+                </a:solidFill>
+                <a:latin typeface="Microsoft YaHei"/>
+              </a:rPr>
+              <a:t>74.19%</a:t>
+            </a:r>
+          </a:p>
+        </p:txBody>
+      </p:sp>
+      <p:sp>
+        <p:nvSpPr>
+          <p:cNvPr id="112" name="TextBox 111"/>
+          <p:cNvSpPr txBox="1"/>
+          <p:nvPr/>
+        </p:nvSpPr>
+        <p:spPr>
+          <a:xfrm>
+            <a:off x="7306056" y="7066197"/>
+            <a:ext cx="1234439" cy="265176"/>
+          </a:xfrm>
+          <a:prstGeom prst="rect">
+            <a:avLst/>
+          </a:prstGeom>
+          <a:noFill/>
+        </p:spPr>
+        <p:txBody>
+          <a:bodyPr wrap="square" lIns="18288" tIns="18288" rIns="18288" bIns="18288" anchor="ctr">
+            <a:spAutoFit/>
+          </a:bodyPr>
+          <a:lstStyle/>
+          <a:p>
+            <a:pPr algn="ctr">
+              <a:spcBef>
+                <a:spcPts val="0"/>
+              </a:spcBef>
+              <a:spcAft>
+                <a:spcPts val="0"/>
+              </a:spcAft>
+            </a:pPr>
+            <a:r>
+              <a:rPr sz="1380" b="0">
+                <a:solidFill>
+                  <a:srgbClr val="526A80"/>
+                </a:solidFill>
+                <a:latin typeface="Microsoft YaHei"/>
+              </a:rPr>
+              <a:t>83/100</a:t>
+            </a:r>
+          </a:p>
+        </p:txBody>
+      </p:sp>
+      <p:sp>
+        <p:nvSpPr>
+          <p:cNvPr id="113" name="TextBox 112"/>
+          <p:cNvSpPr txBox="1"/>
+          <p:nvPr/>
+        </p:nvSpPr>
+        <p:spPr>
+          <a:xfrm>
+            <a:off x="7306056" y="7393773"/>
+            <a:ext cx="1234439" cy="332399"/>
+          </a:xfrm>
+          <a:prstGeom prst="rect">
+            <a:avLst/>
+          </a:prstGeom>
+          <a:noFill/>
+        </p:spPr>
+        <p:txBody>
+          <a:bodyPr wrap="square" lIns="18288" tIns="18288" rIns="18288" bIns="18288" anchor="ctr">
+            <a:spAutoFit/>
+          </a:bodyPr>
+          <a:lstStyle/>
+          <a:p>
+            <a:pPr algn="ctr">
+              <a:spcBef>
+                <a:spcPts val="0"/>
+              </a:spcBef>
+              <a:spcAft>
+                <a:spcPts val="0"/>
+              </a:spcAft>
+            </a:pPr>
+            <a:r>
+              <a:rPr sz="1920" b="1" dirty="0">
+                <a:latin typeface="Microsoft YaHei"/>
+              </a:rPr>
+              <a:t>83.00%</a:t>
+            </a:r>
+          </a:p>
+        </p:txBody>
+      </p:sp>
+      <p:sp>
+        <p:nvSpPr>
+          <p:cNvPr id="114" name="TextBox 113"/>
+          <p:cNvSpPr txBox="1"/>
+          <p:nvPr/>
+        </p:nvSpPr>
+        <p:spPr>
+          <a:xfrm>
+            <a:off x="8613648" y="7066197"/>
+            <a:ext cx="1920240" cy="265176"/>
+          </a:xfrm>
+          <a:prstGeom prst="rect">
+            <a:avLst/>
+          </a:prstGeom>
+          <a:noFill/>
+        </p:spPr>
+        <p:txBody>
+          <a:bodyPr wrap="square" lIns="18288" tIns="18288" rIns="18288" bIns="18288" anchor="ctr">
+            <a:spAutoFit/>
+          </a:bodyPr>
+          <a:lstStyle/>
+          <a:p>
+            <a:pPr algn="ctr">
+              <a:spcBef>
+                <a:spcPts val="0"/>
+              </a:spcBef>
+              <a:spcAft>
+                <a:spcPts val="0"/>
+              </a:spcAft>
+            </a:pPr>
+            <a:r>
+              <a:rPr sz="1380" b="0">
+                <a:solidFill>
+                  <a:srgbClr val="526A80"/>
+                </a:solidFill>
+                <a:latin typeface="Microsoft YaHei"/>
+              </a:rPr>
+              <a:t>540/648</a:t>
+            </a:r>
+          </a:p>
+        </p:txBody>
+      </p:sp>
+      <p:sp>
+        <p:nvSpPr>
+          <p:cNvPr id="115" name="TextBox 114"/>
+          <p:cNvSpPr txBox="1"/>
+          <p:nvPr/>
+        </p:nvSpPr>
+        <p:spPr>
+          <a:xfrm>
+            <a:off x="8613648" y="7377093"/>
+            <a:ext cx="1920240" cy="365760"/>
+          </a:xfrm>
+          <a:prstGeom prst="rect">
+            <a:avLst/>
+          </a:prstGeom>
+          <a:noFill/>
+        </p:spPr>
+        <p:txBody>
+          <a:bodyPr wrap="square" lIns="18288" tIns="18288" rIns="18288" bIns="18288" anchor="ctr">
+            <a:spAutoFit/>
+          </a:bodyPr>
+          <a:lstStyle/>
+          <a:p>
+            <a:pPr algn="ctr">
+              <a:spcBef>
+                <a:spcPts val="0"/>
+              </a:spcBef>
+              <a:spcAft>
+                <a:spcPts val="0"/>
+              </a:spcAft>
+            </a:pPr>
+            <a:r>
+              <a:rPr sz="1920" b="1">
+                <a:solidFill>
+                  <a:srgbClr val="075B97"/>
+                </a:solidFill>
+                <a:latin typeface="Microsoft YaHei"/>
+              </a:rPr>
+              <a:t>83.33%</a:t>
+            </a:r>
+          </a:p>
+        </p:txBody>
+      </p:sp>
+      <p:sp>
+        <p:nvSpPr>
+          <p:cNvPr id="116" name="TextBox 115"/>
+          <p:cNvSpPr txBox="1"/>
+          <p:nvPr/>
+        </p:nvSpPr>
+        <p:spPr>
+          <a:xfrm>
+            <a:off x="10607040" y="7066197"/>
+            <a:ext cx="1481328" cy="265176"/>
+          </a:xfrm>
+          <a:prstGeom prst="rect">
+            <a:avLst/>
+          </a:prstGeom>
+          <a:noFill/>
+        </p:spPr>
+        <p:txBody>
+          <a:bodyPr wrap="square" lIns="18288" tIns="18288" rIns="18288" bIns="18288" anchor="ctr">
+            <a:spAutoFit/>
+          </a:bodyPr>
+          <a:lstStyle/>
+          <a:p>
+            <a:pPr algn="ctr">
+              <a:spcBef>
+                <a:spcPts val="0"/>
+              </a:spcBef>
+              <a:spcAft>
+                <a:spcPts val="0"/>
+              </a:spcAft>
+            </a:pPr>
+            <a:r>
+              <a:rPr sz="1380" b="0">
+                <a:solidFill>
+                  <a:srgbClr val="526A80"/>
+                </a:solidFill>
+                <a:latin typeface="Microsoft YaHei"/>
+              </a:rPr>
+              <a:t>99/181</a:t>
+            </a:r>
+          </a:p>
+        </p:txBody>
+      </p:sp>
+      <p:sp>
+        <p:nvSpPr>
+          <p:cNvPr id="117" name="TextBox 116"/>
+          <p:cNvSpPr txBox="1"/>
+          <p:nvPr/>
+        </p:nvSpPr>
+        <p:spPr>
+          <a:xfrm>
+            <a:off x="10607040" y="7377093"/>
+            <a:ext cx="1481328" cy="365760"/>
+          </a:xfrm>
+          <a:prstGeom prst="rect">
+            <a:avLst/>
+          </a:prstGeom>
+          <a:noFill/>
+        </p:spPr>
+        <p:txBody>
+          <a:bodyPr wrap="square" lIns="18288" tIns="18288" rIns="18288" bIns="18288" anchor="ctr">
+            <a:spAutoFit/>
+          </a:bodyPr>
+          <a:lstStyle/>
+          <a:p>
+            <a:pPr algn="ctr">
+              <a:spcBef>
+                <a:spcPts val="0"/>
+              </a:spcBef>
+              <a:spcAft>
+                <a:spcPts val="0"/>
+              </a:spcAft>
+            </a:pPr>
+            <a:r>
+              <a:rPr sz="1920" b="1" dirty="0">
+                <a:solidFill>
+                  <a:srgbClr val="075B97"/>
+                </a:solidFill>
+                <a:latin typeface="Microsoft YaHei"/>
+              </a:rPr>
+              <a:t>54.70%</a:t>
+            </a:r>
+          </a:p>
+        </p:txBody>
+      </p:sp>
+      <p:sp>
+        <p:nvSpPr>
+          <p:cNvPr id="118" name="TextBox 117"/>
+          <p:cNvSpPr txBox="1"/>
+          <p:nvPr/>
+        </p:nvSpPr>
+        <p:spPr>
+          <a:xfrm>
+            <a:off x="12161519" y="7066197"/>
+            <a:ext cx="2093976" cy="265176"/>
+          </a:xfrm>
+          <a:prstGeom prst="rect">
+            <a:avLst/>
+          </a:prstGeom>
+          <a:noFill/>
+        </p:spPr>
+        <p:txBody>
+          <a:bodyPr wrap="square" lIns="18288" tIns="18288" rIns="18288" bIns="18288" anchor="ctr">
+            <a:spAutoFit/>
+          </a:bodyPr>
+          <a:lstStyle/>
+          <a:p>
+            <a:pPr algn="ctr">
+              <a:spcBef>
+                <a:spcPts val="0"/>
+              </a:spcBef>
+              <a:spcAft>
+                <a:spcPts val="0"/>
+              </a:spcAft>
+            </a:pPr>
+            <a:r>
+              <a:rPr sz="1380" b="0">
+                <a:solidFill>
+                  <a:srgbClr val="526A80"/>
+                </a:solidFill>
+                <a:latin typeface="Microsoft YaHei"/>
+              </a:rPr>
+              <a:t>624/749</a:t>
+            </a:r>
+          </a:p>
+        </p:txBody>
+      </p:sp>
+      <p:sp>
+        <p:nvSpPr>
+          <p:cNvPr id="119" name="TextBox 118"/>
+          <p:cNvSpPr txBox="1"/>
+          <p:nvPr/>
+        </p:nvSpPr>
+        <p:spPr>
+          <a:xfrm>
+            <a:off x="12161519" y="7377093"/>
+            <a:ext cx="2093976" cy="365760"/>
+          </a:xfrm>
+          <a:prstGeom prst="rect">
+            <a:avLst/>
+          </a:prstGeom>
+          <a:noFill/>
+        </p:spPr>
+        <p:txBody>
+          <a:bodyPr wrap="square" lIns="18288" tIns="18288" rIns="18288" bIns="18288" anchor="ctr">
+            <a:spAutoFit/>
+          </a:bodyPr>
+          <a:lstStyle/>
+          <a:p>
+            <a:pPr algn="ctr">
+              <a:spcBef>
+                <a:spcPts val="0"/>
+              </a:spcBef>
+              <a:spcAft>
+                <a:spcPts val="0"/>
+              </a:spcAft>
+            </a:pPr>
+            <a:r>
+              <a:rPr sz="1920" b="1">
+                <a:solidFill>
+                  <a:srgbClr val="075B97"/>
+                </a:solidFill>
+                <a:latin typeface="Microsoft YaHei"/>
+              </a:rPr>
+              <a:t>83.31%</a:t>
+            </a:r>
+          </a:p>
+        </p:txBody>
+      </p:sp>
+      <p:sp>
+        <p:nvSpPr>
+          <p:cNvPr id="120" name="TextBox 119"/>
+          <p:cNvSpPr txBox="1"/>
+          <p:nvPr/>
+        </p:nvSpPr>
+        <p:spPr>
+          <a:xfrm>
+            <a:off x="14328648" y="7066197"/>
+            <a:ext cx="1975104" cy="265176"/>
+          </a:xfrm>
+          <a:prstGeom prst="rect">
+            <a:avLst/>
+          </a:prstGeom>
+          <a:noFill/>
+        </p:spPr>
+        <p:txBody>
+          <a:bodyPr wrap="square" lIns="18288" tIns="18288" rIns="18288" bIns="18288" anchor="ctr">
+            <a:spAutoFit/>
+          </a:bodyPr>
+          <a:lstStyle/>
+          <a:p>
+            <a:pPr algn="ctr">
+              <a:spcBef>
+                <a:spcPts val="0"/>
+              </a:spcBef>
+              <a:spcAft>
+                <a:spcPts val="0"/>
+              </a:spcAft>
+            </a:pPr>
+            <a:r>
+              <a:rPr sz="1380" b="0">
+                <a:solidFill>
+                  <a:srgbClr val="526A80"/>
+                </a:solidFill>
+                <a:latin typeface="Microsoft YaHei"/>
+              </a:rPr>
+              <a:t>211/317</a:t>
+            </a:r>
+          </a:p>
+        </p:txBody>
+      </p:sp>
+      <p:sp>
+        <p:nvSpPr>
+          <p:cNvPr id="121" name="TextBox 120"/>
+          <p:cNvSpPr txBox="1"/>
+          <p:nvPr/>
+        </p:nvSpPr>
+        <p:spPr>
+          <a:xfrm>
+            <a:off x="14328648" y="7393773"/>
+            <a:ext cx="1975104" cy="332399"/>
+          </a:xfrm>
+          <a:prstGeom prst="rect">
+            <a:avLst/>
+          </a:prstGeom>
+          <a:noFill/>
+        </p:spPr>
+        <p:txBody>
+          <a:bodyPr wrap="square" lIns="18288" tIns="18288" rIns="18288" bIns="18288" anchor="ctr">
+            <a:spAutoFit/>
+          </a:bodyPr>
+          <a:lstStyle/>
+          <a:p>
+            <a:pPr algn="ctr">
+              <a:spcBef>
+                <a:spcPts val="0"/>
+              </a:spcBef>
+              <a:spcAft>
+                <a:spcPts val="0"/>
+              </a:spcAft>
+            </a:pPr>
+            <a:r>
+              <a:rPr sz="1920" b="1" dirty="0">
+                <a:latin typeface="Microsoft YaHei"/>
+              </a:rPr>
+              <a:t>66.56%</a:t>
+            </a:r>
+          </a:p>
+        </p:txBody>
+      </p:sp>
+      <p:sp>
+        <p:nvSpPr>
+          <p:cNvPr id="122" name="Rounded Rectangle 121"/>
+          <p:cNvSpPr/>
+          <p:nvPr/>
+        </p:nvSpPr>
+        <p:spPr>
+          <a:xfrm>
+            <a:off x="745236" y="8435004"/>
+            <a:ext cx="15617951" cy="758952"/>
+          </a:xfrm>
+          <a:prstGeom prst="roundRect">
+            <a:avLst>
+              <a:gd name="adj" fmla="val 15000"/>
+            </a:avLst>
+          </a:prstGeom>
+          <a:solidFill>
+            <a:srgbClr val="EFF7FD"/>
+          </a:solidFill>
+          <a:ln w="10160">
+            <a:solidFill>
+              <a:srgbClr val="BBD7ED"/>
+            </a:solidFill>
+          </a:ln>
+        </p:spPr>
+        <p:style>
+          <a:lnRef idx="1">
+            <a:schemeClr val="accent1"/>
+          </a:lnRef>
+          <a:fillRef idx="3">
+            <a:schemeClr val="accent1"/>
+          </a:fillRef>
+          <a:effectRef idx="2">
+            <a:schemeClr val="accent1"/>
+          </a:effectRef>
+          <a:fontRef idx="minor">
+            <a:schemeClr val="lt1"/>
+          </a:fontRef>
+        </p:style>
+        <p:txBody>
+          <a:bodyPr rtlCol="0" anchor="ctr"/>
+          <a:lstStyle/>
+          <a:p>
+            <a:pPr algn="ctr"/>
+            <a:endParaRPr/>
+          </a:p>
+        </p:txBody>
+      </p:sp>
+      <p:sp>
+        <p:nvSpPr>
+          <p:cNvPr id="123" name="TextBox 122"/>
+          <p:cNvSpPr txBox="1"/>
+          <p:nvPr/>
+        </p:nvSpPr>
+        <p:spPr>
+          <a:xfrm>
+            <a:off x="982980" y="8673073"/>
+            <a:ext cx="12761186" cy="276999"/>
+          </a:xfrm>
+          <a:prstGeom prst="rect">
+            <a:avLst/>
+          </a:prstGeom>
+          <a:noFill/>
+        </p:spPr>
+        <p:txBody>
+          <a:bodyPr wrap="none" lIns="0" tIns="0" rIns="0" bIns="0" anchor="ctr">
+            <a:spAutoFit/>
+          </a:bodyPr>
+          <a:lstStyle/>
+          <a:p>
+            <a:pPr algn="l"/>
+            <a:r>
+              <a:rPr b="1" dirty="0">
+                <a:solidFill>
+                  <a:srgbClr val="193B5E"/>
+                </a:solidFill>
+                <a:latin typeface="Microsoft YaHei"/>
+              </a:rPr>
+              <a:t>仅 </a:t>
+            </a:r>
+            <a:r>
+              <a:rPr b="1" dirty="0" err="1">
+                <a:solidFill>
+                  <a:srgbClr val="193B5E"/>
+                </a:solidFill>
+                <a:latin typeface="Microsoft YaHei"/>
+              </a:rPr>
+              <a:t>root（未</a:t>
+            </a:r>
+            <a:r>
+              <a:rPr b="1" dirty="0">
+                <a:solidFill>
+                  <a:srgbClr val="193B5E"/>
+                </a:solidFill>
+                <a:latin typeface="Microsoft YaHei"/>
+              </a:rPr>
+              <a:t> Split）· </a:t>
+            </a:r>
+            <a:r>
+              <a:rPr lang="en-US" altLang="zh-CN" b="1" dirty="0" err="1">
+                <a:solidFill>
+                  <a:srgbClr val="193B5E"/>
+                </a:solidFill>
+                <a:latin typeface="Microsoft YaHei"/>
+              </a:rPr>
+              <a:t>heldout</a:t>
+            </a:r>
+            <a:r>
+              <a:rPr b="1" dirty="0" err="1">
+                <a:solidFill>
+                  <a:srgbClr val="193B5E"/>
+                </a:solidFill>
+                <a:latin typeface="Microsoft YaHei"/>
+              </a:rPr>
+              <a:t>幻觉集</a:t>
+            </a:r>
+            <a:r>
+              <a:rPr b="1" dirty="0">
+                <a:solidFill>
+                  <a:srgbClr val="193B5E"/>
+                </a:solidFill>
+                <a:latin typeface="Microsoft YaHei"/>
+              </a:rPr>
+              <a:t> 648</a:t>
+            </a:r>
+            <a:r>
+              <a:rPr lang="en-US" b="1" dirty="0">
+                <a:solidFill>
+                  <a:srgbClr val="193B5E"/>
+                </a:solidFill>
+                <a:latin typeface="Microsoft YaHei"/>
+              </a:rPr>
+              <a:t> </a:t>
+            </a:r>
+            <a:r>
+              <a:rPr lang="zh-CN" altLang="en-US" b="1" dirty="0">
+                <a:solidFill>
+                  <a:srgbClr val="193B5E"/>
+                </a:solidFill>
+                <a:latin typeface="Microsoft YaHei"/>
+              </a:rPr>
+              <a:t>结果</a:t>
+            </a:r>
+            <a:r>
+              <a:rPr b="1" dirty="0">
+                <a:solidFill>
+                  <a:srgbClr val="193B5E"/>
+                </a:solidFill>
+                <a:latin typeface="Microsoft YaHei"/>
+              </a:rPr>
+              <a:t>：</a:t>
+            </a:r>
+            <a:r>
+              <a:rPr b="0" dirty="0">
+                <a:solidFill>
+                  <a:srgbClr val="526A80"/>
+                </a:solidFill>
+                <a:latin typeface="Microsoft YaHei"/>
+              </a:rPr>
+              <a:t>预设五根 75.15%（487/648）</a:t>
+            </a:r>
+            <a:r>
+              <a:rPr b="1" dirty="0">
+                <a:solidFill>
+                  <a:srgbClr val="193B5E"/>
+                </a:solidFill>
+                <a:latin typeface="Microsoft YaHei"/>
+              </a:rPr>
+              <a:t>  →  </a:t>
+            </a:r>
+            <a:r>
+              <a:rPr b="1" dirty="0" err="1">
+                <a:solidFill>
+                  <a:srgbClr val="075B97"/>
+                </a:solidFill>
+                <a:latin typeface="Microsoft YaHei"/>
+              </a:rPr>
+              <a:t>偏好归纳五根</a:t>
+            </a:r>
+            <a:r>
+              <a:rPr b="1" dirty="0">
+                <a:solidFill>
+                  <a:srgbClr val="075B97"/>
+                </a:solidFill>
+                <a:latin typeface="Microsoft YaHei"/>
+              </a:rPr>
+              <a:t> 80.56%（522/648）</a:t>
+            </a:r>
+          </a:p>
+        </p:txBody>
+      </p:sp>
+    </p:spTree>
+  </p:cSld>
+  <p:clrMapOvr>
+    <a:masterClrMapping/>
+  </p:clrMapOvr>
+</p:sld>
+</file>
+
 <file path=ppt/slides/slide2.xml><?xml version="1.0" encoding="utf-8"?>
 <p:sld xmlns:a="http://schemas.openxmlformats.org/drawingml/2006/main" xmlns:r="http://schemas.openxmlformats.org/officeDocument/2006/relationships" xmlns:p="http://schemas.openxmlformats.org/presentationml/2006/main">
   <p:cSld>
@@ -38385,8 +44374,8 @@
         </p:nvSpPr>
         <p:spPr>
           <a:xfrm>
-            <a:off x="10175032" y="237744"/>
-            <a:ext cx="2144177" cy="661720"/>
+            <a:off x="8780423" y="237744"/>
+            <a:ext cx="4933402" cy="661720"/>
           </a:xfrm>
           <a:prstGeom prst="rect">
             <a:avLst/>
@@ -38413,7 +44402,15 @@
             </a:r>
             <a:r>
               <a:rPr lang="zh-CN" altLang="en-US" dirty="0"/>
-              <a:t>结果</a:t>
+              <a:t>设计</a:t>
+            </a:r>
+            <a:r>
+              <a:rPr lang="en-US" altLang="zh-CN" dirty="0"/>
+              <a:t>-</a:t>
+            </a:r>
+            <a:r>
+              <a:rPr lang="zh-CN" altLang="en-US" dirty="0"/>
+              <a:t>更换演化集</a:t>
             </a:r>
             <a:endParaRPr dirty="0"/>
           </a:p>
@@ -42292,7 +48289,7 @@
               </a:spcAft>
             </a:pPr>
             <a:r>
-              <a:rPr sz="1550" b="1">
+              <a:rPr sz="1550" b="1" dirty="0">
                 <a:solidFill>
                   <a:srgbClr val="FFFFFF"/>
                 </a:solidFill>
@@ -42311,7 +48308,7 @@
               </a:spcAft>
             </a:pPr>
             <a:r>
-              <a:rPr sz="1550" b="1">
+              <a:rPr sz="1550" b="1" dirty="0">
                 <a:solidFill>
                   <a:srgbClr val="FFFFFF"/>
                 </a:solidFill>
@@ -42397,7 +48394,7 @@
               </a:spcAft>
             </a:pPr>
             <a:r>
-              <a:rPr sz="1550" b="1">
+              <a:rPr sz="1550" b="1" dirty="0">
                 <a:solidFill>
                   <a:srgbClr val="FFFFFF"/>
                 </a:solidFill>
@@ -42416,7 +48413,7 @@
               </a:spcAft>
             </a:pPr>
             <a:r>
-              <a:rPr sz="1550" b="1">
+              <a:rPr sz="1550" b="1" dirty="0">
                 <a:solidFill>
                   <a:srgbClr val="FFFFFF"/>
                 </a:solidFill>
@@ -42502,7 +48499,7 @@
               </a:spcAft>
             </a:pPr>
             <a:r>
-              <a:rPr sz="1550" b="1">
+              <a:rPr sz="1550" b="1" dirty="0">
                 <a:solidFill>
                   <a:srgbClr val="FFFFFF"/>
                 </a:solidFill>
@@ -42521,7 +48518,7 @@
               </a:spcAft>
             </a:pPr>
             <a:r>
-              <a:rPr sz="1550" b="1">
+              <a:rPr sz="1550" b="1" dirty="0">
                 <a:solidFill>
                   <a:srgbClr val="FFFFFF"/>
                 </a:solidFill>
@@ -43122,7 +49119,7 @@
               </a:spcAft>
             </a:pPr>
             <a:r>
-              <a:rPr sz="2000" b="1">
+              <a:rPr sz="2000" b="1" dirty="0">
                 <a:solidFill>
                   <a:srgbClr val="193B5E"/>
                 </a:solidFill>
@@ -43374,7 +49371,7 @@
               </a:spcAft>
             </a:pPr>
             <a:r>
-              <a:rPr sz="2000" b="1">
+              <a:rPr sz="2000" b="1" dirty="0">
                 <a:solidFill>
                   <a:srgbClr val="193B5E"/>
                 </a:solidFill>
@@ -46389,7 +52386,7 @@
               </a:spcAft>
             </a:pPr>
             <a:r>
-              <a:rPr sz="2000" b="1">
+              <a:rPr sz="2000" b="1" dirty="0">
                 <a:solidFill>
                   <a:srgbClr val="193B5E"/>
                 </a:solidFill>
@@ -46473,7 +52470,7 @@
               </a:spcAft>
             </a:pPr>
             <a:r>
-              <a:rPr sz="2000" b="1">
+              <a:rPr sz="2000" b="1" dirty="0">
                 <a:solidFill>
                   <a:srgbClr val="193B5E"/>
                 </a:solidFill>
@@ -46641,7 +52638,7 @@
               </a:spcAft>
             </a:pPr>
             <a:r>
-              <a:rPr sz="2000" b="1">
+              <a:rPr sz="2000" b="1" dirty="0">
                 <a:solidFill>
                   <a:srgbClr val="193B5E"/>
                 </a:solidFill>
@@ -46725,7 +52722,7 @@
               </a:spcAft>
             </a:pPr>
             <a:r>
-              <a:rPr sz="2000" b="1">
+              <a:rPr sz="2000" b="1" dirty="0">
                 <a:solidFill>
                   <a:srgbClr val="193B5E"/>
                 </a:solidFill>
@@ -46809,7 +52806,7 @@
               </a:spcAft>
             </a:pPr>
             <a:r>
-              <a:rPr sz="2000" b="1">
+              <a:rPr sz="2000" b="1" dirty="0">
                 <a:solidFill>
                   <a:srgbClr val="193B5E"/>
                 </a:solidFill>
@@ -46893,7 +52890,7 @@
               </a:spcAft>
             </a:pPr>
             <a:r>
-              <a:rPr sz="2000" b="1">
+              <a:rPr sz="2000" b="1" dirty="0">
                 <a:solidFill>
                   <a:srgbClr val="193B5E"/>
                 </a:solidFill>
@@ -47433,7 +53430,7 @@
               </a:spcAft>
             </a:pPr>
             <a:r>
-              <a:rPr sz="1400" b="0">
+              <a:rPr sz="1400" b="0" dirty="0">
                 <a:solidFill>
                   <a:srgbClr val="526A80"/>
                 </a:solidFill>
@@ -47517,7 +53514,7 @@
               </a:spcAft>
             </a:pPr>
             <a:r>
-              <a:rPr sz="1400" b="0">
+              <a:rPr sz="1400" b="0" dirty="0">
                 <a:solidFill>
                   <a:srgbClr val="526A80"/>
                 </a:solidFill>
@@ -47559,7 +53556,7 @@
               </a:spcAft>
             </a:pPr>
             <a:r>
-              <a:rPr sz="2000" b="1">
+              <a:rPr sz="2000" b="1" dirty="0">
                 <a:solidFill>
                   <a:srgbClr val="075B97"/>
                 </a:solidFill>
@@ -47727,7 +53724,7 @@
               </a:spcAft>
             </a:pPr>
             <a:r>
-              <a:rPr sz="2000" b="1">
+              <a:rPr sz="2000" b="1" dirty="0">
                 <a:solidFill>
                   <a:srgbClr val="075B97"/>
                 </a:solidFill>
@@ -47811,7 +53808,7 @@
               </a:spcAft>
             </a:pPr>
             <a:r>
-              <a:rPr sz="2000" b="1">
+              <a:rPr sz="2000" b="1" dirty="0">
                 <a:solidFill>
                   <a:srgbClr val="193B5E"/>
                 </a:solidFill>
@@ -47895,7 +53892,7 @@
               </a:spcAft>
             </a:pPr>
             <a:r>
-              <a:rPr sz="2000" b="1">
+              <a:rPr sz="2000" b="1" dirty="0">
                 <a:solidFill>
                   <a:srgbClr val="075B97"/>
                 </a:solidFill>
@@ -53655,7 +59652,7 @@
         </p:nvSpPr>
         <p:spPr>
           <a:xfrm>
-            <a:off x="1042415" y="8778657"/>
+            <a:off x="1042415" y="8809830"/>
             <a:ext cx="4800600" cy="374904"/>
           </a:xfrm>
           <a:prstGeom prst="rect">
@@ -53727,7 +59724,7 @@
         </p:nvSpPr>
         <p:spPr>
           <a:xfrm>
-            <a:off x="5367528" y="8793462"/>
+            <a:off x="5367528" y="8824635"/>
             <a:ext cx="6126480" cy="360099"/>
           </a:xfrm>
           <a:prstGeom prst="rect">
@@ -53811,7 +59808,7 @@
         </p:nvSpPr>
         <p:spPr>
           <a:xfrm>
-            <a:off x="11960352" y="8793754"/>
+            <a:off x="11960352" y="8824927"/>
             <a:ext cx="4206240" cy="344710"/>
           </a:xfrm>
           <a:prstGeom prst="rect">
@@ -53895,7 +59892,7 @@
         </p:nvSpPr>
         <p:spPr>
           <a:xfrm>
-            <a:off x="868680" y="10357407"/>
+            <a:off x="868680" y="10367798"/>
             <a:ext cx="15590520" cy="252377"/>
           </a:xfrm>
           <a:prstGeom prst="rect">
@@ -53989,6 +59986,2267 @@
         <p14:creationId xmlns:p14="http://schemas.microsoft.com/office/powerpoint/2010/main" val="1696197491"/>
       </p:ext>
     </p:extLst>
+  </p:cSld>
+  <p:clrMapOvr>
+    <a:masterClrMapping/>
+  </p:clrMapOvr>
+</p:sld>
+</file>
+
+<file path=ppt/slides/slide9.xml><?xml version="1.0" encoding="utf-8"?>
+<p:sld xmlns:a="http://schemas.openxmlformats.org/drawingml/2006/main" xmlns:r="http://schemas.openxmlformats.org/officeDocument/2006/relationships" xmlns:p="http://schemas.openxmlformats.org/presentationml/2006/main">
+  <p:cSld>
+    <p:spTree>
+      <p:nvGrpSpPr>
+        <p:cNvPr id="1" name=""/>
+        <p:cNvGrpSpPr/>
+        <p:nvPr/>
+      </p:nvGrpSpPr>
+      <p:grpSpPr>
+        <a:xfrm>
+          <a:off x="0" y="0"/>
+          <a:ext cx="0" cy="0"/>
+          <a:chOff x="0" y="0"/>
+          <a:chExt cx="0" cy="0"/>
+        </a:xfrm>
+      </p:grpSpPr>
+      <p:sp>
+        <p:nvSpPr>
+          <p:cNvPr id="2" name="TextBox 1"/>
+          <p:cNvSpPr txBox="1"/>
+          <p:nvPr/>
+        </p:nvSpPr>
+        <p:spPr>
+          <a:xfrm>
+            <a:off x="9646920" y="228600"/>
+            <a:ext cx="3291840" cy="694944"/>
+          </a:xfrm>
+          <a:prstGeom prst="rect">
+            <a:avLst/>
+          </a:prstGeom>
+          <a:noFill/>
+        </p:spPr>
+        <p:txBody>
+          <a:bodyPr wrap="square" lIns="18288" tIns="18288" rIns="18288" bIns="18288" anchor="ctr">
+            <a:spAutoFit/>
+          </a:bodyPr>
+          <a:lstStyle/>
+          <a:p>
+            <a:pPr algn="ctr">
+              <a:spcBef>
+                <a:spcPts val="0"/>
+              </a:spcBef>
+              <a:spcAft>
+                <a:spcPts val="0"/>
+              </a:spcAft>
+            </a:pPr>
+            <a:r>
+              <a:rPr sz="3700" b="1" dirty="0" err="1">
+                <a:solidFill>
+                  <a:srgbClr val="FFFFFF"/>
+                </a:solidFill>
+                <a:latin typeface="Microsoft YaHei"/>
+              </a:rPr>
+              <a:t>实验设计</a:t>
+            </a:r>
+            <a:endParaRPr sz="3700" b="1" dirty="0">
+              <a:solidFill>
+                <a:srgbClr val="FFFFFF"/>
+              </a:solidFill>
+              <a:latin typeface="Microsoft YaHei"/>
+            </a:endParaRPr>
+          </a:p>
+        </p:txBody>
+      </p:sp>
+      <p:sp>
+        <p:nvSpPr>
+          <p:cNvPr id="3" name="Rectangle 2"/>
+          <p:cNvSpPr/>
+          <p:nvPr/>
+        </p:nvSpPr>
+        <p:spPr>
+          <a:xfrm>
+            <a:off x="658368" y="1490472"/>
+            <a:ext cx="36576" cy="530352"/>
+          </a:xfrm>
+          <a:prstGeom prst="rect">
+            <a:avLst/>
+          </a:prstGeom>
+          <a:solidFill>
+            <a:srgbClr val="1D3E62"/>
+          </a:solidFill>
+          <a:ln>
+            <a:noFill/>
+          </a:ln>
+        </p:spPr>
+        <p:style>
+          <a:lnRef idx="1">
+            <a:schemeClr val="accent1"/>
+          </a:lnRef>
+          <a:fillRef idx="3">
+            <a:schemeClr val="accent1"/>
+          </a:fillRef>
+          <a:effectRef idx="2">
+            <a:schemeClr val="accent1"/>
+          </a:effectRef>
+          <a:fontRef idx="minor">
+            <a:schemeClr val="lt1"/>
+          </a:fontRef>
+        </p:style>
+        <p:txBody>
+          <a:bodyPr rtlCol="0" anchor="ctr"/>
+          <a:lstStyle/>
+          <a:p>
+            <a:pPr algn="ctr"/>
+            <a:endParaRPr/>
+          </a:p>
+        </p:txBody>
+      </p:sp>
+      <p:sp>
+        <p:nvSpPr>
+          <p:cNvPr id="4" name="TextBox 3"/>
+          <p:cNvSpPr txBox="1"/>
+          <p:nvPr/>
+        </p:nvSpPr>
+        <p:spPr>
+          <a:xfrm>
+            <a:off x="841248" y="1511868"/>
+            <a:ext cx="15636240" cy="460126"/>
+          </a:xfrm>
+          <a:prstGeom prst="rect">
+            <a:avLst/>
+          </a:prstGeom>
+          <a:noFill/>
+        </p:spPr>
+        <p:txBody>
+          <a:bodyPr wrap="square" lIns="18288" tIns="18288" rIns="18288" bIns="18288" anchor="ctr">
+            <a:spAutoFit/>
+          </a:bodyPr>
+          <a:lstStyle/>
+          <a:p>
+            <a:pPr algn="l">
+              <a:spcBef>
+                <a:spcPts val="0"/>
+              </a:spcBef>
+              <a:spcAft>
+                <a:spcPts val="0"/>
+              </a:spcAft>
+            </a:pPr>
+            <a:r>
+              <a:rPr sz="2750" b="1" dirty="0" err="1">
+                <a:solidFill>
+                  <a:srgbClr val="193B5E"/>
+                </a:solidFill>
+                <a:latin typeface="Microsoft YaHei"/>
+              </a:rPr>
+              <a:t>从预设五根到偏好归纳</a:t>
+            </a:r>
+            <a:r>
+              <a:rPr lang="en-US" altLang="zh-CN" sz="2750" b="1" dirty="0" err="1">
+                <a:solidFill>
+                  <a:srgbClr val="193B5E"/>
+                </a:solidFill>
+                <a:latin typeface="Microsoft YaHei"/>
+              </a:rPr>
+              <a:t>root</a:t>
+            </a:r>
+            <a:r>
+              <a:rPr lang="zh-CN" altLang="en-US" sz="2750" b="1" dirty="0">
+                <a:solidFill>
+                  <a:srgbClr val="193B5E"/>
+                </a:solidFill>
+                <a:latin typeface="Microsoft YaHei"/>
+              </a:rPr>
+              <a:t>（</a:t>
+            </a:r>
+            <a:r>
+              <a:rPr lang="en-US" altLang="zh-CN" sz="2750" b="1" dirty="0">
+                <a:solidFill>
+                  <a:srgbClr val="193B5E"/>
+                </a:solidFill>
+                <a:latin typeface="Microsoft YaHei"/>
+              </a:rPr>
+              <a:t>create root</a:t>
+            </a:r>
+            <a:r>
+              <a:rPr lang="zh-CN" altLang="en-US" sz="2750" b="1" dirty="0">
+                <a:solidFill>
+                  <a:srgbClr val="193B5E"/>
+                </a:solidFill>
+                <a:latin typeface="Microsoft YaHei"/>
+              </a:rPr>
+              <a:t>）</a:t>
+            </a:r>
+            <a:endParaRPr sz="2750" b="1" dirty="0">
+              <a:solidFill>
+                <a:srgbClr val="193B5E"/>
+              </a:solidFill>
+              <a:latin typeface="Microsoft YaHei"/>
+            </a:endParaRPr>
+          </a:p>
+        </p:txBody>
+      </p:sp>
+      <p:sp>
+        <p:nvSpPr>
+          <p:cNvPr id="5" name="Rounded Rectangle 4"/>
+          <p:cNvSpPr/>
+          <p:nvPr/>
+        </p:nvSpPr>
+        <p:spPr>
+          <a:xfrm>
+            <a:off x="886968" y="2586294"/>
+            <a:ext cx="15617951" cy="630936"/>
+          </a:xfrm>
+          <a:prstGeom prst="roundRect">
+            <a:avLst>
+              <a:gd name="adj" fmla="val 12000"/>
+            </a:avLst>
+          </a:prstGeom>
+          <a:solidFill>
+            <a:srgbClr val="E7E7E7"/>
+          </a:solidFill>
+          <a:ln>
+            <a:noFill/>
+          </a:ln>
+        </p:spPr>
+        <p:style>
+          <a:lnRef idx="1">
+            <a:schemeClr val="accent1"/>
+          </a:lnRef>
+          <a:fillRef idx="3">
+            <a:schemeClr val="accent1"/>
+          </a:fillRef>
+          <a:effectRef idx="2">
+            <a:schemeClr val="accent1"/>
+          </a:effectRef>
+          <a:fontRef idx="minor">
+            <a:schemeClr val="lt1"/>
+          </a:fontRef>
+        </p:style>
+        <p:txBody>
+          <a:bodyPr rtlCol="0" anchor="ctr"/>
+          <a:lstStyle/>
+          <a:p>
+            <a:pPr algn="ctr"/>
+            <a:endParaRPr/>
+          </a:p>
+        </p:txBody>
+      </p:sp>
+      <p:sp>
+        <p:nvSpPr>
+          <p:cNvPr id="6" name="TextBox 5"/>
+          <p:cNvSpPr txBox="1"/>
+          <p:nvPr/>
+        </p:nvSpPr>
+        <p:spPr>
+          <a:xfrm>
+            <a:off x="1106424" y="2705166"/>
+            <a:ext cx="15206472" cy="384048"/>
+          </a:xfrm>
+          <a:prstGeom prst="rect">
+            <a:avLst/>
+          </a:prstGeom>
+          <a:noFill/>
+        </p:spPr>
+        <p:txBody>
+          <a:bodyPr wrap="square" lIns="18288" tIns="18288" rIns="18288" bIns="18288" anchor="ctr">
+            <a:spAutoFit/>
+          </a:bodyPr>
+          <a:lstStyle/>
+          <a:p>
+            <a:pPr algn="l">
+              <a:spcBef>
+                <a:spcPts val="0"/>
+              </a:spcBef>
+              <a:spcAft>
+                <a:spcPts val="0"/>
+              </a:spcAft>
+            </a:pPr>
+            <a:r>
+              <a:rPr sz="1950" b="1" dirty="0" err="1">
+                <a:solidFill>
+                  <a:srgbClr val="193B5E"/>
+                </a:solidFill>
+                <a:latin typeface="Microsoft YaHei"/>
+              </a:rPr>
+              <a:t>前一实验固定</a:t>
+            </a:r>
+            <a:r>
+              <a:rPr sz="1950" b="1" dirty="0">
+                <a:solidFill>
+                  <a:srgbClr val="193B5E"/>
+                </a:solidFill>
+                <a:latin typeface="Microsoft YaHei"/>
+              </a:rPr>
+              <a:t> </a:t>
+            </a:r>
+            <a:r>
+              <a:rPr sz="1950" b="1" dirty="0" err="1">
+                <a:solidFill>
+                  <a:srgbClr val="193B5E"/>
+                </a:solidFill>
+                <a:latin typeface="Microsoft YaHei"/>
+              </a:rPr>
+              <a:t>root、演化</a:t>
+            </a:r>
+            <a:r>
+              <a:rPr sz="1950" b="1" dirty="0">
+                <a:solidFill>
+                  <a:srgbClr val="193B5E"/>
+                </a:solidFill>
+                <a:latin typeface="Microsoft YaHei"/>
+              </a:rPr>
+              <a:t> </a:t>
+            </a:r>
+            <a:r>
+              <a:rPr sz="1950" b="1" dirty="0" err="1">
+                <a:solidFill>
+                  <a:srgbClr val="193B5E"/>
+                </a:solidFill>
+                <a:latin typeface="Microsoft YaHei"/>
+              </a:rPr>
+              <a:t>children；本次把准则学习前移到</a:t>
+            </a:r>
+            <a:r>
+              <a:rPr sz="1950" b="1" dirty="0">
+                <a:solidFill>
+                  <a:srgbClr val="193B5E"/>
+                </a:solidFill>
+                <a:latin typeface="Microsoft YaHei"/>
+              </a:rPr>
+              <a:t> root </a:t>
+            </a:r>
+            <a:r>
+              <a:rPr sz="1950" b="1" dirty="0" err="1">
+                <a:solidFill>
+                  <a:srgbClr val="193B5E"/>
+                </a:solidFill>
+                <a:latin typeface="Microsoft YaHei"/>
+              </a:rPr>
+              <a:t>初始化</a:t>
+            </a:r>
+            <a:r>
+              <a:rPr sz="1950" b="1" dirty="0">
+                <a:solidFill>
+                  <a:srgbClr val="193B5E"/>
+                </a:solidFill>
+                <a:latin typeface="Microsoft YaHei"/>
+              </a:rPr>
+              <a:t>。</a:t>
+            </a:r>
+          </a:p>
+        </p:txBody>
+      </p:sp>
+      <p:sp>
+        <p:nvSpPr>
+          <p:cNvPr id="7" name="Rounded Rectangle 6"/>
+          <p:cNvSpPr/>
+          <p:nvPr/>
+        </p:nvSpPr>
+        <p:spPr>
+          <a:xfrm>
+            <a:off x="886968" y="3850454"/>
+            <a:ext cx="7552944" cy="3300984"/>
+          </a:xfrm>
+          <a:prstGeom prst="roundRect">
+            <a:avLst>
+              <a:gd name="adj" fmla="val 12000"/>
+            </a:avLst>
+          </a:prstGeom>
+          <a:solidFill>
+            <a:srgbClr val="F4F9FD"/>
+          </a:solidFill>
+          <a:ln>
+            <a:noFill/>
+          </a:ln>
+        </p:spPr>
+        <p:style>
+          <a:lnRef idx="1">
+            <a:schemeClr val="accent1"/>
+          </a:lnRef>
+          <a:fillRef idx="3">
+            <a:schemeClr val="accent1"/>
+          </a:fillRef>
+          <a:effectRef idx="2">
+            <a:schemeClr val="accent1"/>
+          </a:effectRef>
+          <a:fontRef idx="minor">
+            <a:schemeClr val="lt1"/>
+          </a:fontRef>
+        </p:style>
+        <p:txBody>
+          <a:bodyPr rtlCol="0" anchor="ctr"/>
+          <a:lstStyle/>
+          <a:p>
+            <a:pPr algn="ctr"/>
+            <a:endParaRPr/>
+          </a:p>
+        </p:txBody>
+      </p:sp>
+      <p:sp>
+        <p:nvSpPr>
+          <p:cNvPr id="8" name="Rectangle 7"/>
+          <p:cNvSpPr/>
+          <p:nvPr/>
+        </p:nvSpPr>
+        <p:spPr>
+          <a:xfrm>
+            <a:off x="877824" y="3850454"/>
+            <a:ext cx="100584" cy="3300984"/>
+          </a:xfrm>
+          <a:prstGeom prst="rect">
+            <a:avLst/>
+          </a:prstGeom>
+          <a:solidFill>
+            <a:srgbClr val="B45D3D"/>
+          </a:solidFill>
+          <a:ln>
+            <a:noFill/>
+          </a:ln>
+        </p:spPr>
+        <p:style>
+          <a:lnRef idx="1">
+            <a:schemeClr val="accent1"/>
+          </a:lnRef>
+          <a:fillRef idx="3">
+            <a:schemeClr val="accent1"/>
+          </a:fillRef>
+          <a:effectRef idx="2">
+            <a:schemeClr val="accent1"/>
+          </a:effectRef>
+          <a:fontRef idx="minor">
+            <a:schemeClr val="lt1"/>
+          </a:fontRef>
+        </p:style>
+        <p:txBody>
+          <a:bodyPr rtlCol="0" anchor="ctr"/>
+          <a:lstStyle/>
+          <a:p>
+            <a:pPr algn="ctr"/>
+            <a:endParaRPr/>
+          </a:p>
+        </p:txBody>
+      </p:sp>
+      <p:sp>
+        <p:nvSpPr>
+          <p:cNvPr id="9" name="TextBox 8"/>
+          <p:cNvSpPr txBox="1"/>
+          <p:nvPr/>
+        </p:nvSpPr>
+        <p:spPr>
+          <a:xfrm>
+            <a:off x="1161288" y="4079054"/>
+            <a:ext cx="5212080" cy="411480"/>
+          </a:xfrm>
+          <a:prstGeom prst="rect">
+            <a:avLst/>
+          </a:prstGeom>
+          <a:noFill/>
+        </p:spPr>
+        <p:txBody>
+          <a:bodyPr wrap="square" lIns="18288" tIns="18288" rIns="18288" bIns="18288" anchor="ctr">
+            <a:spAutoFit/>
+          </a:bodyPr>
+          <a:lstStyle/>
+          <a:p>
+            <a:pPr algn="l">
+              <a:spcBef>
+                <a:spcPts val="0"/>
+              </a:spcBef>
+              <a:spcAft>
+                <a:spcPts val="0"/>
+              </a:spcAft>
+            </a:pPr>
+            <a:r>
+              <a:rPr sz="2300" b="1" dirty="0" err="1">
+                <a:solidFill>
+                  <a:srgbClr val="B45D3D"/>
+                </a:solidFill>
+                <a:latin typeface="Microsoft YaHei"/>
+              </a:rPr>
+              <a:t>预设五根</a:t>
+            </a:r>
+            <a:endParaRPr sz="2300" b="1" dirty="0">
+              <a:solidFill>
+                <a:srgbClr val="B45D3D"/>
+              </a:solidFill>
+              <a:latin typeface="Microsoft YaHei"/>
+            </a:endParaRPr>
+          </a:p>
+        </p:txBody>
+      </p:sp>
+      <p:sp>
+        <p:nvSpPr>
+          <p:cNvPr id="10" name="Rounded Rectangle 9"/>
+          <p:cNvSpPr/>
+          <p:nvPr/>
+        </p:nvSpPr>
+        <p:spPr>
+          <a:xfrm>
+            <a:off x="6601968" y="4069910"/>
+            <a:ext cx="1408176" cy="429768"/>
+          </a:xfrm>
+          <a:prstGeom prst="roundRect">
+            <a:avLst>
+              <a:gd name="adj" fmla="val 12000"/>
+            </a:avLst>
+          </a:prstGeom>
+          <a:solidFill>
+            <a:srgbClr val="FFFFFF"/>
+          </a:solidFill>
+          <a:ln>
+            <a:noFill/>
+          </a:ln>
+        </p:spPr>
+        <p:style>
+          <a:lnRef idx="1">
+            <a:schemeClr val="accent1"/>
+          </a:lnRef>
+          <a:fillRef idx="3">
+            <a:schemeClr val="accent1"/>
+          </a:fillRef>
+          <a:effectRef idx="2">
+            <a:schemeClr val="accent1"/>
+          </a:effectRef>
+          <a:fontRef idx="minor">
+            <a:schemeClr val="lt1"/>
+          </a:fontRef>
+        </p:style>
+        <p:txBody>
+          <a:bodyPr rtlCol="0" anchor="ctr"/>
+          <a:lstStyle/>
+          <a:p>
+            <a:pPr algn="ctr"/>
+            <a:endParaRPr/>
+          </a:p>
+        </p:txBody>
+      </p:sp>
+      <p:sp>
+        <p:nvSpPr>
+          <p:cNvPr id="11" name="TextBox 10"/>
+          <p:cNvSpPr txBox="1"/>
+          <p:nvPr/>
+        </p:nvSpPr>
+        <p:spPr>
+          <a:xfrm>
+            <a:off x="6647688" y="4115630"/>
+            <a:ext cx="1316736" cy="338328"/>
+          </a:xfrm>
+          <a:prstGeom prst="rect">
+            <a:avLst/>
+          </a:prstGeom>
+          <a:noFill/>
+        </p:spPr>
+        <p:txBody>
+          <a:bodyPr wrap="square" lIns="18288" tIns="18288" rIns="18288" bIns="18288" anchor="ctr">
+            <a:spAutoFit/>
+          </a:bodyPr>
+          <a:lstStyle/>
+          <a:p>
+            <a:pPr algn="ctr">
+              <a:spcBef>
+                <a:spcPts val="0"/>
+              </a:spcBef>
+              <a:spcAft>
+                <a:spcPts val="0"/>
+              </a:spcAft>
+            </a:pPr>
+            <a:r>
+              <a:rPr sz="1550" b="1">
+                <a:solidFill>
+                  <a:srgbClr val="B45D3D"/>
+                </a:solidFill>
+                <a:latin typeface="Microsoft YaHei"/>
+              </a:rPr>
+              <a:t>固定来源</a:t>
+            </a:r>
+          </a:p>
+        </p:txBody>
+      </p:sp>
+      <p:sp>
+        <p:nvSpPr>
+          <p:cNvPr id="12" name="TextBox 11"/>
+          <p:cNvSpPr txBox="1"/>
+          <p:nvPr/>
+        </p:nvSpPr>
+        <p:spPr>
+          <a:xfrm>
+            <a:off x="1161288" y="4636837"/>
+            <a:ext cx="6986016" cy="347472"/>
+          </a:xfrm>
+          <a:prstGeom prst="rect">
+            <a:avLst/>
+          </a:prstGeom>
+          <a:noFill/>
+        </p:spPr>
+        <p:txBody>
+          <a:bodyPr wrap="square" lIns="18288" tIns="18288" rIns="18288" bIns="18288" anchor="ctr">
+            <a:spAutoFit/>
+          </a:bodyPr>
+          <a:lstStyle/>
+          <a:p>
+            <a:pPr algn="l">
+              <a:spcBef>
+                <a:spcPts val="0"/>
+              </a:spcBef>
+              <a:spcAft>
+                <a:spcPts val="0"/>
+              </a:spcAft>
+            </a:pPr>
+            <a:r>
+              <a:rPr sz="1700" b="1" dirty="0" err="1">
+                <a:solidFill>
+                  <a:srgbClr val="193B5E"/>
+                </a:solidFill>
+                <a:latin typeface="Microsoft YaHei"/>
+              </a:rPr>
+              <a:t>对照：直接采用原有通用上层准则</a:t>
+            </a:r>
+            <a:endParaRPr sz="1700" b="1" dirty="0">
+              <a:solidFill>
+                <a:srgbClr val="193B5E"/>
+              </a:solidFill>
+              <a:latin typeface="Microsoft YaHei"/>
+            </a:endParaRPr>
+          </a:p>
+        </p:txBody>
+      </p:sp>
+      <p:sp>
+        <p:nvSpPr>
+          <p:cNvPr id="13" name="TextBox 12"/>
+          <p:cNvSpPr txBox="1"/>
+          <p:nvPr/>
+        </p:nvSpPr>
+        <p:spPr>
+          <a:xfrm>
+            <a:off x="1161288" y="5095285"/>
+            <a:ext cx="6967728" cy="640080"/>
+          </a:xfrm>
+          <a:prstGeom prst="rect">
+            <a:avLst/>
+          </a:prstGeom>
+          <a:noFill/>
+        </p:spPr>
+        <p:txBody>
+          <a:bodyPr wrap="square" lIns="18288" tIns="18288" rIns="18288" bIns="18288" anchor="ctr">
+            <a:spAutoFit/>
+          </a:bodyPr>
+          <a:lstStyle/>
+          <a:p>
+            <a:pPr algn="l">
+              <a:spcBef>
+                <a:spcPts val="0"/>
+              </a:spcBef>
+              <a:spcAft>
+                <a:spcPts val="0"/>
+              </a:spcAft>
+            </a:pPr>
+            <a:r>
+              <a:rPr sz="1700" b="0" dirty="0" err="1">
+                <a:solidFill>
+                  <a:srgbClr val="193B5E"/>
+                </a:solidFill>
+                <a:latin typeface="Microsoft YaHei"/>
+              </a:rPr>
+              <a:t>不进行样例预热；固定五个</a:t>
+            </a:r>
+            <a:r>
+              <a:rPr sz="1700" b="0" dirty="0">
+                <a:solidFill>
+                  <a:srgbClr val="193B5E"/>
+                </a:solidFill>
+                <a:latin typeface="Microsoft YaHei"/>
+              </a:rPr>
+              <a:t> root </a:t>
+            </a:r>
+            <a:r>
+              <a:rPr sz="1700" b="0" dirty="0" err="1">
+                <a:solidFill>
+                  <a:srgbClr val="193B5E"/>
+                </a:solidFill>
+                <a:latin typeface="Microsoft YaHei"/>
+              </a:rPr>
+              <a:t>后进入初始</a:t>
+            </a:r>
+            <a:r>
+              <a:rPr sz="1700" b="0" dirty="0">
+                <a:solidFill>
+                  <a:srgbClr val="193B5E"/>
+                </a:solidFill>
+                <a:latin typeface="Microsoft YaHei"/>
+              </a:rPr>
+              <a:t> Split。</a:t>
+            </a:r>
+          </a:p>
+        </p:txBody>
+      </p:sp>
+      <p:sp>
+        <p:nvSpPr>
+          <p:cNvPr id="14" name="Rounded Rectangle 13"/>
+          <p:cNvSpPr/>
+          <p:nvPr/>
+        </p:nvSpPr>
+        <p:spPr>
+          <a:xfrm>
+            <a:off x="1170432" y="6008855"/>
+            <a:ext cx="6912864" cy="841248"/>
+          </a:xfrm>
+          <a:prstGeom prst="roundRect">
+            <a:avLst>
+              <a:gd name="adj" fmla="val 12000"/>
+            </a:avLst>
+          </a:prstGeom>
+          <a:solidFill>
+            <a:srgbClr val="FFFFFF"/>
+          </a:solidFill>
+          <a:ln>
+            <a:noFill/>
+          </a:ln>
+        </p:spPr>
+        <p:style>
+          <a:lnRef idx="1">
+            <a:schemeClr val="accent1"/>
+          </a:lnRef>
+          <a:fillRef idx="3">
+            <a:schemeClr val="accent1"/>
+          </a:fillRef>
+          <a:effectRef idx="2">
+            <a:schemeClr val="accent1"/>
+          </a:effectRef>
+          <a:fontRef idx="minor">
+            <a:schemeClr val="lt1"/>
+          </a:fontRef>
+        </p:style>
+        <p:txBody>
+          <a:bodyPr rtlCol="0" anchor="ctr"/>
+          <a:lstStyle/>
+          <a:p>
+            <a:pPr algn="ctr"/>
+            <a:endParaRPr/>
+          </a:p>
+        </p:txBody>
+      </p:sp>
+      <p:sp>
+        <p:nvSpPr>
+          <p:cNvPr id="15" name="TextBox 14"/>
+          <p:cNvSpPr txBox="1"/>
+          <p:nvPr/>
+        </p:nvSpPr>
+        <p:spPr>
+          <a:xfrm>
+            <a:off x="1353312" y="6109439"/>
+            <a:ext cx="6565392" cy="621792"/>
+          </a:xfrm>
+          <a:prstGeom prst="rect">
+            <a:avLst/>
+          </a:prstGeom>
+          <a:noFill/>
+        </p:spPr>
+        <p:txBody>
+          <a:bodyPr wrap="square" lIns="18288" tIns="18288" rIns="18288" bIns="18288" anchor="ctr">
+            <a:spAutoFit/>
+          </a:bodyPr>
+          <a:lstStyle/>
+          <a:p>
+            <a:pPr algn="l">
+              <a:spcBef>
+                <a:spcPts val="0"/>
+              </a:spcBef>
+              <a:spcAft>
+                <a:spcPts val="0"/>
+              </a:spcAft>
+            </a:pPr>
+            <a:r>
+              <a:rPr sz="1750" b="1" dirty="0" err="1">
+                <a:solidFill>
+                  <a:srgbClr val="193B5E"/>
+                </a:solidFill>
+                <a:latin typeface="Microsoft YaHei"/>
+              </a:rPr>
+              <a:t>完整性与覆盖</a:t>
+            </a:r>
+            <a:r>
+              <a:rPr sz="1750" b="1" dirty="0">
+                <a:solidFill>
+                  <a:srgbClr val="193B5E"/>
+                </a:solidFill>
+                <a:latin typeface="Microsoft YaHei"/>
+              </a:rPr>
+              <a:t> · </a:t>
+            </a:r>
+            <a:r>
+              <a:rPr sz="1750" b="1" dirty="0" err="1">
+                <a:solidFill>
+                  <a:srgbClr val="193B5E"/>
+                </a:solidFill>
+                <a:latin typeface="Microsoft YaHei"/>
+              </a:rPr>
+              <a:t>视觉依据与细节</a:t>
+            </a:r>
+            <a:r>
+              <a:rPr sz="1750" b="1" dirty="0">
+                <a:solidFill>
+                  <a:srgbClr val="193B5E"/>
+                </a:solidFill>
+                <a:latin typeface="Microsoft YaHei"/>
+              </a:rPr>
+              <a:t> · </a:t>
+            </a:r>
+            <a:r>
+              <a:rPr sz="1750" b="1" dirty="0" err="1">
+                <a:solidFill>
+                  <a:srgbClr val="193B5E"/>
+                </a:solidFill>
+                <a:latin typeface="Microsoft YaHei"/>
+              </a:rPr>
+              <a:t>事实性／无幻觉</a:t>
+            </a:r>
+            <a:endParaRPr sz="1750" b="1" dirty="0">
+              <a:solidFill>
+                <a:srgbClr val="193B5E"/>
+              </a:solidFill>
+              <a:latin typeface="Microsoft YaHei"/>
+            </a:endParaRPr>
+          </a:p>
+          <a:p>
+            <a:pPr algn="l">
+              <a:spcBef>
+                <a:spcPts val="0"/>
+              </a:spcBef>
+              <a:spcAft>
+                <a:spcPts val="0"/>
+              </a:spcAft>
+            </a:pPr>
+            <a:r>
+              <a:rPr sz="1750" b="1" dirty="0" err="1">
+                <a:solidFill>
+                  <a:srgbClr val="193B5E"/>
+                </a:solidFill>
+                <a:latin typeface="Microsoft YaHei"/>
+              </a:rPr>
+              <a:t>创造性与表达</a:t>
+            </a:r>
+            <a:r>
+              <a:rPr sz="1750" b="1" dirty="0">
+                <a:solidFill>
+                  <a:srgbClr val="193B5E"/>
+                </a:solidFill>
+                <a:latin typeface="Microsoft YaHei"/>
+              </a:rPr>
+              <a:t> · </a:t>
+            </a:r>
+            <a:r>
+              <a:rPr sz="1750" b="1" dirty="0" err="1">
+                <a:solidFill>
+                  <a:srgbClr val="193B5E"/>
+                </a:solidFill>
+                <a:latin typeface="Microsoft YaHei"/>
+              </a:rPr>
+              <a:t>清晰与连贯</a:t>
+            </a:r>
+            <a:endParaRPr sz="1750" b="1" dirty="0">
+              <a:solidFill>
+                <a:srgbClr val="193B5E"/>
+              </a:solidFill>
+              <a:latin typeface="Microsoft YaHei"/>
+            </a:endParaRPr>
+          </a:p>
+        </p:txBody>
+      </p:sp>
+      <p:sp>
+        <p:nvSpPr>
+          <p:cNvPr id="17" name="Rounded Rectangle 16"/>
+          <p:cNvSpPr/>
+          <p:nvPr/>
+        </p:nvSpPr>
+        <p:spPr>
+          <a:xfrm>
+            <a:off x="8942832" y="3850454"/>
+            <a:ext cx="7552944" cy="3300984"/>
+          </a:xfrm>
+          <a:prstGeom prst="roundRect">
+            <a:avLst>
+              <a:gd name="adj" fmla="val 12000"/>
+            </a:avLst>
+          </a:prstGeom>
+          <a:solidFill>
+            <a:srgbClr val="EBF6FE"/>
+          </a:solidFill>
+          <a:ln>
+            <a:noFill/>
+          </a:ln>
+        </p:spPr>
+        <p:style>
+          <a:lnRef idx="1">
+            <a:schemeClr val="accent1"/>
+          </a:lnRef>
+          <a:fillRef idx="3">
+            <a:schemeClr val="accent1"/>
+          </a:fillRef>
+          <a:effectRef idx="2">
+            <a:schemeClr val="accent1"/>
+          </a:effectRef>
+          <a:fontRef idx="minor">
+            <a:schemeClr val="lt1"/>
+          </a:fontRef>
+        </p:style>
+        <p:txBody>
+          <a:bodyPr rtlCol="0" anchor="ctr"/>
+          <a:lstStyle/>
+          <a:p>
+            <a:pPr algn="ctr"/>
+            <a:endParaRPr/>
+          </a:p>
+        </p:txBody>
+      </p:sp>
+      <p:sp>
+        <p:nvSpPr>
+          <p:cNvPr id="18" name="Rectangle 17"/>
+          <p:cNvSpPr/>
+          <p:nvPr/>
+        </p:nvSpPr>
+        <p:spPr>
+          <a:xfrm>
+            <a:off x="8942832" y="3850454"/>
+            <a:ext cx="109728" cy="3300984"/>
+          </a:xfrm>
+          <a:prstGeom prst="rect">
+            <a:avLst/>
+          </a:prstGeom>
+          <a:solidFill>
+            <a:srgbClr val="075B97"/>
+          </a:solidFill>
+          <a:ln>
+            <a:noFill/>
+          </a:ln>
+        </p:spPr>
+        <p:style>
+          <a:lnRef idx="1">
+            <a:schemeClr val="accent1"/>
+          </a:lnRef>
+          <a:fillRef idx="3">
+            <a:schemeClr val="accent1"/>
+          </a:fillRef>
+          <a:effectRef idx="2">
+            <a:schemeClr val="accent1"/>
+          </a:effectRef>
+          <a:fontRef idx="minor">
+            <a:schemeClr val="lt1"/>
+          </a:fontRef>
+        </p:style>
+        <p:txBody>
+          <a:bodyPr rtlCol="0" anchor="ctr"/>
+          <a:lstStyle/>
+          <a:p>
+            <a:pPr algn="ctr"/>
+            <a:endParaRPr/>
+          </a:p>
+        </p:txBody>
+      </p:sp>
+      <p:sp>
+        <p:nvSpPr>
+          <p:cNvPr id="19" name="TextBox 18"/>
+          <p:cNvSpPr txBox="1"/>
+          <p:nvPr/>
+        </p:nvSpPr>
+        <p:spPr>
+          <a:xfrm>
+            <a:off x="9217152" y="4079054"/>
+            <a:ext cx="5212080" cy="411480"/>
+          </a:xfrm>
+          <a:prstGeom prst="rect">
+            <a:avLst/>
+          </a:prstGeom>
+          <a:noFill/>
+        </p:spPr>
+        <p:txBody>
+          <a:bodyPr wrap="square" lIns="18288" tIns="18288" rIns="18288" bIns="18288" anchor="ctr">
+            <a:spAutoFit/>
+          </a:bodyPr>
+          <a:lstStyle/>
+          <a:p>
+            <a:pPr algn="l">
+              <a:spcBef>
+                <a:spcPts val="0"/>
+              </a:spcBef>
+              <a:spcAft>
+                <a:spcPts val="0"/>
+              </a:spcAft>
+            </a:pPr>
+            <a:r>
+              <a:rPr sz="2300" b="1">
+                <a:solidFill>
+                  <a:srgbClr val="075B97"/>
+                </a:solidFill>
+                <a:latin typeface="Microsoft YaHei"/>
+              </a:rPr>
+              <a:t>偏好归纳五根</a:t>
+            </a:r>
+          </a:p>
+        </p:txBody>
+      </p:sp>
+      <p:sp>
+        <p:nvSpPr>
+          <p:cNvPr id="20" name="Rounded Rectangle 19"/>
+          <p:cNvSpPr/>
+          <p:nvPr/>
+        </p:nvSpPr>
+        <p:spPr>
+          <a:xfrm>
+            <a:off x="14657832" y="4069910"/>
+            <a:ext cx="1408176" cy="429768"/>
+          </a:xfrm>
+          <a:prstGeom prst="roundRect">
+            <a:avLst>
+              <a:gd name="adj" fmla="val 12000"/>
+            </a:avLst>
+          </a:prstGeom>
+          <a:solidFill>
+            <a:srgbClr val="FFFFFF"/>
+          </a:solidFill>
+          <a:ln>
+            <a:noFill/>
+          </a:ln>
+        </p:spPr>
+        <p:style>
+          <a:lnRef idx="1">
+            <a:schemeClr val="accent1"/>
+          </a:lnRef>
+          <a:fillRef idx="3">
+            <a:schemeClr val="accent1"/>
+          </a:fillRef>
+          <a:effectRef idx="2">
+            <a:schemeClr val="accent1"/>
+          </a:effectRef>
+          <a:fontRef idx="minor">
+            <a:schemeClr val="lt1"/>
+          </a:fontRef>
+        </p:style>
+        <p:txBody>
+          <a:bodyPr rtlCol="0" anchor="ctr"/>
+          <a:lstStyle/>
+          <a:p>
+            <a:pPr algn="ctr"/>
+            <a:endParaRPr/>
+          </a:p>
+        </p:txBody>
+      </p:sp>
+      <p:sp>
+        <p:nvSpPr>
+          <p:cNvPr id="21" name="TextBox 20"/>
+          <p:cNvSpPr txBox="1"/>
+          <p:nvPr/>
+        </p:nvSpPr>
+        <p:spPr>
+          <a:xfrm>
+            <a:off x="14703552" y="4115630"/>
+            <a:ext cx="1316736" cy="338328"/>
+          </a:xfrm>
+          <a:prstGeom prst="rect">
+            <a:avLst/>
+          </a:prstGeom>
+          <a:noFill/>
+        </p:spPr>
+        <p:txBody>
+          <a:bodyPr wrap="square" lIns="18288" tIns="18288" rIns="18288" bIns="18288" anchor="ctr">
+            <a:spAutoFit/>
+          </a:bodyPr>
+          <a:lstStyle/>
+          <a:p>
+            <a:pPr algn="ctr">
+              <a:spcBef>
+                <a:spcPts val="0"/>
+              </a:spcBef>
+              <a:spcAft>
+                <a:spcPts val="0"/>
+              </a:spcAft>
+            </a:pPr>
+            <a:r>
+              <a:rPr sz="1550" b="1">
+                <a:solidFill>
+                  <a:srgbClr val="075B97"/>
+                </a:solidFill>
+                <a:latin typeface="Microsoft YaHei"/>
+              </a:rPr>
+              <a:t>数据生成</a:t>
+            </a:r>
+          </a:p>
+        </p:txBody>
+      </p:sp>
+      <p:sp>
+        <p:nvSpPr>
+          <p:cNvPr id="22" name="TextBox 21"/>
+          <p:cNvSpPr txBox="1"/>
+          <p:nvPr/>
+        </p:nvSpPr>
+        <p:spPr>
+          <a:xfrm>
+            <a:off x="9217152" y="4636837"/>
+            <a:ext cx="6986016" cy="347472"/>
+          </a:xfrm>
+          <a:prstGeom prst="rect">
+            <a:avLst/>
+          </a:prstGeom>
+          <a:noFill/>
+        </p:spPr>
+        <p:txBody>
+          <a:bodyPr wrap="square" lIns="18288" tIns="18288" rIns="18288" bIns="18288" anchor="ctr">
+            <a:spAutoFit/>
+          </a:bodyPr>
+          <a:lstStyle/>
+          <a:p>
+            <a:pPr algn="l">
+              <a:spcBef>
+                <a:spcPts val="0"/>
+              </a:spcBef>
+              <a:spcAft>
+                <a:spcPts val="0"/>
+              </a:spcAft>
+            </a:pPr>
+            <a:r>
+              <a:rPr sz="1700" b="1" dirty="0" err="1">
+                <a:solidFill>
+                  <a:srgbClr val="193B5E"/>
+                </a:solidFill>
+                <a:latin typeface="Microsoft YaHei"/>
+              </a:rPr>
+              <a:t>新方法：由训练集</a:t>
+            </a:r>
+            <a:r>
+              <a:rPr sz="1700" b="1" dirty="0">
+                <a:solidFill>
+                  <a:srgbClr val="193B5E"/>
+                </a:solidFill>
+                <a:latin typeface="Microsoft YaHei"/>
+              </a:rPr>
+              <a:t> 5 </a:t>
+            </a:r>
+            <a:r>
+              <a:rPr sz="1700" b="1" dirty="0" err="1">
+                <a:solidFill>
+                  <a:srgbClr val="193B5E"/>
+                </a:solidFill>
+                <a:latin typeface="Microsoft YaHei"/>
+              </a:rPr>
+              <a:t>条人类偏好样例归纳</a:t>
+            </a:r>
+            <a:endParaRPr sz="1700" b="1" dirty="0">
+              <a:solidFill>
+                <a:srgbClr val="193B5E"/>
+              </a:solidFill>
+              <a:latin typeface="Microsoft YaHei"/>
+            </a:endParaRPr>
+          </a:p>
+        </p:txBody>
+      </p:sp>
+      <p:sp>
+        <p:nvSpPr>
+          <p:cNvPr id="23" name="TextBox 22"/>
+          <p:cNvSpPr txBox="1"/>
+          <p:nvPr/>
+        </p:nvSpPr>
+        <p:spPr>
+          <a:xfrm>
+            <a:off x="9217152" y="5025225"/>
+            <a:ext cx="6967728" cy="821763"/>
+          </a:xfrm>
+          <a:prstGeom prst="rect">
+            <a:avLst/>
+          </a:prstGeom>
+          <a:noFill/>
+        </p:spPr>
+        <p:txBody>
+          <a:bodyPr wrap="square" lIns="18288" tIns="18288" rIns="18288" bIns="18288" anchor="ctr">
+            <a:spAutoFit/>
+          </a:bodyPr>
+          <a:lstStyle/>
+          <a:p>
+            <a:pPr algn="l">
+              <a:spcBef>
+                <a:spcPts val="0"/>
+              </a:spcBef>
+              <a:spcAft>
+                <a:spcPts val="0"/>
+              </a:spcAft>
+            </a:pPr>
+            <a:r>
+              <a:rPr sz="1700" b="0" dirty="0" err="1">
+                <a:solidFill>
+                  <a:srgbClr val="193B5E"/>
+                </a:solidFill>
+                <a:latin typeface="Microsoft YaHei"/>
+              </a:rPr>
+              <a:t>从训练</a:t>
+            </a:r>
+            <a:r>
+              <a:rPr sz="1700" b="0" dirty="0">
+                <a:solidFill>
+                  <a:srgbClr val="193B5E"/>
+                </a:solidFill>
+                <a:latin typeface="Microsoft YaHei"/>
+              </a:rPr>
+              <a:t> 100 </a:t>
+            </a:r>
+            <a:r>
+              <a:rPr sz="1700" b="0" dirty="0" err="1">
+                <a:solidFill>
+                  <a:srgbClr val="193B5E"/>
+                </a:solidFill>
+                <a:latin typeface="Microsoft YaHei"/>
+              </a:rPr>
+              <a:t>条抽</a:t>
+            </a:r>
+            <a:r>
+              <a:rPr sz="1700" b="0" dirty="0">
+                <a:solidFill>
+                  <a:srgbClr val="193B5E"/>
+                </a:solidFill>
+                <a:latin typeface="Microsoft YaHei"/>
+              </a:rPr>
+              <a:t> 5 </a:t>
+            </a:r>
+            <a:r>
+              <a:rPr sz="1700" b="0" dirty="0" err="1">
+                <a:solidFill>
+                  <a:srgbClr val="193B5E"/>
+                </a:solidFill>
+                <a:latin typeface="Microsoft YaHei"/>
+              </a:rPr>
+              <a:t>条图文比较，Manager</a:t>
+            </a:r>
+            <a:r>
+              <a:rPr sz="1700" b="0" dirty="0">
+                <a:solidFill>
+                  <a:srgbClr val="193B5E"/>
+                </a:solidFill>
+                <a:latin typeface="Microsoft YaHei"/>
+              </a:rPr>
+              <a:t> </a:t>
+            </a:r>
+            <a:r>
+              <a:rPr sz="1700" b="0" dirty="0" err="1">
+                <a:solidFill>
+                  <a:srgbClr val="193B5E"/>
+                </a:solidFill>
+                <a:latin typeface="Microsoft YaHei"/>
+              </a:rPr>
+              <a:t>连续预热</a:t>
+            </a:r>
+            <a:r>
+              <a:rPr lang="zh-CN" altLang="en-US" sz="1700" b="0" dirty="0">
+                <a:solidFill>
+                  <a:srgbClr val="193B5E"/>
+                </a:solidFill>
+                <a:latin typeface="Microsoft YaHei"/>
+              </a:rPr>
+              <a:t>（</a:t>
+            </a:r>
+            <a:r>
+              <a:rPr lang="zh-CN" altLang="en-US" sz="1700" dirty="0">
+                <a:solidFill>
+                  <a:srgbClr val="193B5E"/>
+                </a:solidFill>
+                <a:latin typeface="Microsoft YaHei"/>
+              </a:rPr>
+              <a:t>每次解释</a:t>
+            </a:r>
+            <a:r>
+              <a:rPr lang="zh-CN" altLang="en-US" sz="1600" dirty="0"/>
+              <a:t>为什么人类在面对这张图片和这个问题时，可能会更偏好这个回答</a:t>
+            </a:r>
+            <a:r>
+              <a:rPr lang="zh-CN" altLang="en-US" sz="1700" b="0" dirty="0">
+                <a:solidFill>
+                  <a:srgbClr val="193B5E"/>
+                </a:solidFill>
+                <a:latin typeface="Microsoft YaHei"/>
+              </a:rPr>
+              <a:t>）</a:t>
+            </a:r>
+            <a:r>
+              <a:rPr sz="1700" b="0" dirty="0">
+                <a:solidFill>
+                  <a:srgbClr val="193B5E"/>
+                </a:solidFill>
+                <a:latin typeface="Microsoft YaHei"/>
+              </a:rPr>
+              <a:t>，</a:t>
+            </a:r>
+            <a:r>
+              <a:rPr sz="1700" b="0" dirty="0" err="1">
+                <a:solidFill>
+                  <a:srgbClr val="193B5E"/>
+                </a:solidFill>
+                <a:latin typeface="Microsoft YaHei"/>
+              </a:rPr>
+              <a:t>再归纳出五个可复用的</a:t>
+            </a:r>
+            <a:r>
+              <a:rPr sz="1700" b="0" dirty="0">
+                <a:solidFill>
+                  <a:srgbClr val="193B5E"/>
+                </a:solidFill>
+                <a:latin typeface="Microsoft YaHei"/>
+              </a:rPr>
+              <a:t> root。</a:t>
+            </a:r>
+          </a:p>
+        </p:txBody>
+      </p:sp>
+      <p:sp>
+        <p:nvSpPr>
+          <p:cNvPr id="24" name="Rounded Rectangle 23"/>
+          <p:cNvSpPr/>
+          <p:nvPr/>
+        </p:nvSpPr>
+        <p:spPr>
+          <a:xfrm>
+            <a:off x="9226296" y="6008855"/>
+            <a:ext cx="6912864" cy="841248"/>
+          </a:xfrm>
+          <a:prstGeom prst="roundRect">
+            <a:avLst>
+              <a:gd name="adj" fmla="val 12000"/>
+            </a:avLst>
+          </a:prstGeom>
+          <a:solidFill>
+            <a:srgbClr val="FFFFFF"/>
+          </a:solidFill>
+          <a:ln>
+            <a:noFill/>
+          </a:ln>
+        </p:spPr>
+        <p:style>
+          <a:lnRef idx="1">
+            <a:schemeClr val="accent1"/>
+          </a:lnRef>
+          <a:fillRef idx="3">
+            <a:schemeClr val="accent1"/>
+          </a:fillRef>
+          <a:effectRef idx="2">
+            <a:schemeClr val="accent1"/>
+          </a:effectRef>
+          <a:fontRef idx="minor">
+            <a:schemeClr val="lt1"/>
+          </a:fontRef>
+        </p:style>
+        <p:txBody>
+          <a:bodyPr rtlCol="0" anchor="ctr"/>
+          <a:lstStyle/>
+          <a:p>
+            <a:pPr algn="ctr"/>
+            <a:endParaRPr/>
+          </a:p>
+        </p:txBody>
+      </p:sp>
+      <p:sp>
+        <p:nvSpPr>
+          <p:cNvPr id="25" name="TextBox 24"/>
+          <p:cNvSpPr txBox="1"/>
+          <p:nvPr/>
+        </p:nvSpPr>
+        <p:spPr>
+          <a:xfrm>
+            <a:off x="9409176" y="6132564"/>
+            <a:ext cx="6565392" cy="575542"/>
+          </a:xfrm>
+          <a:prstGeom prst="rect">
+            <a:avLst/>
+          </a:prstGeom>
+          <a:noFill/>
+        </p:spPr>
+        <p:txBody>
+          <a:bodyPr wrap="square" lIns="18288" tIns="18288" rIns="18288" bIns="18288" anchor="ctr">
+            <a:spAutoFit/>
+          </a:bodyPr>
+          <a:lstStyle/>
+          <a:p>
+            <a:pPr algn="l">
+              <a:spcBef>
+                <a:spcPts val="0"/>
+              </a:spcBef>
+              <a:spcAft>
+                <a:spcPts val="0"/>
+              </a:spcAft>
+            </a:pPr>
+            <a:r>
+              <a:rPr sz="1750" b="1" dirty="0" err="1">
+                <a:solidFill>
+                  <a:srgbClr val="193B5E"/>
+                </a:solidFill>
+                <a:latin typeface="Microsoft YaHei"/>
+              </a:rPr>
+              <a:t>事实准确</a:t>
+            </a:r>
+            <a:r>
+              <a:rPr lang="zh-CN" altLang="en-US" sz="1750" b="1" dirty="0">
+                <a:solidFill>
+                  <a:srgbClr val="193B5E"/>
+                </a:solidFill>
+                <a:latin typeface="Microsoft YaHei"/>
+              </a:rPr>
+              <a:t>性</a:t>
+            </a:r>
+            <a:r>
+              <a:rPr sz="1750" b="1" dirty="0">
+                <a:solidFill>
+                  <a:srgbClr val="193B5E"/>
+                </a:solidFill>
+                <a:latin typeface="Microsoft YaHei"/>
+              </a:rPr>
+              <a:t> · </a:t>
+            </a:r>
+            <a:r>
+              <a:rPr lang="zh-CN" altLang="en-US" sz="1750" b="1" dirty="0">
+                <a:solidFill>
+                  <a:srgbClr val="193B5E"/>
+                </a:solidFill>
+                <a:latin typeface="Microsoft YaHei"/>
+              </a:rPr>
+              <a:t>假设处理</a:t>
+            </a:r>
+            <a:r>
+              <a:rPr sz="1750" b="1" dirty="0">
+                <a:solidFill>
+                  <a:srgbClr val="193B5E"/>
+                </a:solidFill>
+                <a:latin typeface="Microsoft YaHei"/>
+              </a:rPr>
+              <a:t>· </a:t>
+            </a:r>
+            <a:r>
+              <a:rPr lang="zh-CN" altLang="en-US" sz="1750" b="1" dirty="0">
+                <a:solidFill>
+                  <a:srgbClr val="193B5E"/>
+                </a:solidFill>
+                <a:latin typeface="Microsoft YaHei"/>
+              </a:rPr>
+              <a:t>相关性与聚焦度</a:t>
+            </a:r>
+            <a:endParaRPr sz="1750" b="1" dirty="0">
+              <a:solidFill>
+                <a:srgbClr val="193B5E"/>
+              </a:solidFill>
+              <a:latin typeface="Microsoft YaHei"/>
+            </a:endParaRPr>
+          </a:p>
+          <a:p>
+            <a:pPr algn="l">
+              <a:spcBef>
+                <a:spcPts val="0"/>
+              </a:spcBef>
+              <a:spcAft>
+                <a:spcPts val="0"/>
+              </a:spcAft>
+            </a:pPr>
+            <a:r>
+              <a:rPr lang="zh-CN" altLang="en-US" sz="1750" b="1" dirty="0">
+                <a:solidFill>
+                  <a:srgbClr val="193B5E"/>
+                </a:solidFill>
+                <a:latin typeface="Microsoft YaHei"/>
+              </a:rPr>
+              <a:t>边界约束下的完整性</a:t>
+            </a:r>
+            <a:r>
+              <a:rPr sz="1750" b="1" dirty="0">
+                <a:solidFill>
+                  <a:srgbClr val="193B5E"/>
+                </a:solidFill>
+                <a:latin typeface="Microsoft YaHei"/>
+              </a:rPr>
+              <a:t> · </a:t>
+            </a:r>
+            <a:r>
+              <a:rPr lang="zh-CN" altLang="en-US" sz="1750" b="1" dirty="0">
+                <a:solidFill>
+                  <a:srgbClr val="193B5E"/>
+                </a:solidFill>
+                <a:latin typeface="Microsoft YaHei"/>
+              </a:rPr>
+              <a:t>解释克制性</a:t>
+            </a:r>
+            <a:endParaRPr sz="1750" b="1" dirty="0">
+              <a:solidFill>
+                <a:srgbClr val="193B5E"/>
+              </a:solidFill>
+              <a:latin typeface="Microsoft YaHei"/>
+            </a:endParaRPr>
+          </a:p>
+        </p:txBody>
+      </p:sp>
+      <p:sp>
+        <p:nvSpPr>
+          <p:cNvPr id="27" name="TextBox 26"/>
+          <p:cNvSpPr txBox="1"/>
+          <p:nvPr/>
+        </p:nvSpPr>
+        <p:spPr>
+          <a:xfrm>
+            <a:off x="877824" y="7958606"/>
+            <a:ext cx="8229600" cy="384048"/>
+          </a:xfrm>
+          <a:prstGeom prst="rect">
+            <a:avLst/>
+          </a:prstGeom>
+          <a:noFill/>
+        </p:spPr>
+        <p:txBody>
+          <a:bodyPr wrap="square" lIns="18288" tIns="18288" rIns="18288" bIns="18288" anchor="ctr">
+            <a:spAutoFit/>
+          </a:bodyPr>
+          <a:lstStyle/>
+          <a:p>
+            <a:pPr algn="l">
+              <a:spcBef>
+                <a:spcPts val="0"/>
+              </a:spcBef>
+              <a:spcAft>
+                <a:spcPts val="0"/>
+              </a:spcAft>
+            </a:pPr>
+            <a:r>
+              <a:rPr sz="2100" b="1" dirty="0" err="1">
+                <a:solidFill>
+                  <a:srgbClr val="193B5E"/>
+                </a:solidFill>
+                <a:latin typeface="Microsoft YaHei"/>
+              </a:rPr>
+              <a:t>两组接入相同的后续流程</a:t>
+            </a:r>
+            <a:endParaRPr sz="2100" b="1" dirty="0">
+              <a:solidFill>
+                <a:srgbClr val="193B5E"/>
+              </a:solidFill>
+              <a:latin typeface="Microsoft YaHei"/>
+            </a:endParaRPr>
+          </a:p>
+        </p:txBody>
+      </p:sp>
+      <p:sp>
+        <p:nvSpPr>
+          <p:cNvPr id="28" name="Rounded Rectangle 27"/>
+          <p:cNvSpPr/>
+          <p:nvPr/>
+        </p:nvSpPr>
+        <p:spPr>
+          <a:xfrm>
+            <a:off x="850392" y="8664771"/>
+            <a:ext cx="3584448" cy="960120"/>
+          </a:xfrm>
+          <a:prstGeom prst="roundRect">
+            <a:avLst>
+              <a:gd name="adj" fmla="val 12000"/>
+            </a:avLst>
+          </a:prstGeom>
+          <a:solidFill>
+            <a:srgbClr val="EBF6FE"/>
+          </a:solidFill>
+          <a:ln>
+            <a:noFill/>
+          </a:ln>
+        </p:spPr>
+        <p:style>
+          <a:lnRef idx="1">
+            <a:schemeClr val="accent1"/>
+          </a:lnRef>
+          <a:fillRef idx="3">
+            <a:schemeClr val="accent1"/>
+          </a:fillRef>
+          <a:effectRef idx="2">
+            <a:schemeClr val="accent1"/>
+          </a:effectRef>
+          <a:fontRef idx="minor">
+            <a:schemeClr val="lt1"/>
+          </a:fontRef>
+        </p:style>
+        <p:txBody>
+          <a:bodyPr rtlCol="0" anchor="ctr"/>
+          <a:lstStyle/>
+          <a:p>
+            <a:pPr algn="ctr"/>
+            <a:endParaRPr/>
+          </a:p>
+        </p:txBody>
+      </p:sp>
+      <p:sp>
+        <p:nvSpPr>
+          <p:cNvPr id="29" name="TextBox 28"/>
+          <p:cNvSpPr txBox="1"/>
+          <p:nvPr/>
+        </p:nvSpPr>
+        <p:spPr>
+          <a:xfrm>
+            <a:off x="941832" y="8869733"/>
+            <a:ext cx="3401568" cy="590931"/>
+          </a:xfrm>
+          <a:prstGeom prst="rect">
+            <a:avLst/>
+          </a:prstGeom>
+          <a:noFill/>
+        </p:spPr>
+        <p:txBody>
+          <a:bodyPr wrap="square" lIns="18288" tIns="18288" rIns="18288" bIns="18288" anchor="ctr">
+            <a:spAutoFit/>
+          </a:bodyPr>
+          <a:lstStyle/>
+          <a:p>
+            <a:pPr algn="ctr">
+              <a:spcBef>
+                <a:spcPts val="0"/>
+              </a:spcBef>
+              <a:spcAft>
+                <a:spcPts val="0"/>
+              </a:spcAft>
+            </a:pPr>
+            <a:r>
+              <a:rPr lang="zh-CN" altLang="en-US" b="1" dirty="0">
+                <a:solidFill>
+                  <a:srgbClr val="193B5E"/>
+                </a:solidFill>
+                <a:latin typeface="Microsoft YaHei"/>
+              </a:rPr>
+              <a:t>演化集</a:t>
+            </a:r>
+            <a:endParaRPr sz="1800" b="1" dirty="0">
+              <a:solidFill>
+                <a:srgbClr val="193B5E"/>
+              </a:solidFill>
+              <a:latin typeface="Microsoft YaHei"/>
+            </a:endParaRPr>
+          </a:p>
+          <a:p>
+            <a:pPr algn="ctr">
+              <a:spcBef>
+                <a:spcPts val="0"/>
+              </a:spcBef>
+              <a:spcAft>
+                <a:spcPts val="0"/>
+              </a:spcAft>
+            </a:pPr>
+            <a:r>
+              <a:rPr sz="1800" b="1" dirty="0" err="1">
+                <a:solidFill>
+                  <a:srgbClr val="193B5E"/>
+                </a:solidFill>
+                <a:latin typeface="Microsoft YaHei"/>
+              </a:rPr>
+              <a:t>初始</a:t>
+            </a:r>
+            <a:r>
+              <a:rPr sz="1800" b="1" dirty="0">
+                <a:solidFill>
+                  <a:srgbClr val="193B5E"/>
+                </a:solidFill>
+                <a:latin typeface="Microsoft YaHei"/>
+              </a:rPr>
+              <a:t> Split</a:t>
+            </a:r>
+          </a:p>
+        </p:txBody>
+      </p:sp>
+      <p:sp>
+        <p:nvSpPr>
+          <p:cNvPr id="30" name="Rounded Rectangle 29"/>
+          <p:cNvSpPr/>
+          <p:nvPr/>
+        </p:nvSpPr>
+        <p:spPr>
+          <a:xfrm>
+            <a:off x="4809744" y="8664771"/>
+            <a:ext cx="3584448" cy="960120"/>
+          </a:xfrm>
+          <a:prstGeom prst="roundRect">
+            <a:avLst>
+              <a:gd name="adj" fmla="val 12000"/>
+            </a:avLst>
+          </a:prstGeom>
+          <a:solidFill>
+            <a:srgbClr val="EBF6FE"/>
+          </a:solidFill>
+          <a:ln>
+            <a:noFill/>
+          </a:ln>
+        </p:spPr>
+        <p:style>
+          <a:lnRef idx="1">
+            <a:schemeClr val="accent1"/>
+          </a:lnRef>
+          <a:fillRef idx="3">
+            <a:schemeClr val="accent1"/>
+          </a:fillRef>
+          <a:effectRef idx="2">
+            <a:schemeClr val="accent1"/>
+          </a:effectRef>
+          <a:fontRef idx="minor">
+            <a:schemeClr val="lt1"/>
+          </a:fontRef>
+        </p:style>
+        <p:txBody>
+          <a:bodyPr rtlCol="0" anchor="ctr"/>
+          <a:lstStyle/>
+          <a:p>
+            <a:pPr algn="ctr"/>
+            <a:endParaRPr/>
+          </a:p>
+        </p:txBody>
+      </p:sp>
+      <p:sp>
+        <p:nvSpPr>
+          <p:cNvPr id="31" name="TextBox 30"/>
+          <p:cNvSpPr txBox="1"/>
+          <p:nvPr/>
+        </p:nvSpPr>
+        <p:spPr>
+          <a:xfrm>
+            <a:off x="4901183" y="8785723"/>
+            <a:ext cx="3401568" cy="758952"/>
+          </a:xfrm>
+          <a:prstGeom prst="rect">
+            <a:avLst/>
+          </a:prstGeom>
+          <a:noFill/>
+        </p:spPr>
+        <p:txBody>
+          <a:bodyPr wrap="square" lIns="18288" tIns="18288" rIns="18288" bIns="18288" anchor="ctr">
+            <a:spAutoFit/>
+          </a:bodyPr>
+          <a:lstStyle/>
+          <a:p>
+            <a:pPr algn="ctr">
+              <a:spcBef>
+                <a:spcPts val="0"/>
+              </a:spcBef>
+              <a:spcAft>
+                <a:spcPts val="0"/>
+              </a:spcAft>
+            </a:pPr>
+            <a:r>
+              <a:rPr sz="1800" b="1" dirty="0" err="1">
+                <a:solidFill>
+                  <a:srgbClr val="193B5E"/>
+                </a:solidFill>
+                <a:latin typeface="Microsoft YaHei"/>
+              </a:rPr>
+              <a:t>五轮</a:t>
+            </a:r>
+            <a:endParaRPr sz="1800" b="1" dirty="0">
+              <a:solidFill>
+                <a:srgbClr val="193B5E"/>
+              </a:solidFill>
+              <a:latin typeface="Microsoft YaHei"/>
+            </a:endParaRPr>
+          </a:p>
+          <a:p>
+            <a:pPr algn="ctr">
+              <a:spcBef>
+                <a:spcPts val="0"/>
+              </a:spcBef>
+              <a:spcAft>
+                <a:spcPts val="0"/>
+              </a:spcAft>
+            </a:pPr>
+            <a:r>
+              <a:rPr sz="1800" b="1" dirty="0" err="1">
+                <a:solidFill>
+                  <a:srgbClr val="193B5E"/>
+                </a:solidFill>
+                <a:latin typeface="Microsoft YaHei"/>
+              </a:rPr>
+              <a:t>逐例子树反思</a:t>
+            </a:r>
+            <a:endParaRPr sz="1800" b="1" dirty="0">
+              <a:solidFill>
+                <a:srgbClr val="193B5E"/>
+              </a:solidFill>
+              <a:latin typeface="Microsoft YaHei"/>
+            </a:endParaRPr>
+          </a:p>
+        </p:txBody>
+      </p:sp>
+      <p:sp>
+        <p:nvSpPr>
+          <p:cNvPr id="32" name="Rounded Rectangle 31"/>
+          <p:cNvSpPr/>
+          <p:nvPr/>
+        </p:nvSpPr>
+        <p:spPr>
+          <a:xfrm>
+            <a:off x="8769096" y="8664771"/>
+            <a:ext cx="3584448" cy="960120"/>
+          </a:xfrm>
+          <a:prstGeom prst="roundRect">
+            <a:avLst>
+              <a:gd name="adj" fmla="val 12000"/>
+            </a:avLst>
+          </a:prstGeom>
+          <a:solidFill>
+            <a:srgbClr val="EBF6FE"/>
+          </a:solidFill>
+          <a:ln>
+            <a:noFill/>
+          </a:ln>
+        </p:spPr>
+        <p:style>
+          <a:lnRef idx="1">
+            <a:schemeClr val="accent1"/>
+          </a:lnRef>
+          <a:fillRef idx="3">
+            <a:schemeClr val="accent1"/>
+          </a:fillRef>
+          <a:effectRef idx="2">
+            <a:schemeClr val="accent1"/>
+          </a:effectRef>
+          <a:fontRef idx="minor">
+            <a:schemeClr val="lt1"/>
+          </a:fontRef>
+        </p:style>
+        <p:txBody>
+          <a:bodyPr rtlCol="0" anchor="ctr"/>
+          <a:lstStyle/>
+          <a:p>
+            <a:pPr algn="ctr"/>
+            <a:endParaRPr/>
+          </a:p>
+        </p:txBody>
+      </p:sp>
+      <p:sp>
+        <p:nvSpPr>
+          <p:cNvPr id="33" name="TextBox 32"/>
+          <p:cNvSpPr txBox="1"/>
+          <p:nvPr/>
+        </p:nvSpPr>
+        <p:spPr>
+          <a:xfrm>
+            <a:off x="8860536" y="8785723"/>
+            <a:ext cx="3401568" cy="758952"/>
+          </a:xfrm>
+          <a:prstGeom prst="rect">
+            <a:avLst/>
+          </a:prstGeom>
+          <a:noFill/>
+        </p:spPr>
+        <p:txBody>
+          <a:bodyPr wrap="square" lIns="18288" tIns="18288" rIns="18288" bIns="18288" anchor="ctr">
+            <a:spAutoFit/>
+          </a:bodyPr>
+          <a:lstStyle/>
+          <a:p>
+            <a:pPr algn="ctr">
+              <a:spcBef>
+                <a:spcPts val="0"/>
+              </a:spcBef>
+              <a:spcAft>
+                <a:spcPts val="0"/>
+              </a:spcAft>
+            </a:pPr>
+            <a:r>
+              <a:rPr sz="1800" b="1" dirty="0" err="1">
+                <a:solidFill>
+                  <a:srgbClr val="193B5E"/>
+                </a:solidFill>
+                <a:latin typeface="Microsoft YaHei"/>
+              </a:rPr>
+              <a:t>相同</a:t>
+            </a:r>
+            <a:r>
+              <a:rPr sz="1800" b="1" dirty="0">
+                <a:solidFill>
+                  <a:srgbClr val="193B5E"/>
+                </a:solidFill>
+                <a:latin typeface="Microsoft YaHei"/>
+              </a:rPr>
+              <a:t> Worker 与</a:t>
+            </a:r>
+          </a:p>
+          <a:p>
+            <a:pPr algn="ctr">
+              <a:spcBef>
+                <a:spcPts val="0"/>
+              </a:spcBef>
+              <a:spcAft>
+                <a:spcPts val="0"/>
+              </a:spcAft>
+            </a:pPr>
+            <a:r>
+              <a:rPr sz="1800" b="1" dirty="0">
+                <a:solidFill>
+                  <a:srgbClr val="193B5E"/>
+                </a:solidFill>
+                <a:latin typeface="Microsoft YaHei"/>
+              </a:rPr>
+              <a:t>Global Arbiter</a:t>
+            </a:r>
+          </a:p>
+        </p:txBody>
+      </p:sp>
+      <p:sp>
+        <p:nvSpPr>
+          <p:cNvPr id="34" name="Rounded Rectangle 33"/>
+          <p:cNvSpPr/>
+          <p:nvPr/>
+        </p:nvSpPr>
+        <p:spPr>
+          <a:xfrm>
+            <a:off x="12728448" y="8664771"/>
+            <a:ext cx="3739896" cy="960120"/>
+          </a:xfrm>
+          <a:prstGeom prst="roundRect">
+            <a:avLst>
+              <a:gd name="adj" fmla="val 12000"/>
+            </a:avLst>
+          </a:prstGeom>
+          <a:solidFill>
+            <a:srgbClr val="EBF6FE"/>
+          </a:solidFill>
+          <a:ln>
+            <a:noFill/>
+          </a:ln>
+        </p:spPr>
+        <p:style>
+          <a:lnRef idx="1">
+            <a:schemeClr val="accent1"/>
+          </a:lnRef>
+          <a:fillRef idx="3">
+            <a:schemeClr val="accent1"/>
+          </a:fillRef>
+          <a:effectRef idx="2">
+            <a:schemeClr val="accent1"/>
+          </a:effectRef>
+          <a:fontRef idx="minor">
+            <a:schemeClr val="lt1"/>
+          </a:fontRef>
+        </p:style>
+        <p:txBody>
+          <a:bodyPr rtlCol="0" anchor="ctr"/>
+          <a:lstStyle/>
+          <a:p>
+            <a:pPr algn="ctr"/>
+            <a:endParaRPr/>
+          </a:p>
+        </p:txBody>
+      </p:sp>
+      <p:sp>
+        <p:nvSpPr>
+          <p:cNvPr id="35" name="TextBox 34"/>
+          <p:cNvSpPr txBox="1"/>
+          <p:nvPr/>
+        </p:nvSpPr>
+        <p:spPr>
+          <a:xfrm>
+            <a:off x="12819888" y="8869733"/>
+            <a:ext cx="3557015" cy="590931"/>
+          </a:xfrm>
+          <a:prstGeom prst="rect">
+            <a:avLst/>
+          </a:prstGeom>
+          <a:noFill/>
+        </p:spPr>
+        <p:txBody>
+          <a:bodyPr wrap="square" lIns="18288" tIns="18288" rIns="18288" bIns="18288" anchor="ctr">
+            <a:spAutoFit/>
+          </a:bodyPr>
+          <a:lstStyle/>
+          <a:p>
+            <a:pPr algn="ctr">
+              <a:spcBef>
+                <a:spcPts val="0"/>
+              </a:spcBef>
+              <a:spcAft>
+                <a:spcPts val="0"/>
+              </a:spcAft>
+            </a:pPr>
+            <a:r>
+              <a:rPr sz="1800" b="1" dirty="0">
+                <a:solidFill>
+                  <a:srgbClr val="193B5E"/>
+                </a:solidFill>
+                <a:latin typeface="Microsoft YaHei"/>
+              </a:rPr>
+              <a:t>VLRB K=3</a:t>
+            </a:r>
+          </a:p>
+          <a:p>
+            <a:pPr algn="ctr">
+              <a:spcBef>
+                <a:spcPts val="0"/>
+              </a:spcBef>
+              <a:spcAft>
+                <a:spcPts val="0"/>
+              </a:spcAft>
+            </a:pPr>
+            <a:r>
+              <a:rPr sz="1800" b="1" dirty="0" err="1">
+                <a:solidFill>
+                  <a:srgbClr val="193B5E"/>
+                </a:solidFill>
+                <a:latin typeface="Microsoft YaHei"/>
+              </a:rPr>
+              <a:t>主看</a:t>
+            </a:r>
+            <a:r>
+              <a:rPr lang="en-US" altLang="zh-CN" sz="1800" b="1" dirty="0" err="1">
+                <a:solidFill>
+                  <a:srgbClr val="193B5E"/>
+                </a:solidFill>
+                <a:latin typeface="Microsoft YaHei"/>
+              </a:rPr>
+              <a:t>heldout</a:t>
+            </a:r>
+            <a:r>
+              <a:rPr sz="1800" b="1" dirty="0" err="1">
+                <a:solidFill>
+                  <a:srgbClr val="193B5E"/>
+                </a:solidFill>
+                <a:latin typeface="Microsoft YaHei"/>
+              </a:rPr>
+              <a:t>幻觉</a:t>
+            </a:r>
+            <a:r>
+              <a:rPr lang="zh-CN" altLang="en-US" sz="1800" b="1" dirty="0">
+                <a:solidFill>
+                  <a:srgbClr val="193B5E"/>
+                </a:solidFill>
+                <a:latin typeface="Microsoft YaHei"/>
+              </a:rPr>
+              <a:t>集</a:t>
+            </a:r>
+            <a:r>
+              <a:rPr sz="1800" b="1" dirty="0">
+                <a:solidFill>
+                  <a:srgbClr val="193B5E"/>
+                </a:solidFill>
+                <a:latin typeface="Microsoft YaHei"/>
+              </a:rPr>
+              <a:t> 648</a:t>
+            </a:r>
+          </a:p>
+        </p:txBody>
+      </p:sp>
+      <p:sp>
+        <p:nvSpPr>
+          <p:cNvPr id="36" name="TextBox 35"/>
+          <p:cNvSpPr txBox="1"/>
+          <p:nvPr/>
+        </p:nvSpPr>
+        <p:spPr>
+          <a:xfrm>
+            <a:off x="4507992" y="8849732"/>
+            <a:ext cx="292608" cy="530352"/>
+          </a:xfrm>
+          <a:prstGeom prst="rect">
+            <a:avLst/>
+          </a:prstGeom>
+          <a:noFill/>
+        </p:spPr>
+        <p:txBody>
+          <a:bodyPr wrap="square" lIns="18288" tIns="18288" rIns="18288" bIns="18288" anchor="ctr">
+            <a:spAutoFit/>
+          </a:bodyPr>
+          <a:lstStyle/>
+          <a:p>
+            <a:pPr algn="ctr">
+              <a:spcBef>
+                <a:spcPts val="0"/>
+              </a:spcBef>
+              <a:spcAft>
+                <a:spcPts val="0"/>
+              </a:spcAft>
+            </a:pPr>
+            <a:r>
+              <a:rPr sz="2700" b="1">
+                <a:solidFill>
+                  <a:srgbClr val="075B97"/>
+                </a:solidFill>
+                <a:latin typeface="Microsoft YaHei"/>
+              </a:rPr>
+              <a:t>→</a:t>
+            </a:r>
+          </a:p>
+        </p:txBody>
+      </p:sp>
+      <p:sp>
+        <p:nvSpPr>
+          <p:cNvPr id="37" name="TextBox 36"/>
+          <p:cNvSpPr txBox="1"/>
+          <p:nvPr/>
+        </p:nvSpPr>
+        <p:spPr>
+          <a:xfrm>
+            <a:off x="8467344" y="8849732"/>
+            <a:ext cx="292608" cy="530352"/>
+          </a:xfrm>
+          <a:prstGeom prst="rect">
+            <a:avLst/>
+          </a:prstGeom>
+          <a:noFill/>
+        </p:spPr>
+        <p:txBody>
+          <a:bodyPr wrap="square" lIns="18288" tIns="18288" rIns="18288" bIns="18288" anchor="ctr">
+            <a:spAutoFit/>
+          </a:bodyPr>
+          <a:lstStyle/>
+          <a:p>
+            <a:pPr algn="ctr">
+              <a:spcBef>
+                <a:spcPts val="0"/>
+              </a:spcBef>
+              <a:spcAft>
+                <a:spcPts val="0"/>
+              </a:spcAft>
+            </a:pPr>
+            <a:r>
+              <a:rPr sz="2700" b="1">
+                <a:solidFill>
+                  <a:srgbClr val="075B97"/>
+                </a:solidFill>
+                <a:latin typeface="Microsoft YaHei"/>
+              </a:rPr>
+              <a:t>→</a:t>
+            </a:r>
+          </a:p>
+        </p:txBody>
+      </p:sp>
+      <p:sp>
+        <p:nvSpPr>
+          <p:cNvPr id="38" name="TextBox 37"/>
+          <p:cNvSpPr txBox="1"/>
+          <p:nvPr/>
+        </p:nvSpPr>
+        <p:spPr>
+          <a:xfrm>
+            <a:off x="12426696" y="8849732"/>
+            <a:ext cx="292608" cy="530352"/>
+          </a:xfrm>
+          <a:prstGeom prst="rect">
+            <a:avLst/>
+          </a:prstGeom>
+          <a:noFill/>
+        </p:spPr>
+        <p:txBody>
+          <a:bodyPr wrap="square" lIns="18288" tIns="18288" rIns="18288" bIns="18288" anchor="ctr">
+            <a:spAutoFit/>
+          </a:bodyPr>
+          <a:lstStyle/>
+          <a:p>
+            <a:pPr algn="ctr">
+              <a:spcBef>
+                <a:spcPts val="0"/>
+              </a:spcBef>
+              <a:spcAft>
+                <a:spcPts val="0"/>
+              </a:spcAft>
+            </a:pPr>
+            <a:r>
+              <a:rPr sz="2700" b="1">
+                <a:solidFill>
+                  <a:srgbClr val="075B97"/>
+                </a:solidFill>
+                <a:latin typeface="Microsoft YaHei"/>
+              </a:rPr>
+              <a:t>→</a:t>
+            </a:r>
+          </a:p>
+        </p:txBody>
+      </p:sp>
+      <p:sp>
+        <p:nvSpPr>
+          <p:cNvPr id="39" name="Rounded Rectangle 38"/>
+          <p:cNvSpPr/>
+          <p:nvPr/>
+        </p:nvSpPr>
+        <p:spPr>
+          <a:xfrm>
+            <a:off x="850392" y="10384677"/>
+            <a:ext cx="15617951" cy="667512"/>
+          </a:xfrm>
+          <a:prstGeom prst="roundRect">
+            <a:avLst>
+              <a:gd name="adj" fmla="val 12000"/>
+            </a:avLst>
+          </a:prstGeom>
+          <a:solidFill>
+            <a:srgbClr val="F4F9FD"/>
+          </a:solidFill>
+          <a:ln>
+            <a:noFill/>
+          </a:ln>
+        </p:spPr>
+        <p:style>
+          <a:lnRef idx="1">
+            <a:schemeClr val="accent1"/>
+          </a:lnRef>
+          <a:fillRef idx="3">
+            <a:schemeClr val="accent1"/>
+          </a:fillRef>
+          <a:effectRef idx="2">
+            <a:schemeClr val="accent1"/>
+          </a:effectRef>
+          <a:fontRef idx="minor">
+            <a:schemeClr val="lt1"/>
+          </a:fontRef>
+        </p:style>
+        <p:txBody>
+          <a:bodyPr rtlCol="0" anchor="ctr"/>
+          <a:lstStyle/>
+          <a:p>
+            <a:pPr algn="ctr"/>
+            <a:endParaRPr/>
+          </a:p>
+        </p:txBody>
+      </p:sp>
+      <p:sp>
+        <p:nvSpPr>
+          <p:cNvPr id="40" name="TextBox 39"/>
+          <p:cNvSpPr txBox="1"/>
+          <p:nvPr/>
+        </p:nvSpPr>
+        <p:spPr>
+          <a:xfrm>
+            <a:off x="1078992" y="10532228"/>
+            <a:ext cx="15188184" cy="365760"/>
+          </a:xfrm>
+          <a:prstGeom prst="rect">
+            <a:avLst/>
+          </a:prstGeom>
+          <a:noFill/>
+        </p:spPr>
+        <p:txBody>
+          <a:bodyPr wrap="square" lIns="18288" tIns="18288" rIns="18288" bIns="18288" anchor="ctr">
+            <a:spAutoFit/>
+          </a:bodyPr>
+          <a:lstStyle/>
+          <a:p>
+            <a:pPr algn="l">
+              <a:spcBef>
+                <a:spcPts val="0"/>
+              </a:spcBef>
+              <a:spcAft>
+                <a:spcPts val="0"/>
+              </a:spcAft>
+            </a:pPr>
+            <a:r>
+              <a:rPr sz="1900" b="1" dirty="0" err="1">
+                <a:solidFill>
+                  <a:srgbClr val="193B5E"/>
+                </a:solidFill>
+                <a:latin typeface="Microsoft YaHei"/>
+              </a:rPr>
+              <a:t>研究问题：把上层准则交给目标数据归纳，能否改善未见样本上的最终判断</a:t>
+            </a:r>
+            <a:r>
+              <a:rPr sz="1900" b="1" dirty="0">
+                <a:solidFill>
+                  <a:srgbClr val="193B5E"/>
+                </a:solidFill>
+                <a:latin typeface="Microsoft YaHei"/>
+              </a:rPr>
+              <a:t>？</a:t>
+            </a:r>
+          </a:p>
+        </p:txBody>
+      </p:sp>
+    </p:spTree>
   </p:cSld>
   <p:clrMapOvr>
     <a:masterClrMapping/>
